--- a/大貴/添付ファイル/主要ポイント会員属性の偏り比較.pptx
+++ b/大貴/添付ファイル/主要ポイント会員属性の偏り比較.pptx
@@ -11,9 +11,11 @@
     <p:sldId id="259" r:id="rId5"/>
     <p:sldId id="260" r:id="rId6"/>
     <p:sldId id="261" r:id="rId7"/>
+    <p:sldId id="262" r:id="rId8"/>
+    <p:sldId id="263" r:id="rId9"/>
   </p:sldIdLst>
   <p:notesMasterIdLst>
-    <p:notesMasterId r:id="rId8"/>
+    <p:notesMasterId r:id="rId10"/>
   </p:notesMasterIdLst>
   <p:sldSz cx="12192000" cy="6858000"/>
   <p:notesSz cx="6858000" cy="12192000"/>
@@ -971,6 +973,182 @@
             <a:fld id="{F7021451-1387-4CA6-816F-3879F97B5CBC}" type="slidenum">
               <a:rPr lang="en-US"/>
               <a:t>6</a:t>
+            </a:fld>
+            <a:endParaRPr lang="en-US"/>
+          </a:p>
+        </p:txBody>
+      </p:sp>
+    </p:spTree>
+    <p:extLst>
+      <p:ext uri="{BB962C8B-B14F-4D97-AF65-F5344CB8AC3E}">
+        <p14:creationId xmlns:p14="http://schemas.microsoft.com/office/powerpoint/2010/main" val="1024086991"/>
+      </p:ext>
+    </p:extLst>
+  </p:cSld>
+  <p:clrMapOvr>
+    <a:masterClrMapping/>
+  </p:clrMapOvr>
+</p:notes>
+</file>
+
+<file path=ppt/notesSlides/notesSlide7.xml><?xml version="1.0" encoding="utf-8"?>
+<p:notes xmlns:a="http://schemas.openxmlformats.org/drawingml/2006/main" xmlns:r="http://schemas.openxmlformats.org/officeDocument/2006/relationships" xmlns:p="http://schemas.openxmlformats.org/presentationml/2006/main">
+  <p:cSld>
+    <p:spTree>
+      <p:nvGrpSpPr>
+        <p:cNvPr id="1" name=""/>
+        <p:cNvGrpSpPr/>
+        <p:nvPr/>
+      </p:nvGrpSpPr>
+      <p:grpSpPr>
+        <a:xfrm>
+          <a:off x="0" y="0"/>
+          <a:ext cx="0" cy="0"/>
+          <a:chOff x="0" y="0"/>
+          <a:chExt cx="0" cy="0"/>
+        </a:xfrm>
+      </p:grpSpPr>
+      <p:sp>
+        <p:nvSpPr>
+          <p:cNvPr id="2" name="Slide Image Placeholder 1"/>
+          <p:cNvSpPr>
+            <a:spLocks noGrp="1" noRot="1" noChangeAspect="1"/>
+          </p:cNvSpPr>
+          <p:nvPr>
+            <p:ph type="sldImg"/>
+          </p:nvPr>
+        </p:nvSpPr>
+        <p:spPr/>
+      </p:sp>
+      <p:sp>
+        <p:nvSpPr>
+          <p:cNvPr id="3" name="Notes Placeholder 2"/>
+          <p:cNvSpPr>
+            <a:spLocks noGrp="1"/>
+          </p:cNvSpPr>
+          <p:nvPr>
+            <p:ph type="body" idx="1"/>
+          </p:nvPr>
+        </p:nvSpPr>
+        <p:spPr/>
+        <p:txBody>
+          <a:bodyPr/>
+          <a:lstStyle/>
+          <a:p>
+            <a:r>
+              <a:rPr lang="en-US" dirty="0"/>
+              <a:t/>
+            </a:r>
+            <a:endParaRPr lang="en-US" dirty="0"/>
+          </a:p>
+        </p:txBody>
+      </p:sp>
+      <p:sp>
+        <p:nvSpPr>
+          <p:cNvPr id="4" name="Slide Number Placeholder 3"/>
+          <p:cNvSpPr>
+            <a:spLocks noGrp="1"/>
+          </p:cNvSpPr>
+          <p:nvPr>
+            <p:ph type="sldNum" sz="quarter" idx="10"/>
+          </p:nvPr>
+        </p:nvSpPr>
+        <p:spPr/>
+        <p:txBody>
+          <a:bodyPr/>
+          <a:lstStyle/>
+          <a:p>
+            <a:fld id="{F7021451-1387-4CA6-816F-3879F97B5CBC}" type="slidenum">
+              <a:rPr lang="en-US"/>
+              <a:t>7</a:t>
+            </a:fld>
+            <a:endParaRPr lang="en-US"/>
+          </a:p>
+        </p:txBody>
+      </p:sp>
+    </p:spTree>
+    <p:extLst>
+      <p:ext uri="{BB962C8B-B14F-4D97-AF65-F5344CB8AC3E}">
+        <p14:creationId xmlns:p14="http://schemas.microsoft.com/office/powerpoint/2010/main" val="1024086991"/>
+      </p:ext>
+    </p:extLst>
+  </p:cSld>
+  <p:clrMapOvr>
+    <a:masterClrMapping/>
+  </p:clrMapOvr>
+</p:notes>
+</file>
+
+<file path=ppt/notesSlides/notesSlide8.xml><?xml version="1.0" encoding="utf-8"?>
+<p:notes xmlns:a="http://schemas.openxmlformats.org/drawingml/2006/main" xmlns:r="http://schemas.openxmlformats.org/officeDocument/2006/relationships" xmlns:p="http://schemas.openxmlformats.org/presentationml/2006/main">
+  <p:cSld>
+    <p:spTree>
+      <p:nvGrpSpPr>
+        <p:cNvPr id="1" name=""/>
+        <p:cNvGrpSpPr/>
+        <p:nvPr/>
+      </p:nvGrpSpPr>
+      <p:grpSpPr>
+        <a:xfrm>
+          <a:off x="0" y="0"/>
+          <a:ext cx="0" cy="0"/>
+          <a:chOff x="0" y="0"/>
+          <a:chExt cx="0" cy="0"/>
+        </a:xfrm>
+      </p:grpSpPr>
+      <p:sp>
+        <p:nvSpPr>
+          <p:cNvPr id="2" name="Slide Image Placeholder 1"/>
+          <p:cNvSpPr>
+            <a:spLocks noGrp="1" noRot="1" noChangeAspect="1"/>
+          </p:cNvSpPr>
+          <p:nvPr>
+            <p:ph type="sldImg"/>
+          </p:nvPr>
+        </p:nvSpPr>
+        <p:spPr/>
+      </p:sp>
+      <p:sp>
+        <p:nvSpPr>
+          <p:cNvPr id="3" name="Notes Placeholder 2"/>
+          <p:cNvSpPr>
+            <a:spLocks noGrp="1"/>
+          </p:cNvSpPr>
+          <p:nvPr>
+            <p:ph type="body" idx="1"/>
+          </p:nvPr>
+        </p:nvSpPr>
+        <p:spPr/>
+        <p:txBody>
+          <a:bodyPr/>
+          <a:lstStyle/>
+          <a:p>
+            <a:r>
+              <a:rPr lang="en-US" dirty="0"/>
+              <a:t/>
+            </a:r>
+            <a:endParaRPr lang="en-US" dirty="0"/>
+          </a:p>
+        </p:txBody>
+      </p:sp>
+      <p:sp>
+        <p:nvSpPr>
+          <p:cNvPr id="4" name="Slide Number Placeholder 3"/>
+          <p:cNvSpPr>
+            <a:spLocks noGrp="1"/>
+          </p:cNvSpPr>
+          <p:nvPr>
+            <p:ph type="sldNum" sz="quarter" idx="10"/>
+          </p:nvPr>
+        </p:nvSpPr>
+        <p:spPr/>
+        <p:txBody>
+          <a:bodyPr/>
+          <a:lstStyle/>
+          <a:p>
+            <a:fld id="{F7021451-1387-4CA6-816F-3879F97B5CBC}" type="slidenum">
+              <a:rPr lang="en-US"/>
+              <a:t>8</a:t>
             </a:fld>
             <a:endParaRPr lang="en-US"/>
           </a:p>
@@ -5746,6 +5924,2197 @@
     <p:bg>
       <p:bgPr>
         <a:solidFill>
+          <a:srgbClr val="F4F6FB"/>
+        </a:solidFill>
+      </p:bgPr>
+    </p:bg>
+    <p:spTree>
+      <p:nvGrpSpPr>
+        <p:cNvPr id="1" name=""/>
+        <p:cNvGrpSpPr/>
+        <p:nvPr/>
+      </p:nvGrpSpPr>
+      <p:grpSpPr>
+        <a:xfrm>
+          <a:off x="0" y="0"/>
+          <a:ext cx="0" cy="0"/>
+          <a:chOff x="0" y="0"/>
+          <a:chExt cx="0" cy="0"/>
+        </a:xfrm>
+      </p:grpSpPr>
+      <p:sp>
+        <p:nvSpPr>
+          <p:cNvPr id="2" name="Text 0"/>
+          <p:cNvSpPr/>
+          <p:nvPr/>
+        </p:nvSpPr>
+        <p:spPr>
+          <a:xfrm>
+            <a:off x="457200" y="365760"/>
+            <a:ext cx="11247120" cy="502920"/>
+          </a:xfrm>
+          <a:prstGeom prst="rect">
+            <a:avLst/>
+          </a:prstGeom>
+          <a:noFill/>
+          <a:ln/>
+        </p:spPr>
+        <p:txBody>
+          <a:bodyPr wrap="square" lIns="0" tIns="0" rIns="0" bIns="0" rtlCol="0" anchor="ctr"/>
+          <a:lstStyle/>
+          <a:p>
+            <a:pPr indent="0" marL="0">
+              <a:buNone/>
+            </a:pPr>
+            <a:r>
+              <a:rPr lang="en-US" sz="2300" b="1" dirty="0">
+                <a:solidFill>
+                  <a:srgbClr val="1E2761"/>
+                </a:solidFill>
+                <a:latin typeface="Cambria" pitchFamily="34" charset="0"/>
+                <a:ea typeface="Cambria" pitchFamily="34" charset="-122"/>
+                <a:cs typeface="Cambria" pitchFamily="34" charset="-120"/>
+              </a:rPr>
+              <a:t>独自ポイントの経済合理性 ―流行る理由とコスト構造</a:t>
+            </a:r>
+            <a:endParaRPr lang="en-US" sz="2300" dirty="0"/>
+          </a:p>
+        </p:txBody>
+      </p:sp>
+      <p:sp>
+        <p:nvSpPr>
+          <p:cNvPr id="3" name="Text 1"/>
+          <p:cNvSpPr/>
+          <p:nvPr/>
+        </p:nvSpPr>
+        <p:spPr>
+          <a:xfrm>
+            <a:off x="457200" y="1051560"/>
+            <a:ext cx="5486400" cy="320040"/>
+          </a:xfrm>
+          <a:prstGeom prst="rect">
+            <a:avLst/>
+          </a:prstGeom>
+          <a:noFill/>
+          <a:ln/>
+        </p:spPr>
+        <p:txBody>
+          <a:bodyPr wrap="square" lIns="0" tIns="0" rIns="0" bIns="0" rtlCol="0" anchor="ctr"/>
+          <a:lstStyle/>
+          <a:p>
+            <a:pPr indent="0" marL="0">
+              <a:buNone/>
+            </a:pPr>
+            <a:r>
+              <a:rPr lang="en-US" sz="1300" b="1" dirty="0">
+                <a:solidFill>
+                  <a:srgbClr val="1E2761"/>
+                </a:solidFill>
+                <a:latin typeface="Calibri" pitchFamily="34" charset="0"/>
+                <a:ea typeface="Calibri" pitchFamily="34" charset="-122"/>
+                <a:cs typeface="Calibri" pitchFamily="34" charset="-120"/>
+              </a:rPr>
+              <a:t>なぜ独自ポイントが流行るのか</a:t>
+            </a:r>
+            <a:endParaRPr lang="en-US" sz="1300" dirty="0"/>
+          </a:p>
+        </p:txBody>
+      </p:sp>
+      <p:sp>
+        <p:nvSpPr>
+          <p:cNvPr id="4" name="Shape 2"/>
+          <p:cNvSpPr/>
+          <p:nvPr/>
+        </p:nvSpPr>
+        <p:spPr>
+          <a:xfrm>
+            <a:off x="457200" y="1490472"/>
+            <a:ext cx="274320" cy="274320"/>
+          </a:xfrm>
+          <a:prstGeom prst="ellipse">
+            <a:avLst/>
+          </a:prstGeom>
+          <a:solidFill>
+            <a:srgbClr val="334A8C"/>
+          </a:solidFill>
+          <a:ln/>
+        </p:spPr>
+      </p:sp>
+      <p:sp>
+        <p:nvSpPr>
+          <p:cNvPr id="5" name="Text 3"/>
+          <p:cNvSpPr/>
+          <p:nvPr/>
+        </p:nvSpPr>
+        <p:spPr>
+          <a:xfrm>
+            <a:off x="457200" y="1490472"/>
+            <a:ext cx="274320" cy="274320"/>
+          </a:xfrm>
+          <a:prstGeom prst="rect">
+            <a:avLst/>
+          </a:prstGeom>
+          <a:noFill/>
+          <a:ln/>
+        </p:spPr>
+        <p:txBody>
+          <a:bodyPr wrap="square" lIns="0" tIns="0" rIns="0" bIns="0" rtlCol="0" anchor="ctr"/>
+          <a:lstStyle/>
+          <a:p>
+            <a:pPr algn="ctr" indent="0" marL="0">
+              <a:buNone/>
+            </a:pPr>
+            <a:r>
+              <a:rPr lang="en-US" sz="1200" b="1" dirty="0">
+                <a:solidFill>
+                  <a:srgbClr val="FFFFFF"/>
+                </a:solidFill>
+                <a:latin typeface="Calibri" pitchFamily="34" charset="0"/>
+                <a:ea typeface="Calibri" pitchFamily="34" charset="-122"/>
+                <a:cs typeface="Calibri" pitchFamily="34" charset="-120"/>
+              </a:rPr>
+              <a:t>1</a:t>
+            </a:r>
+            <a:endParaRPr lang="en-US" sz="1200" dirty="0"/>
+          </a:p>
+        </p:txBody>
+      </p:sp>
+      <p:sp>
+        <p:nvSpPr>
+          <p:cNvPr id="6" name="Text 4"/>
+          <p:cNvSpPr/>
+          <p:nvPr/>
+        </p:nvSpPr>
+        <p:spPr>
+          <a:xfrm>
+            <a:off x="868680" y="1408176"/>
+            <a:ext cx="5074920" cy="1051560"/>
+          </a:xfrm>
+          <a:prstGeom prst="rect">
+            <a:avLst/>
+          </a:prstGeom>
+          <a:noFill/>
+          <a:ln/>
+        </p:spPr>
+        <p:txBody>
+          <a:bodyPr wrap="square" lIns="0" tIns="0" rIns="0" bIns="0" rtlCol="0" anchor="t"/>
+          <a:lstStyle/>
+          <a:p>
+            <a:pPr indent="0" marL="0">
+              <a:spcAft>
+                <a:spcPts val="200"/>
+              </a:spcAft>
+              <a:buNone/>
+            </a:pPr>
+            <a:r>
+              <a:rPr lang="en-US" sz="1200" b="1" dirty="0">
+                <a:solidFill>
+                  <a:srgbClr val="1B1B2F"/>
+                </a:solidFill>
+                <a:latin typeface="Calibri" pitchFamily="34" charset="0"/>
+                <a:ea typeface="Calibri" pitchFamily="34" charset="-122"/>
+                <a:cs typeface="Calibri" pitchFamily="34" charset="-120"/>
+              </a:rPr>
+              <a:t>顧客データを自社で直接保有できる</a:t>
+            </a:r>
+            <a:endParaRPr lang="en-US" sz="1200" dirty="0"/>
+          </a:p>
+          <a:p>
+            <a:pPr indent="0" marL="0">
+              <a:buNone/>
+            </a:pPr>
+            <a:r>
+              <a:rPr lang="en-US" sz="1000" dirty="0">
+                <a:solidFill>
+                  <a:srgbClr val="5A6B8C"/>
+                </a:solidFill>
+                <a:latin typeface="Calibri" pitchFamily="34" charset="0"/>
+                <a:ea typeface="Calibri" pitchFamily="34" charset="-122"/>
+                <a:cs typeface="Calibri" pitchFamily="34" charset="-120"/>
+              </a:rPr>
+              <a:t>共通ポイントは購買データが事業者側にも渡るが、独自なら顧客データ・ID-POSを自社で独占できる</a:t>
+            </a:r>
+            <a:endParaRPr lang="en-US" sz="1200" dirty="0"/>
+          </a:p>
+        </p:txBody>
+      </p:sp>
+      <p:sp>
+        <p:nvSpPr>
+          <p:cNvPr id="7" name="Shape 5"/>
+          <p:cNvSpPr/>
+          <p:nvPr/>
+        </p:nvSpPr>
+        <p:spPr>
+          <a:xfrm>
+            <a:off x="457200" y="2660904"/>
+            <a:ext cx="274320" cy="274320"/>
+          </a:xfrm>
+          <a:prstGeom prst="ellipse">
+            <a:avLst/>
+          </a:prstGeom>
+          <a:solidFill>
+            <a:srgbClr val="334A8C"/>
+          </a:solidFill>
+          <a:ln/>
+        </p:spPr>
+      </p:sp>
+      <p:sp>
+        <p:nvSpPr>
+          <p:cNvPr id="8" name="Text 6"/>
+          <p:cNvSpPr/>
+          <p:nvPr/>
+        </p:nvSpPr>
+        <p:spPr>
+          <a:xfrm>
+            <a:off x="457200" y="2660904"/>
+            <a:ext cx="274320" cy="274320"/>
+          </a:xfrm>
+          <a:prstGeom prst="rect">
+            <a:avLst/>
+          </a:prstGeom>
+          <a:noFill/>
+          <a:ln/>
+        </p:spPr>
+        <p:txBody>
+          <a:bodyPr wrap="square" lIns="0" tIns="0" rIns="0" bIns="0" rtlCol="0" anchor="ctr"/>
+          <a:lstStyle/>
+          <a:p>
+            <a:pPr algn="ctr" indent="0" marL="0">
+              <a:buNone/>
+            </a:pPr>
+            <a:r>
+              <a:rPr lang="en-US" sz="1200" b="1" dirty="0">
+                <a:solidFill>
+                  <a:srgbClr val="FFFFFF"/>
+                </a:solidFill>
+                <a:latin typeface="Calibri" pitchFamily="34" charset="0"/>
+                <a:ea typeface="Calibri" pitchFamily="34" charset="-122"/>
+                <a:cs typeface="Calibri" pitchFamily="34" charset="-120"/>
+              </a:rPr>
+              <a:t>2</a:t>
+            </a:r>
+            <a:endParaRPr lang="en-US" sz="1200" dirty="0"/>
+          </a:p>
+        </p:txBody>
+      </p:sp>
+      <p:sp>
+        <p:nvSpPr>
+          <p:cNvPr id="9" name="Text 7"/>
+          <p:cNvSpPr/>
+          <p:nvPr/>
+        </p:nvSpPr>
+        <p:spPr>
+          <a:xfrm>
+            <a:off x="868680" y="2578608"/>
+            <a:ext cx="5074920" cy="1051560"/>
+          </a:xfrm>
+          <a:prstGeom prst="rect">
+            <a:avLst/>
+          </a:prstGeom>
+          <a:noFill/>
+          <a:ln/>
+        </p:spPr>
+        <p:txBody>
+          <a:bodyPr wrap="square" lIns="0" tIns="0" rIns="0" bIns="0" rtlCol="0" anchor="t"/>
+          <a:lstStyle/>
+          <a:p>
+            <a:pPr indent="0" marL="0">
+              <a:spcAft>
+                <a:spcPts val="200"/>
+              </a:spcAft>
+              <a:buNone/>
+            </a:pPr>
+            <a:r>
+              <a:rPr lang="en-US" sz="1200" b="1" dirty="0">
+                <a:solidFill>
+                  <a:srgbClr val="1B1B2F"/>
+                </a:solidFill>
+                <a:latin typeface="Calibri" pitchFamily="34" charset="0"/>
+                <a:ea typeface="Calibri" pitchFamily="34" charset="-122"/>
+                <a:cs typeface="Calibri" pitchFamily="34" charset="-120"/>
+              </a:rPr>
+              <a:t>仲介手数料が発生しない/低い</a:t>
+            </a:r>
+            <a:endParaRPr lang="en-US" sz="1200" dirty="0"/>
+          </a:p>
+          <a:p>
+            <a:pPr indent="0" marL="0">
+              <a:buNone/>
+            </a:pPr>
+            <a:r>
+              <a:rPr lang="en-US" sz="1000" dirty="0">
+                <a:solidFill>
+                  <a:srgbClr val="5A6B8C"/>
+                </a:solidFill>
+                <a:latin typeface="Calibri" pitchFamily="34" charset="0"/>
+                <a:ea typeface="Calibri" pitchFamily="34" charset="-122"/>
+                <a:cs typeface="Calibri" pitchFamily="34" charset="-120"/>
+              </a:rPr>
+              <a:t>共通ポイントは原資+手数料を事業者に払うが、独自ポイントはシステム運用費のみで済む</a:t>
+            </a:r>
+            <a:endParaRPr lang="en-US" sz="1200" dirty="0"/>
+          </a:p>
+        </p:txBody>
+      </p:sp>
+      <p:sp>
+        <p:nvSpPr>
+          <p:cNvPr id="10" name="Shape 8"/>
+          <p:cNvSpPr/>
+          <p:nvPr/>
+        </p:nvSpPr>
+        <p:spPr>
+          <a:xfrm>
+            <a:off x="457200" y="3831336"/>
+            <a:ext cx="274320" cy="274320"/>
+          </a:xfrm>
+          <a:prstGeom prst="ellipse">
+            <a:avLst/>
+          </a:prstGeom>
+          <a:solidFill>
+            <a:srgbClr val="334A8C"/>
+          </a:solidFill>
+          <a:ln/>
+        </p:spPr>
+      </p:sp>
+      <p:sp>
+        <p:nvSpPr>
+          <p:cNvPr id="11" name="Text 9"/>
+          <p:cNvSpPr/>
+          <p:nvPr/>
+        </p:nvSpPr>
+        <p:spPr>
+          <a:xfrm>
+            <a:off x="457200" y="3831336"/>
+            <a:ext cx="274320" cy="274320"/>
+          </a:xfrm>
+          <a:prstGeom prst="rect">
+            <a:avLst/>
+          </a:prstGeom>
+          <a:noFill/>
+          <a:ln/>
+        </p:spPr>
+        <p:txBody>
+          <a:bodyPr wrap="square" lIns="0" tIns="0" rIns="0" bIns="0" rtlCol="0" anchor="ctr"/>
+          <a:lstStyle/>
+          <a:p>
+            <a:pPr algn="ctr" indent="0" marL="0">
+              <a:buNone/>
+            </a:pPr>
+            <a:r>
+              <a:rPr lang="en-US" sz="1200" b="1" dirty="0">
+                <a:solidFill>
+                  <a:srgbClr val="FFFFFF"/>
+                </a:solidFill>
+                <a:latin typeface="Calibri" pitchFamily="34" charset="0"/>
+                <a:ea typeface="Calibri" pitchFamily="34" charset="-122"/>
+                <a:cs typeface="Calibri" pitchFamily="34" charset="-120"/>
+              </a:rPr>
+              <a:t>3</a:t>
+            </a:r>
+            <a:endParaRPr lang="en-US" sz="1200" dirty="0"/>
+          </a:p>
+        </p:txBody>
+      </p:sp>
+      <p:sp>
+        <p:nvSpPr>
+          <p:cNvPr id="12" name="Text 10"/>
+          <p:cNvSpPr/>
+          <p:nvPr/>
+        </p:nvSpPr>
+        <p:spPr>
+          <a:xfrm>
+            <a:off x="868680" y="3749040"/>
+            <a:ext cx="5074920" cy="1051560"/>
+          </a:xfrm>
+          <a:prstGeom prst="rect">
+            <a:avLst/>
+          </a:prstGeom>
+          <a:noFill/>
+          <a:ln/>
+        </p:spPr>
+        <p:txBody>
+          <a:bodyPr wrap="square" lIns="0" tIns="0" rIns="0" bIns="0" rtlCol="0" anchor="t"/>
+          <a:lstStyle/>
+          <a:p>
+            <a:pPr indent="0" marL="0">
+              <a:spcAft>
+                <a:spcPts val="200"/>
+              </a:spcAft>
+              <a:buNone/>
+            </a:pPr>
+            <a:r>
+              <a:rPr lang="en-US" sz="1200" b="1" dirty="0">
+                <a:solidFill>
+                  <a:srgbClr val="1B1B2F"/>
+                </a:solidFill>
+                <a:latin typeface="Calibri" pitchFamily="34" charset="0"/>
+                <a:ea typeface="Calibri" pitchFamily="34" charset="-122"/>
+                <a:cs typeface="Calibri" pitchFamily="34" charset="-120"/>
+              </a:rPr>
+              <a:t>還元率・キャンペーンの自由度が高い</a:t>
+            </a:r>
+            <a:endParaRPr lang="en-US" sz="1200" dirty="0"/>
+          </a:p>
+          <a:p>
+            <a:pPr indent="0" marL="0">
+              <a:buNone/>
+            </a:pPr>
+            <a:r>
+              <a:rPr lang="en-US" sz="1000" dirty="0">
+                <a:solidFill>
+                  <a:srgbClr val="5A6B8C"/>
+                </a:solidFill>
+                <a:latin typeface="Calibri" pitchFamily="34" charset="0"/>
+                <a:ea typeface="Calibri" pitchFamily="34" charset="-122"/>
+                <a:cs typeface="Calibri" pitchFamily="34" charset="-120"/>
+              </a:rPr>
+              <a:t>自社の粗利構造に合わせて還元率や特売キャンペーンを柔軟に設計できる</a:t>
+            </a:r>
+            <a:endParaRPr lang="en-US" sz="1200" dirty="0"/>
+          </a:p>
+        </p:txBody>
+      </p:sp>
+      <p:sp>
+        <p:nvSpPr>
+          <p:cNvPr id="13" name="Shape 11"/>
+          <p:cNvSpPr/>
+          <p:nvPr/>
+        </p:nvSpPr>
+        <p:spPr>
+          <a:xfrm>
+            <a:off x="457200" y="5001768"/>
+            <a:ext cx="274320" cy="274320"/>
+          </a:xfrm>
+          <a:prstGeom prst="ellipse">
+            <a:avLst/>
+          </a:prstGeom>
+          <a:solidFill>
+            <a:srgbClr val="334A8C"/>
+          </a:solidFill>
+          <a:ln/>
+        </p:spPr>
+      </p:sp>
+      <p:sp>
+        <p:nvSpPr>
+          <p:cNvPr id="14" name="Text 12"/>
+          <p:cNvSpPr/>
+          <p:nvPr/>
+        </p:nvSpPr>
+        <p:spPr>
+          <a:xfrm>
+            <a:off x="457200" y="5001768"/>
+            <a:ext cx="274320" cy="274320"/>
+          </a:xfrm>
+          <a:prstGeom prst="rect">
+            <a:avLst/>
+          </a:prstGeom>
+          <a:noFill/>
+          <a:ln/>
+        </p:spPr>
+        <p:txBody>
+          <a:bodyPr wrap="square" lIns="0" tIns="0" rIns="0" bIns="0" rtlCol="0" anchor="ctr"/>
+          <a:lstStyle/>
+          <a:p>
+            <a:pPr algn="ctr" indent="0" marL="0">
+              <a:buNone/>
+            </a:pPr>
+            <a:r>
+              <a:rPr lang="en-US" sz="1200" b="1" dirty="0">
+                <a:solidFill>
+                  <a:srgbClr val="FFFFFF"/>
+                </a:solidFill>
+                <a:latin typeface="Calibri" pitchFamily="34" charset="0"/>
+                <a:ea typeface="Calibri" pitchFamily="34" charset="-122"/>
+                <a:cs typeface="Calibri" pitchFamily="34" charset="-120"/>
+              </a:rPr>
+              <a:t>4</a:t>
+            </a:r>
+            <a:endParaRPr lang="en-US" sz="1200" dirty="0"/>
+          </a:p>
+        </p:txBody>
+      </p:sp>
+      <p:sp>
+        <p:nvSpPr>
+          <p:cNvPr id="15" name="Text 13"/>
+          <p:cNvSpPr/>
+          <p:nvPr/>
+        </p:nvSpPr>
+        <p:spPr>
+          <a:xfrm>
+            <a:off x="868680" y="4919472"/>
+            <a:ext cx="5074920" cy="1051560"/>
+          </a:xfrm>
+          <a:prstGeom prst="rect">
+            <a:avLst/>
+          </a:prstGeom>
+          <a:noFill/>
+          <a:ln/>
+        </p:spPr>
+        <p:txBody>
+          <a:bodyPr wrap="square" lIns="0" tIns="0" rIns="0" bIns="0" rtlCol="0" anchor="t"/>
+          <a:lstStyle/>
+          <a:p>
+            <a:pPr indent="0" marL="0">
+              <a:spcAft>
+                <a:spcPts val="200"/>
+              </a:spcAft>
+              <a:buNone/>
+            </a:pPr>
+            <a:r>
+              <a:rPr lang="en-US" sz="1200" b="1" dirty="0">
+                <a:solidFill>
+                  <a:srgbClr val="1B1B2F"/>
+                </a:solidFill>
+                <a:latin typeface="Calibri" pitchFamily="34" charset="0"/>
+                <a:ea typeface="Calibri" pitchFamily="34" charset="-122"/>
+                <a:cs typeface="Calibri" pitchFamily="34" charset="-120"/>
+              </a:rPr>
+              <a:t>顧客ロイヤルティを自社に閉じ込められる</a:t>
+            </a:r>
+            <a:endParaRPr lang="en-US" sz="1200" dirty="0"/>
+          </a:p>
+          <a:p>
+            <a:pPr indent="0" marL="0">
+              <a:buNone/>
+            </a:pPr>
+            <a:r>
+              <a:rPr lang="en-US" sz="1000" dirty="0">
+                <a:solidFill>
+                  <a:srgbClr val="5A6B8C"/>
+                </a:solidFill>
+                <a:latin typeface="Calibri" pitchFamily="34" charset="0"/>
+                <a:ea typeface="Calibri" pitchFamily="34" charset="-122"/>
+                <a:cs typeface="Calibri" pitchFamily="34" charset="-120"/>
+              </a:rPr>
+              <a:t>共通ポイントは顧客の「お得」意識が経済圏側に分散し、店舗への帰属意識が薄まりやすい</a:t>
+            </a:r>
+            <a:endParaRPr lang="en-US" sz="1200" dirty="0"/>
+          </a:p>
+        </p:txBody>
+      </p:sp>
+      <p:sp>
+        <p:nvSpPr>
+          <p:cNvPr id="16" name="Text 14"/>
+          <p:cNvSpPr/>
+          <p:nvPr/>
+        </p:nvSpPr>
+        <p:spPr>
+          <a:xfrm>
+            <a:off x="6217920" y="1051560"/>
+            <a:ext cx="5486400" cy="320040"/>
+          </a:xfrm>
+          <a:prstGeom prst="rect">
+            <a:avLst/>
+          </a:prstGeom>
+          <a:noFill/>
+          <a:ln/>
+        </p:spPr>
+        <p:txBody>
+          <a:bodyPr wrap="square" lIns="0" tIns="0" rIns="0" bIns="0" rtlCol="0" anchor="ctr"/>
+          <a:lstStyle/>
+          <a:p>
+            <a:pPr indent="0" marL="0">
+              <a:buNone/>
+            </a:pPr>
+            <a:r>
+              <a:rPr lang="en-US" sz="1300" b="1" dirty="0">
+                <a:solidFill>
+                  <a:srgbClr val="1E2761"/>
+                </a:solidFill>
+                <a:latin typeface="Calibri" pitchFamily="34" charset="0"/>
+                <a:ea typeface="Calibri" pitchFamily="34" charset="-122"/>
+                <a:cs typeface="Calibri" pitchFamily="34" charset="-120"/>
+              </a:rPr>
+              <a:t>併用時のコスト負担構造</a:t>
+            </a:r>
+            <a:endParaRPr lang="en-US" sz="1300" dirty="0"/>
+          </a:p>
+        </p:txBody>
+      </p:sp>
+      <p:graphicFrame>
+        <p:nvGraphicFramePr>
+          <p:cNvPr id="6" name="Table 0"/>
+          <p:cNvGraphicFramePr>
+            <a:graphicFrameLocks noGrp="1"/>
+          </p:cNvGraphicFramePr>
+          <p:nvPr>
+            <p:extLst>
+              <p:ext uri="{D42A27DB-BD31-4B8C-83A1-F6EECF244321}">
+                <p14:modId xmlns:p14="http://schemas.microsoft.com/office/powerpoint/2010/main" val="1579011935"/>
+              </p:ext>
+            </p:extLst>
+          </p:nvPr>
+        </p:nvGraphicFramePr>
+        <p:xfrm>
+          <a:off x="6217920" y="1463040"/>
+          <a:ext cx="5486400" cy="914400"/>
+        </p:xfrm>
+        <a:graphic>
+          <a:graphicData uri="http://schemas.openxmlformats.org/drawingml/2006/table">
+            <a:tbl>
+              <a:tblPr/>
+              <a:tblGrid>
+                <a:gridCol w="1371600"/>
+                <a:gridCol w="1371600"/>
+                <a:gridCol w="2743200"/>
+              </a:tblGrid>
+              <a:tr h="0">
+                <a:tc>
+                  <a:txBody>
+                    <a:bodyPr/>
+                    <a:lstStyle/>
+                    <a:p>
+                      <a:pPr indent="0" marL="0">
+                        <a:buNone/>
+                      </a:pPr>
+                      <a:r>
+                        <a:rPr lang="en-US" sz="1050" b="1" dirty="0">
+                          <a:solidFill>
+                            <a:srgbClr val="FFFFFF"/>
+                          </a:solidFill>
+                          <a:latin typeface="Calibri" pitchFamily="34" charset="0"/>
+                          <a:ea typeface="Calibri" pitchFamily="34" charset="-122"/>
+                          <a:cs typeface="Calibri" pitchFamily="34" charset="-120"/>
+                        </a:rPr>
+                        <a:t>種別</a:t>
+                      </a:r>
+                      <a:endParaRPr lang="en-US" sz="1050" dirty="0">
+                        <a:latin typeface="Calibri" charset="0"/>
+                        <a:ea typeface="Calibri" charset="0"/>
+                        <a:cs typeface="Calibri" charset="0"/>
+                      </a:endParaRPr>
+                    </a:p>
+                  </a:txBody>
+                  <a:tcPr marL="63500" marR="63500" marT="50800" marB="50800" anchor="ctr">
+                    <a:lnL w="9525" cap="flat" cmpd="sng" algn="ctr">
+                      <a:solidFill>
+                        <a:srgbClr val="D7DEEE"/>
+                      </a:solidFill>
+                      <a:prstDash val="solid"/>
+                      <a:round/>
+                      <a:headEnd type="none" w="med" len="med"/>
+                      <a:tailEnd type="none" w="med" len="med"/>
+                    </a:lnL>
+                    <a:lnR w="9525" cap="flat" cmpd="sng" algn="ctr">
+                      <a:solidFill>
+                        <a:srgbClr val="D7DEEE"/>
+                      </a:solidFill>
+                      <a:prstDash val="solid"/>
+                      <a:round/>
+                      <a:headEnd type="none" w="med" len="med"/>
+                      <a:tailEnd type="none" w="med" len="med"/>
+                    </a:lnR>
+                    <a:lnT w="9525" cap="flat" cmpd="sng" algn="ctr">
+                      <a:solidFill>
+                        <a:srgbClr val="D7DEEE"/>
+                      </a:solidFill>
+                      <a:prstDash val="solid"/>
+                      <a:round/>
+                      <a:headEnd type="none" w="med" len="med"/>
+                      <a:tailEnd type="none" w="med" len="med"/>
+                    </a:lnT>
+                    <a:lnB w="9525" cap="flat" cmpd="sng" algn="ctr">
+                      <a:solidFill>
+                        <a:srgbClr val="D7DEEE"/>
+                      </a:solidFill>
+                      <a:prstDash val="solid"/>
+                      <a:round/>
+                      <a:headEnd type="none" w="med" len="med"/>
+                      <a:tailEnd type="none" w="med" len="med"/>
+                    </a:lnB>
+                    <a:solidFill>
+                      <a:srgbClr val="1E2761"/>
+                    </a:solidFill>
+                  </a:tcPr>
+                </a:tc>
+                <a:tc>
+                  <a:txBody>
+                    <a:bodyPr/>
+                    <a:lstStyle/>
+                    <a:p>
+                      <a:pPr indent="0" marL="0">
+                        <a:buNone/>
+                      </a:pPr>
+                      <a:r>
+                        <a:rPr lang="en-US" sz="1050" b="1" dirty="0">
+                          <a:solidFill>
+                            <a:srgbClr val="FFFFFF"/>
+                          </a:solidFill>
+                          <a:latin typeface="Calibri" pitchFamily="34" charset="0"/>
+                          <a:ea typeface="Calibri" pitchFamily="34" charset="-122"/>
+                          <a:cs typeface="Calibri" pitchFamily="34" charset="-120"/>
+                        </a:rPr>
+                        <a:t>負担者</a:t>
+                      </a:r>
+                      <a:endParaRPr lang="en-US" sz="1050" dirty="0">
+                        <a:latin typeface="Calibri" charset="0"/>
+                        <a:ea typeface="Calibri" charset="0"/>
+                        <a:cs typeface="Calibri" charset="0"/>
+                      </a:endParaRPr>
+                    </a:p>
+                  </a:txBody>
+                  <a:tcPr marL="63500" marR="63500" marT="50800" marB="50800" anchor="ctr">
+                    <a:lnL w="9525" cap="flat" cmpd="sng" algn="ctr">
+                      <a:solidFill>
+                        <a:srgbClr val="D7DEEE"/>
+                      </a:solidFill>
+                      <a:prstDash val="solid"/>
+                      <a:round/>
+                      <a:headEnd type="none" w="med" len="med"/>
+                      <a:tailEnd type="none" w="med" len="med"/>
+                    </a:lnL>
+                    <a:lnR w="9525" cap="flat" cmpd="sng" algn="ctr">
+                      <a:solidFill>
+                        <a:srgbClr val="D7DEEE"/>
+                      </a:solidFill>
+                      <a:prstDash val="solid"/>
+                      <a:round/>
+                      <a:headEnd type="none" w="med" len="med"/>
+                      <a:tailEnd type="none" w="med" len="med"/>
+                    </a:lnR>
+                    <a:lnT w="9525" cap="flat" cmpd="sng" algn="ctr">
+                      <a:solidFill>
+                        <a:srgbClr val="D7DEEE"/>
+                      </a:solidFill>
+                      <a:prstDash val="solid"/>
+                      <a:round/>
+                      <a:headEnd type="none" w="med" len="med"/>
+                      <a:tailEnd type="none" w="med" len="med"/>
+                    </a:lnT>
+                    <a:lnB w="9525" cap="flat" cmpd="sng" algn="ctr">
+                      <a:solidFill>
+                        <a:srgbClr val="D7DEEE"/>
+                      </a:solidFill>
+                      <a:prstDash val="solid"/>
+                      <a:round/>
+                      <a:headEnd type="none" w="med" len="med"/>
+                      <a:tailEnd type="none" w="med" len="med"/>
+                    </a:lnB>
+                    <a:solidFill>
+                      <a:srgbClr val="1E2761"/>
+                    </a:solidFill>
+                  </a:tcPr>
+                </a:tc>
+                <a:tc>
+                  <a:txBody>
+                    <a:bodyPr/>
+                    <a:lstStyle/>
+                    <a:p>
+                      <a:pPr indent="0" marL="0">
+                        <a:buNone/>
+                      </a:pPr>
+                      <a:r>
+                        <a:rPr lang="en-US" sz="1050" b="1" dirty="0">
+                          <a:solidFill>
+                            <a:srgbClr val="FFFFFF"/>
+                          </a:solidFill>
+                          <a:latin typeface="Calibri" pitchFamily="34" charset="0"/>
+                          <a:ea typeface="Calibri" pitchFamily="34" charset="-122"/>
+                          <a:cs typeface="Calibri" pitchFamily="34" charset="-120"/>
+                        </a:rPr>
+                        <a:t>コスト構造</a:t>
+                      </a:r>
+                      <a:endParaRPr lang="en-US" sz="1050" dirty="0">
+                        <a:latin typeface="Calibri" charset="0"/>
+                        <a:ea typeface="Calibri" charset="0"/>
+                        <a:cs typeface="Calibri" charset="0"/>
+                      </a:endParaRPr>
+                    </a:p>
+                  </a:txBody>
+                  <a:tcPr marL="63500" marR="63500" marT="50800" marB="50800" anchor="ctr">
+                    <a:lnL w="9525" cap="flat" cmpd="sng" algn="ctr">
+                      <a:solidFill>
+                        <a:srgbClr val="D7DEEE"/>
+                      </a:solidFill>
+                      <a:prstDash val="solid"/>
+                      <a:round/>
+                      <a:headEnd type="none" w="med" len="med"/>
+                      <a:tailEnd type="none" w="med" len="med"/>
+                    </a:lnL>
+                    <a:lnR w="9525" cap="flat" cmpd="sng" algn="ctr">
+                      <a:solidFill>
+                        <a:srgbClr val="D7DEEE"/>
+                      </a:solidFill>
+                      <a:prstDash val="solid"/>
+                      <a:round/>
+                      <a:headEnd type="none" w="med" len="med"/>
+                      <a:tailEnd type="none" w="med" len="med"/>
+                    </a:lnR>
+                    <a:lnT w="9525" cap="flat" cmpd="sng" algn="ctr">
+                      <a:solidFill>
+                        <a:srgbClr val="D7DEEE"/>
+                      </a:solidFill>
+                      <a:prstDash val="solid"/>
+                      <a:round/>
+                      <a:headEnd type="none" w="med" len="med"/>
+                      <a:tailEnd type="none" w="med" len="med"/>
+                    </a:lnT>
+                    <a:lnB w="9525" cap="flat" cmpd="sng" algn="ctr">
+                      <a:solidFill>
+                        <a:srgbClr val="D7DEEE"/>
+                      </a:solidFill>
+                      <a:prstDash val="solid"/>
+                      <a:round/>
+                      <a:headEnd type="none" w="med" len="med"/>
+                      <a:tailEnd type="none" w="med" len="med"/>
+                    </a:lnB>
+                    <a:solidFill>
+                      <a:srgbClr val="1E2761"/>
+                    </a:solidFill>
+                  </a:tcPr>
+                </a:tc>
+              </a:tr>
+              <a:tr h="0">
+                <a:tc>
+                  <a:txBody>
+                    <a:bodyPr/>
+                    <a:lstStyle/>
+                    <a:p>
+                      <a:pPr indent="0" marL="0">
+                        <a:buNone/>
+                      </a:pPr>
+                      <a:r>
+                        <a:rPr lang="en-US" sz="1000" b="1" dirty="0">
+                          <a:solidFill>
+                            <a:srgbClr val="1B1B2F"/>
+                          </a:solidFill>
+                          <a:latin typeface="Calibri" pitchFamily="34" charset="0"/>
+                          <a:ea typeface="Calibri" pitchFamily="34" charset="-122"/>
+                          <a:cs typeface="Calibri" pitchFamily="34" charset="-120"/>
+                        </a:rPr>
+                        <a:t>独自ポイント</a:t>
+                      </a:r>
+                      <a:endParaRPr lang="en-US" sz="1000" dirty="0">
+                        <a:latin typeface="Calibri" charset="0"/>
+                        <a:ea typeface="Calibri" charset="0"/>
+                        <a:cs typeface="Calibri" charset="0"/>
+                      </a:endParaRPr>
+                    </a:p>
+                  </a:txBody>
+                  <a:tcPr marL="63500" marR="63500" marT="50800" marB="50800" anchor="ctr">
+                    <a:lnL w="9525" cap="flat" cmpd="sng" algn="ctr">
+                      <a:solidFill>
+                        <a:srgbClr val="D7DEEE"/>
+                      </a:solidFill>
+                      <a:prstDash val="solid"/>
+                      <a:round/>
+                      <a:headEnd type="none" w="med" len="med"/>
+                      <a:tailEnd type="none" w="med" len="med"/>
+                    </a:lnL>
+                    <a:lnR w="9525" cap="flat" cmpd="sng" algn="ctr">
+                      <a:solidFill>
+                        <a:srgbClr val="D7DEEE"/>
+                      </a:solidFill>
+                      <a:prstDash val="solid"/>
+                      <a:round/>
+                      <a:headEnd type="none" w="med" len="med"/>
+                      <a:tailEnd type="none" w="med" len="med"/>
+                    </a:lnR>
+                    <a:lnT w="9525" cap="flat" cmpd="sng" algn="ctr">
+                      <a:solidFill>
+                        <a:srgbClr val="D7DEEE"/>
+                      </a:solidFill>
+                      <a:prstDash val="solid"/>
+                      <a:round/>
+                      <a:headEnd type="none" w="med" len="med"/>
+                      <a:tailEnd type="none" w="med" len="med"/>
+                    </a:lnT>
+                    <a:lnB w="9525" cap="flat" cmpd="sng" algn="ctr">
+                      <a:solidFill>
+                        <a:srgbClr val="D7DEEE"/>
+                      </a:solidFill>
+                      <a:prstDash val="solid"/>
+                      <a:round/>
+                      <a:headEnd type="none" w="med" len="med"/>
+                      <a:tailEnd type="none" w="med" len="med"/>
+                    </a:lnB>
+                    <a:solidFill>
+                      <a:srgbClr val="FFFFFF"/>
+                    </a:solidFill>
+                  </a:tcPr>
+                </a:tc>
+                <a:tc>
+                  <a:txBody>
+                    <a:bodyPr/>
+                    <a:lstStyle/>
+                    <a:p>
+                      <a:pPr indent="0" marL="0">
+                        <a:buNone/>
+                      </a:pPr>
+                      <a:r>
+                        <a:rPr lang="en-US" sz="1000" dirty="0">
+                          <a:solidFill>
+                            <a:srgbClr val="1B1B2F"/>
+                          </a:solidFill>
+                          <a:latin typeface="Calibri" pitchFamily="34" charset="0"/>
+                          <a:ea typeface="Calibri" pitchFamily="34" charset="-122"/>
+                          <a:cs typeface="Calibri" pitchFamily="34" charset="-120"/>
+                        </a:rPr>
+                        <a:t>小売店</a:t>
+                      </a:r>
+                      <a:endParaRPr lang="en-US" sz="1000" dirty="0">
+                        <a:latin typeface="Calibri" charset="0"/>
+                        <a:ea typeface="Calibri" charset="0"/>
+                        <a:cs typeface="Calibri" charset="0"/>
+                      </a:endParaRPr>
+                    </a:p>
+                    <a:p>
+                      <a:pPr indent="0" marL="0">
+                        <a:buNone/>
+                      </a:pPr>
+                      <a:r>
+                        <a:rPr lang="en-US" sz="1000" dirty="0">
+                          <a:solidFill>
+                            <a:srgbClr val="1B1B2F"/>
+                          </a:solidFill>
+                          <a:latin typeface="Calibri" pitchFamily="34" charset="0"/>
+                          <a:ea typeface="Calibri" pitchFamily="34" charset="-122"/>
+                          <a:cs typeface="Calibri" pitchFamily="34" charset="-120"/>
+                        </a:rPr>
+                        <a:t>(100%自己負担)</a:t>
+                      </a:r>
+                      <a:endParaRPr lang="en-US" sz="1000" dirty="0">
+                        <a:latin typeface="Calibri" charset="0"/>
+                        <a:ea typeface="Calibri" charset="0"/>
+                        <a:cs typeface="Calibri" charset="0"/>
+                      </a:endParaRPr>
+                    </a:p>
+                  </a:txBody>
+                  <a:tcPr marL="63500" marR="63500" marT="50800" marB="50800" anchor="ctr">
+                    <a:lnL w="9525" cap="flat" cmpd="sng" algn="ctr">
+                      <a:solidFill>
+                        <a:srgbClr val="D7DEEE"/>
+                      </a:solidFill>
+                      <a:prstDash val="solid"/>
+                      <a:round/>
+                      <a:headEnd type="none" w="med" len="med"/>
+                      <a:tailEnd type="none" w="med" len="med"/>
+                    </a:lnL>
+                    <a:lnR w="9525" cap="flat" cmpd="sng" algn="ctr">
+                      <a:solidFill>
+                        <a:srgbClr val="D7DEEE"/>
+                      </a:solidFill>
+                      <a:prstDash val="solid"/>
+                      <a:round/>
+                      <a:headEnd type="none" w="med" len="med"/>
+                      <a:tailEnd type="none" w="med" len="med"/>
+                    </a:lnR>
+                    <a:lnT w="9525" cap="flat" cmpd="sng" algn="ctr">
+                      <a:solidFill>
+                        <a:srgbClr val="D7DEEE"/>
+                      </a:solidFill>
+                      <a:prstDash val="solid"/>
+                      <a:round/>
+                      <a:headEnd type="none" w="med" len="med"/>
+                      <a:tailEnd type="none" w="med" len="med"/>
+                    </a:lnT>
+                    <a:lnB w="9525" cap="flat" cmpd="sng" algn="ctr">
+                      <a:solidFill>
+                        <a:srgbClr val="D7DEEE"/>
+                      </a:solidFill>
+                      <a:prstDash val="solid"/>
+                      <a:round/>
+                      <a:headEnd type="none" w="med" len="med"/>
+                      <a:tailEnd type="none" w="med" len="med"/>
+                    </a:lnB>
+                    <a:solidFill>
+                      <a:srgbClr val="FFFFFF"/>
+                    </a:solidFill>
+                  </a:tcPr>
+                </a:tc>
+                <a:tc>
+                  <a:txBody>
+                    <a:bodyPr/>
+                    <a:lstStyle/>
+                    <a:p>
+                      <a:pPr indent="0" marL="0">
+                        <a:buNone/>
+                      </a:pPr>
+                      <a:r>
+                        <a:rPr lang="en-US" sz="1000" dirty="0">
+                          <a:solidFill>
+                            <a:srgbClr val="1B1B2F"/>
+                          </a:solidFill>
+                          <a:latin typeface="Calibri" pitchFamily="34" charset="0"/>
+                          <a:ea typeface="Calibri" pitchFamily="34" charset="-122"/>
+                          <a:cs typeface="Calibri" pitchFamily="34" charset="-120"/>
+                        </a:rPr>
+                        <a:t>システム運用費のみ。仲介手数料なし</a:t>
+                      </a:r>
+                      <a:endParaRPr lang="en-US" sz="1000" dirty="0">
+                        <a:latin typeface="Calibri" charset="0"/>
+                        <a:ea typeface="Calibri" charset="0"/>
+                        <a:cs typeface="Calibri" charset="0"/>
+                      </a:endParaRPr>
+                    </a:p>
+                  </a:txBody>
+                  <a:tcPr marL="63500" marR="63500" marT="50800" marB="50800" anchor="ctr">
+                    <a:lnL w="9525" cap="flat" cmpd="sng" algn="ctr">
+                      <a:solidFill>
+                        <a:srgbClr val="D7DEEE"/>
+                      </a:solidFill>
+                      <a:prstDash val="solid"/>
+                      <a:round/>
+                      <a:headEnd type="none" w="med" len="med"/>
+                      <a:tailEnd type="none" w="med" len="med"/>
+                    </a:lnL>
+                    <a:lnR w="9525" cap="flat" cmpd="sng" algn="ctr">
+                      <a:solidFill>
+                        <a:srgbClr val="D7DEEE"/>
+                      </a:solidFill>
+                      <a:prstDash val="solid"/>
+                      <a:round/>
+                      <a:headEnd type="none" w="med" len="med"/>
+                      <a:tailEnd type="none" w="med" len="med"/>
+                    </a:lnR>
+                    <a:lnT w="9525" cap="flat" cmpd="sng" algn="ctr">
+                      <a:solidFill>
+                        <a:srgbClr val="D7DEEE"/>
+                      </a:solidFill>
+                      <a:prstDash val="solid"/>
+                      <a:round/>
+                      <a:headEnd type="none" w="med" len="med"/>
+                      <a:tailEnd type="none" w="med" len="med"/>
+                    </a:lnT>
+                    <a:lnB w="9525" cap="flat" cmpd="sng" algn="ctr">
+                      <a:solidFill>
+                        <a:srgbClr val="D7DEEE"/>
+                      </a:solidFill>
+                      <a:prstDash val="solid"/>
+                      <a:round/>
+                      <a:headEnd type="none" w="med" len="med"/>
+                      <a:tailEnd type="none" w="med" len="med"/>
+                    </a:lnB>
+                    <a:solidFill>
+                      <a:srgbClr val="FFFFFF"/>
+                    </a:solidFill>
+                  </a:tcPr>
+                </a:tc>
+              </a:tr>
+              <a:tr h="0">
+                <a:tc>
+                  <a:txBody>
+                    <a:bodyPr/>
+                    <a:lstStyle/>
+                    <a:p>
+                      <a:pPr indent="0" marL="0">
+                        <a:buNone/>
+                      </a:pPr>
+                      <a:r>
+                        <a:rPr lang="en-US" sz="1000" b="1" dirty="0">
+                          <a:solidFill>
+                            <a:srgbClr val="1B1B2F"/>
+                          </a:solidFill>
+                          <a:latin typeface="Calibri" pitchFamily="34" charset="0"/>
+                          <a:ea typeface="Calibri" pitchFamily="34" charset="-122"/>
+                          <a:cs typeface="Calibri" pitchFamily="34" charset="-120"/>
+                        </a:rPr>
+                        <a:t>共通ポイント</a:t>
+                      </a:r>
+                      <a:endParaRPr lang="en-US" sz="1000" dirty="0">
+                        <a:latin typeface="Calibri" charset="0"/>
+                        <a:ea typeface="Calibri" charset="0"/>
+                        <a:cs typeface="Calibri" charset="0"/>
+                      </a:endParaRPr>
+                    </a:p>
+                    <a:p>
+                      <a:pPr indent="0" marL="0">
+                        <a:buNone/>
+                      </a:pPr>
+                      <a:r>
+                        <a:rPr lang="en-US" sz="1000" b="1" dirty="0">
+                          <a:solidFill>
+                            <a:srgbClr val="1B1B2F"/>
+                          </a:solidFill>
+                          <a:latin typeface="Calibri" pitchFamily="34" charset="0"/>
+                          <a:ea typeface="Calibri" pitchFamily="34" charset="-122"/>
+                          <a:cs typeface="Calibri" pitchFamily="34" charset="-120"/>
+                        </a:rPr>
+                        <a:t>(dポイント等)</a:t>
+                      </a:r>
+                      <a:endParaRPr lang="en-US" sz="1000" dirty="0">
+                        <a:latin typeface="Calibri" charset="0"/>
+                        <a:ea typeface="Calibri" charset="0"/>
+                        <a:cs typeface="Calibri" charset="0"/>
+                      </a:endParaRPr>
+                    </a:p>
+                  </a:txBody>
+                  <a:tcPr marL="63500" marR="63500" marT="50800" marB="50800" anchor="ctr">
+                    <a:lnL w="9525" cap="flat" cmpd="sng" algn="ctr">
+                      <a:solidFill>
+                        <a:srgbClr val="D7DEEE"/>
+                      </a:solidFill>
+                      <a:prstDash val="solid"/>
+                      <a:round/>
+                      <a:headEnd type="none" w="med" len="med"/>
+                      <a:tailEnd type="none" w="med" len="med"/>
+                    </a:lnL>
+                    <a:lnR w="9525" cap="flat" cmpd="sng" algn="ctr">
+                      <a:solidFill>
+                        <a:srgbClr val="D7DEEE"/>
+                      </a:solidFill>
+                      <a:prstDash val="solid"/>
+                      <a:round/>
+                      <a:headEnd type="none" w="med" len="med"/>
+                      <a:tailEnd type="none" w="med" len="med"/>
+                    </a:lnR>
+                    <a:lnT w="9525" cap="flat" cmpd="sng" algn="ctr">
+                      <a:solidFill>
+                        <a:srgbClr val="D7DEEE"/>
+                      </a:solidFill>
+                      <a:prstDash val="solid"/>
+                      <a:round/>
+                      <a:headEnd type="none" w="med" len="med"/>
+                      <a:tailEnd type="none" w="med" len="med"/>
+                    </a:lnT>
+                    <a:lnB w="9525" cap="flat" cmpd="sng" algn="ctr">
+                      <a:solidFill>
+                        <a:srgbClr val="D7DEEE"/>
+                      </a:solidFill>
+                      <a:prstDash val="solid"/>
+                      <a:round/>
+                      <a:headEnd type="none" w="med" len="med"/>
+                      <a:tailEnd type="none" w="med" len="med"/>
+                    </a:lnB>
+                    <a:solidFill>
+                      <a:srgbClr val="EDF1FA"/>
+                    </a:solidFill>
+                  </a:tcPr>
+                </a:tc>
+                <a:tc>
+                  <a:txBody>
+                    <a:bodyPr/>
+                    <a:lstStyle/>
+                    <a:p>
+                      <a:pPr indent="0" marL="0">
+                        <a:buNone/>
+                      </a:pPr>
+                      <a:r>
+                        <a:rPr lang="en-US" sz="1000" dirty="0">
+                          <a:solidFill>
+                            <a:srgbClr val="1B1B2F"/>
+                          </a:solidFill>
+                          <a:latin typeface="Calibri" pitchFamily="34" charset="0"/>
+                          <a:ea typeface="Calibri" pitchFamily="34" charset="-122"/>
+                          <a:cs typeface="Calibri" pitchFamily="34" charset="-120"/>
+                        </a:rPr>
+                        <a:t>小売店(加盟店)</a:t>
+                      </a:r>
+                      <a:endParaRPr lang="en-US" sz="1000" dirty="0">
+                        <a:latin typeface="Calibri" charset="0"/>
+                        <a:ea typeface="Calibri" charset="0"/>
+                        <a:cs typeface="Calibri" charset="0"/>
+                      </a:endParaRPr>
+                    </a:p>
+                  </a:txBody>
+                  <a:tcPr marL="63500" marR="63500" marT="50800" marB="50800" anchor="ctr">
+                    <a:lnL w="9525" cap="flat" cmpd="sng" algn="ctr">
+                      <a:solidFill>
+                        <a:srgbClr val="D7DEEE"/>
+                      </a:solidFill>
+                      <a:prstDash val="solid"/>
+                      <a:round/>
+                      <a:headEnd type="none" w="med" len="med"/>
+                      <a:tailEnd type="none" w="med" len="med"/>
+                    </a:lnL>
+                    <a:lnR w="9525" cap="flat" cmpd="sng" algn="ctr">
+                      <a:solidFill>
+                        <a:srgbClr val="D7DEEE"/>
+                      </a:solidFill>
+                      <a:prstDash val="solid"/>
+                      <a:round/>
+                      <a:headEnd type="none" w="med" len="med"/>
+                      <a:tailEnd type="none" w="med" len="med"/>
+                    </a:lnR>
+                    <a:lnT w="9525" cap="flat" cmpd="sng" algn="ctr">
+                      <a:solidFill>
+                        <a:srgbClr val="D7DEEE"/>
+                      </a:solidFill>
+                      <a:prstDash val="solid"/>
+                      <a:round/>
+                      <a:headEnd type="none" w="med" len="med"/>
+                      <a:tailEnd type="none" w="med" len="med"/>
+                    </a:lnT>
+                    <a:lnB w="9525" cap="flat" cmpd="sng" algn="ctr">
+                      <a:solidFill>
+                        <a:srgbClr val="D7DEEE"/>
+                      </a:solidFill>
+                      <a:prstDash val="solid"/>
+                      <a:round/>
+                      <a:headEnd type="none" w="med" len="med"/>
+                      <a:tailEnd type="none" w="med" len="med"/>
+                    </a:lnB>
+                    <a:solidFill>
+                      <a:srgbClr val="EDF1FA"/>
+                    </a:solidFill>
+                  </a:tcPr>
+                </a:tc>
+                <a:tc>
+                  <a:txBody>
+                    <a:bodyPr/>
+                    <a:lstStyle/>
+                    <a:p>
+                      <a:pPr indent="0" marL="0">
+                        <a:buNone/>
+                      </a:pPr>
+                      <a:r>
+                        <a:rPr lang="en-US" sz="1000" dirty="0">
+                          <a:solidFill>
+                            <a:srgbClr val="1B1B2F"/>
+                          </a:solidFill>
+                          <a:latin typeface="Calibri" pitchFamily="34" charset="0"/>
+                          <a:ea typeface="Calibri" pitchFamily="34" charset="-122"/>
+                          <a:cs typeface="Calibri" pitchFamily="34" charset="-120"/>
+                        </a:rPr>
+                        <a:t>ポイント原資＋事業者への手数料の二重負担</a:t>
+                      </a:r>
+                      <a:endParaRPr lang="en-US" sz="1000" dirty="0">
+                        <a:latin typeface="Calibri" charset="0"/>
+                        <a:ea typeface="Calibri" charset="0"/>
+                        <a:cs typeface="Calibri" charset="0"/>
+                      </a:endParaRPr>
+                    </a:p>
+                  </a:txBody>
+                  <a:tcPr marL="63500" marR="63500" marT="50800" marB="50800" anchor="ctr">
+                    <a:lnL w="9525" cap="flat" cmpd="sng" algn="ctr">
+                      <a:solidFill>
+                        <a:srgbClr val="D7DEEE"/>
+                      </a:solidFill>
+                      <a:prstDash val="solid"/>
+                      <a:round/>
+                      <a:headEnd type="none" w="med" len="med"/>
+                      <a:tailEnd type="none" w="med" len="med"/>
+                    </a:lnL>
+                    <a:lnR w="9525" cap="flat" cmpd="sng" algn="ctr">
+                      <a:solidFill>
+                        <a:srgbClr val="D7DEEE"/>
+                      </a:solidFill>
+                      <a:prstDash val="solid"/>
+                      <a:round/>
+                      <a:headEnd type="none" w="med" len="med"/>
+                      <a:tailEnd type="none" w="med" len="med"/>
+                    </a:lnR>
+                    <a:lnT w="9525" cap="flat" cmpd="sng" algn="ctr">
+                      <a:solidFill>
+                        <a:srgbClr val="D7DEEE"/>
+                      </a:solidFill>
+                      <a:prstDash val="solid"/>
+                      <a:round/>
+                      <a:headEnd type="none" w="med" len="med"/>
+                      <a:tailEnd type="none" w="med" len="med"/>
+                    </a:lnT>
+                    <a:lnB w="9525" cap="flat" cmpd="sng" algn="ctr">
+                      <a:solidFill>
+                        <a:srgbClr val="D7DEEE"/>
+                      </a:solidFill>
+                      <a:prstDash val="solid"/>
+                      <a:round/>
+                      <a:headEnd type="none" w="med" len="med"/>
+                      <a:tailEnd type="none" w="med" len="med"/>
+                    </a:lnB>
+                    <a:solidFill>
+                      <a:srgbClr val="EDF1FA"/>
+                    </a:solidFill>
+                  </a:tcPr>
+                </a:tc>
+              </a:tr>
+            </a:tbl>
+          </a:graphicData>
+        </a:graphic>
+      </p:graphicFrame>
+      <p:sp>
+        <p:nvSpPr>
+          <p:cNvPr id="18" name="Shape 15"/>
+          <p:cNvSpPr/>
+          <p:nvPr/>
+        </p:nvSpPr>
+        <p:spPr>
+          <a:xfrm>
+            <a:off x="6217920" y="3063240"/>
+            <a:ext cx="5486400" cy="3108960"/>
+          </a:xfrm>
+          <a:prstGeom prst="roundRect">
+            <a:avLst>
+              <a:gd name="adj" fmla="val 1765"/>
+            </a:avLst>
+          </a:prstGeom>
+          <a:solidFill>
+            <a:srgbClr val="FFFFFF"/>
+          </a:solidFill>
+          <a:ln w="9525">
+            <a:solidFill>
+              <a:srgbClr val="D7DEEE"/>
+            </a:solidFill>
+            <a:prstDash val="solid"/>
+          </a:ln>
+        </p:spPr>
+      </p:sp>
+      <p:sp>
+        <p:nvSpPr>
+          <p:cNvPr id="19" name="Text 16"/>
+          <p:cNvSpPr/>
+          <p:nvPr/>
+        </p:nvSpPr>
+        <p:spPr>
+          <a:xfrm>
+            <a:off x="6446520" y="3246120"/>
+            <a:ext cx="5029200" cy="2834640"/>
+          </a:xfrm>
+          <a:prstGeom prst="rect">
+            <a:avLst/>
+          </a:prstGeom>
+          <a:noFill/>
+          <a:ln/>
+        </p:spPr>
+        <p:txBody>
+          <a:bodyPr wrap="square" lIns="0" tIns="0" rIns="0" bIns="0" rtlCol="0" anchor="t"/>
+          <a:lstStyle/>
+          <a:p>
+            <a:pPr indent="0" marL="0">
+              <a:spcAft>
+                <a:spcPts val="800"/>
+              </a:spcAft>
+              <a:buNone/>
+            </a:pPr>
+            <a:r>
+              <a:rPr lang="en-US" sz="1150" b="1" dirty="0">
+                <a:solidFill>
+                  <a:srgbClr val="1E2761"/>
+                </a:solidFill>
+                <a:latin typeface="Calibri" pitchFamily="34" charset="0"/>
+                <a:ea typeface="Calibri" pitchFamily="34" charset="-122"/>
+                <a:cs typeface="Calibri" pitchFamily="34" charset="-120"/>
+              </a:rPr>
+              <a:t>手数料水準の参考値</a:t>
+            </a:r>
+            <a:endParaRPr lang="en-US" sz="1150" dirty="0"/>
+          </a:p>
+          <a:p>
+            <a:pPr marL="342900" indent="-342900">
+              <a:spcAft>
+                <a:spcPts val="600"/>
+              </a:spcAft>
+              <a:buSzPct val="100000"/>
+              <a:buChar char="•"/>
+            </a:pPr>
+            <a:r>
+              <a:rPr lang="en-US" sz="1050" dirty="0">
+                <a:solidFill>
+                  <a:srgbClr val="1B1B2F"/>
+                </a:solidFill>
+                <a:latin typeface="Calibri" pitchFamily="34" charset="0"/>
+                <a:ea typeface="Calibri" pitchFamily="34" charset="-122"/>
+                <a:cs typeface="Calibri" pitchFamily="34" charset="-120"/>
+              </a:rPr>
+              <a:t>Tポイント(旧): 月額固定7,500円＋関与売上の3%(規模により軽減あり) [20]</a:t>
+            </a:r>
+            <a:endParaRPr lang="en-US" sz="1150" dirty="0"/>
+          </a:p>
+          <a:p>
+            <a:pPr marL="342900" indent="-342900">
+              <a:spcAft>
+                <a:spcPts val="600"/>
+              </a:spcAft>
+              <a:buSzPct val="100000"/>
+              <a:buChar char="•"/>
+            </a:pPr>
+            <a:r>
+              <a:rPr lang="en-US" sz="1050" dirty="0">
+                <a:solidFill>
+                  <a:srgbClr val="1B1B2F"/>
+                </a:solidFill>
+                <a:latin typeface="Calibri" pitchFamily="34" charset="0"/>
+                <a:ea typeface="Calibri" pitchFamily="34" charset="-122"/>
+                <a:cs typeface="Calibri" pitchFamily="34" charset="-120"/>
+              </a:rPr>
+              <a:t>d払いの決済手数料: 2.6% [21]</a:t>
+            </a:r>
+            <a:endParaRPr lang="en-US" sz="1150" dirty="0"/>
+          </a:p>
+          <a:p>
+            <a:pPr marL="342900" indent="-342900">
+              <a:spcAft>
+                <a:spcPts val="1000"/>
+              </a:spcAft>
+              <a:buSzPct val="100000"/>
+              <a:buChar char="•"/>
+            </a:pPr>
+            <a:r>
+              <a:rPr lang="en-US" sz="1050" dirty="0">
+                <a:solidFill>
+                  <a:srgbClr val="1B1B2F"/>
+                </a:solidFill>
+                <a:latin typeface="Calibri" pitchFamily="34" charset="0"/>
+                <a:ea typeface="Calibri" pitchFamily="34" charset="-122"/>
+                <a:cs typeface="Calibri" pitchFamily="34" charset="-120"/>
+              </a:rPr>
+              <a:t>EC系(Yahoo!ショッピング/楽天市場): 加盟店負担 約1%〜 [21]</a:t>
+            </a:r>
+            <a:endParaRPr lang="en-US" sz="1150" dirty="0"/>
+          </a:p>
+          <a:p>
+            <a:pPr indent="0" marL="0">
+              <a:buNone/>
+            </a:pPr>
+            <a:r>
+              <a:rPr lang="en-US" sz="1000" i="1" dirty="0">
+                <a:solidFill>
+                  <a:srgbClr val="5A6B8C"/>
+                </a:solidFill>
+                <a:latin typeface="Calibri" pitchFamily="34" charset="0"/>
+                <a:ea typeface="Calibri" pitchFamily="34" charset="-122"/>
+                <a:cs typeface="Calibri" pitchFamily="34" charset="-120"/>
+              </a:rPr>
+              <a:t>※dポイント運営元(ドコモ)自身は原資を負担せず、加盟店からの手数料が収益源となる</a:t>
+            </a:r>
+            <a:endParaRPr lang="en-US" sz="1150" dirty="0"/>
+          </a:p>
+        </p:txBody>
+      </p:sp>
+    </p:spTree>
+  </p:cSld>
+  <p:clrMapOvr>
+    <a:masterClrMapping/>
+  </p:clrMapOvr>
+</p:sld>
+</file>
+
+<file path=ppt/slides/slide6.xml><?xml version="1.0" encoding="utf-8"?>
+<p:sld xmlns:a="http://schemas.openxmlformats.org/drawingml/2006/main" xmlns:r="http://schemas.openxmlformats.org/officeDocument/2006/relationships" xmlns:p="http://schemas.openxmlformats.org/presentationml/2006/main">
+  <p:cSld name="Slide 6">
+    <p:bg>
+      <p:bgPr>
+        <a:solidFill>
+          <a:srgbClr val="F4F6FB"/>
+        </a:solidFill>
+      </p:bgPr>
+    </p:bg>
+    <p:spTree>
+      <p:nvGrpSpPr>
+        <p:cNvPr id="1" name=""/>
+        <p:cNvGrpSpPr/>
+        <p:nvPr/>
+      </p:nvGrpSpPr>
+      <p:grpSpPr>
+        <a:xfrm>
+          <a:off x="0" y="0"/>
+          <a:ext cx="0" cy="0"/>
+          <a:chOff x="0" y="0"/>
+          <a:chExt cx="0" cy="0"/>
+        </a:xfrm>
+      </p:grpSpPr>
+      <p:sp>
+        <p:nvSpPr>
+          <p:cNvPr id="2" name="Text 0"/>
+          <p:cNvSpPr/>
+          <p:nvPr/>
+        </p:nvSpPr>
+        <p:spPr>
+          <a:xfrm>
+            <a:off x="457200" y="365760"/>
+            <a:ext cx="11247120" cy="502920"/>
+          </a:xfrm>
+          <a:prstGeom prst="rect">
+            <a:avLst/>
+          </a:prstGeom>
+          <a:noFill/>
+          <a:ln/>
+        </p:spPr>
+        <p:txBody>
+          <a:bodyPr wrap="square" lIns="0" tIns="0" rIns="0" bIns="0" rtlCol="0" anchor="ctr"/>
+          <a:lstStyle/>
+          <a:p>
+            <a:pPr indent="0" marL="0">
+              <a:buNone/>
+            </a:pPr>
+            <a:r>
+              <a:rPr lang="en-US" sz="2300" b="1" dirty="0">
+                <a:solidFill>
+                  <a:srgbClr val="1E2761"/>
+                </a:solidFill>
+                <a:latin typeface="Cambria" pitchFamily="34" charset="0"/>
+                <a:ea typeface="Cambria" pitchFamily="34" charset="-122"/>
+                <a:cs typeface="Cambria" pitchFamily="34" charset="-120"/>
+              </a:rPr>
+              <a:t>なぜ独自ポイントと共通ポイントが二重に付くのか</a:t>
+            </a:r>
+            <a:endParaRPr lang="en-US" sz="2300" dirty="0"/>
+          </a:p>
+        </p:txBody>
+      </p:sp>
+      <p:sp>
+        <p:nvSpPr>
+          <p:cNvPr id="3" name="Text 1"/>
+          <p:cNvSpPr/>
+          <p:nvPr/>
+        </p:nvSpPr>
+        <p:spPr>
+          <a:xfrm>
+            <a:off x="457200" y="841248"/>
+            <a:ext cx="11247120" cy="320040"/>
+          </a:xfrm>
+          <a:prstGeom prst="rect">
+            <a:avLst/>
+          </a:prstGeom>
+          <a:noFill/>
+          <a:ln/>
+        </p:spPr>
+        <p:txBody>
+          <a:bodyPr wrap="square" lIns="0" tIns="0" rIns="0" bIns="0" rtlCol="0" anchor="ctr"/>
+          <a:lstStyle/>
+          <a:p>
+            <a:pPr indent="0" marL="0">
+              <a:buNone/>
+            </a:pPr>
+            <a:r>
+              <a:rPr lang="en-US" sz="1250" i="1" dirty="0">
+                <a:solidFill>
+                  <a:srgbClr val="5A6B8C"/>
+                </a:solidFill>
+                <a:latin typeface="Calibri" pitchFamily="34" charset="0"/>
+                <a:ea typeface="Calibri" pitchFamily="34" charset="-122"/>
+                <a:cs typeface="Calibri" pitchFamily="34" charset="-120"/>
+              </a:rPr>
+              <a:t>店舗は追加コストを払ってでも「新規獲得×リピート化」の両取りを狙っている</a:t>
+            </a:r>
+            <a:endParaRPr lang="en-US" sz="1250" dirty="0"/>
+          </a:p>
+        </p:txBody>
+      </p:sp>
+      <p:sp>
+        <p:nvSpPr>
+          <p:cNvPr id="4" name="Shape 2"/>
+          <p:cNvSpPr/>
+          <p:nvPr/>
+        </p:nvSpPr>
+        <p:spPr>
+          <a:xfrm>
+            <a:off x="457200" y="1371600"/>
+            <a:ext cx="2834640" cy="4480560"/>
+          </a:xfrm>
+          <a:prstGeom prst="roundRect">
+            <a:avLst>
+              <a:gd name="adj" fmla="val 1935"/>
+            </a:avLst>
+          </a:prstGeom>
+          <a:solidFill>
+            <a:srgbClr val="1E2761"/>
+          </a:solidFill>
+          <a:ln w="9525">
+            <a:solidFill>
+              <a:srgbClr val="1E2761"/>
+            </a:solidFill>
+            <a:prstDash val="solid"/>
+          </a:ln>
+        </p:spPr>
+      </p:sp>
+      <p:sp>
+        <p:nvSpPr>
+          <p:cNvPr id="5" name="Text 3"/>
+          <p:cNvSpPr/>
+          <p:nvPr/>
+        </p:nvSpPr>
+        <p:spPr>
+          <a:xfrm>
+            <a:off x="640080" y="1737360"/>
+            <a:ext cx="2468880" cy="914400"/>
+          </a:xfrm>
+          <a:prstGeom prst="rect">
+            <a:avLst/>
+          </a:prstGeom>
+          <a:noFill/>
+          <a:ln/>
+        </p:spPr>
+        <p:txBody>
+          <a:bodyPr wrap="square" lIns="0" tIns="0" rIns="0" bIns="0" rtlCol="0" anchor="ctr"/>
+          <a:lstStyle/>
+          <a:p>
+            <a:pPr algn="l" indent="0" marL="0">
+              <a:buNone/>
+            </a:pPr>
+            <a:r>
+              <a:rPr lang="en-US" sz="4800" b="1" dirty="0">
+                <a:solidFill>
+                  <a:srgbClr val="FFFFFF"/>
+                </a:solidFill>
+                <a:latin typeface="Cambria" pitchFamily="34" charset="0"/>
+                <a:ea typeface="Cambria" pitchFamily="34" charset="-122"/>
+                <a:cs typeface="Cambria" pitchFamily="34" charset="-120"/>
+              </a:rPr>
+              <a:t>3.6倍</a:t>
+            </a:r>
+            <a:endParaRPr lang="en-US" sz="4800" dirty="0"/>
+          </a:p>
+        </p:txBody>
+      </p:sp>
+      <p:sp>
+        <p:nvSpPr>
+          <p:cNvPr id="6" name="Text 4"/>
+          <p:cNvSpPr/>
+          <p:nvPr/>
+        </p:nvSpPr>
+        <p:spPr>
+          <a:xfrm>
+            <a:off x="640080" y="2697480"/>
+            <a:ext cx="2468880" cy="731520"/>
+          </a:xfrm>
+          <a:prstGeom prst="rect">
+            <a:avLst/>
+          </a:prstGeom>
+          <a:noFill/>
+          <a:ln/>
+        </p:spPr>
+        <p:txBody>
+          <a:bodyPr wrap="square" lIns="0" tIns="0" rIns="0" bIns="0" rtlCol="0" anchor="t"/>
+          <a:lstStyle/>
+          <a:p>
+            <a:pPr algn="l" indent="0" marL="0">
+              <a:buNone/>
+            </a:pPr>
+            <a:r>
+              <a:rPr lang="en-US" sz="1200" dirty="0">
+                <a:solidFill>
+                  <a:srgbClr val="CADCFC"/>
+                </a:solidFill>
+                <a:latin typeface="Calibri" pitchFamily="34" charset="0"/>
+                <a:ea typeface="Calibri" pitchFamily="34" charset="-122"/>
+                <a:cs typeface="Calibri" pitchFamily="34" charset="-120"/>
+              </a:rPr>
+              <a:t>ポイント還元の販促効果</a:t>
+            </a:r>
+            <a:endParaRPr lang="en-US" sz="1200" dirty="0"/>
+          </a:p>
+          <a:p>
+            <a:pPr algn="l" indent="0" marL="0">
+              <a:buNone/>
+            </a:pPr>
+            <a:r>
+              <a:rPr lang="en-US" sz="1200" dirty="0">
+                <a:solidFill>
+                  <a:srgbClr val="CADCFC"/>
+                </a:solidFill>
+                <a:latin typeface="Calibri" pitchFamily="34" charset="0"/>
+                <a:ea typeface="Calibri" pitchFamily="34" charset="-122"/>
+                <a:cs typeface="Calibri" pitchFamily="34" charset="-120"/>
+              </a:rPr>
+              <a:t>(vs 現金値引き)</a:t>
+            </a:r>
+            <a:endParaRPr lang="en-US" sz="1200" dirty="0"/>
+          </a:p>
+        </p:txBody>
+      </p:sp>
+      <p:sp>
+        <p:nvSpPr>
+          <p:cNvPr id="7" name="Text 5"/>
+          <p:cNvSpPr/>
+          <p:nvPr/>
+        </p:nvSpPr>
+        <p:spPr>
+          <a:xfrm>
+            <a:off x="640080" y="3566160"/>
+            <a:ext cx="2468880" cy="2011680"/>
+          </a:xfrm>
+          <a:prstGeom prst="rect">
+            <a:avLst/>
+          </a:prstGeom>
+          <a:noFill/>
+          <a:ln/>
+        </p:spPr>
+        <p:txBody>
+          <a:bodyPr wrap="square" lIns="0" tIns="0" rIns="0" bIns="0" rtlCol="0" anchor="t"/>
+          <a:lstStyle/>
+          <a:p>
+            <a:pPr algn="l" indent="0" marL="0">
+              <a:buNone/>
+            </a:pPr>
+            <a:r>
+              <a:rPr lang="en-US" sz="1000" dirty="0">
+                <a:solidFill>
+                  <a:srgbClr val="C7D3EE"/>
+                </a:solidFill>
+                <a:latin typeface="Calibri" pitchFamily="34" charset="0"/>
+                <a:ea typeface="Calibri" pitchFamily="34" charset="-122"/>
+                <a:cs typeface="Calibri" pitchFamily="34" charset="-120"/>
+              </a:rPr>
+              <a:t>行動経済学的には、ポイントは「今回の支払いと分離された利得」として認識され、現金値引きより心理的満足度が高い(プロスペクト理論)。保有効果によりポイントを失いたくない心理がリピート来店を促す</a:t>
+            </a:r>
+            <a:endParaRPr lang="en-US" sz="1000" dirty="0"/>
+          </a:p>
+        </p:txBody>
+      </p:sp>
+      <p:sp>
+        <p:nvSpPr>
+          <p:cNvPr id="8" name="Text 6"/>
+          <p:cNvSpPr/>
+          <p:nvPr/>
+        </p:nvSpPr>
+        <p:spPr>
+          <a:xfrm>
+            <a:off x="640080" y="5577840"/>
+            <a:ext cx="2468880" cy="228600"/>
+          </a:xfrm>
+          <a:prstGeom prst="rect">
+            <a:avLst/>
+          </a:prstGeom>
+          <a:noFill/>
+          <a:ln/>
+        </p:spPr>
+        <p:txBody>
+          <a:bodyPr wrap="square" lIns="0" tIns="0" rIns="0" bIns="0" rtlCol="0" anchor="ctr"/>
+          <a:lstStyle/>
+          <a:p>
+            <a:pPr algn="l" indent="0" marL="0">
+              <a:buNone/>
+            </a:pPr>
+            <a:r>
+              <a:rPr lang="en-US" sz="900" dirty="0">
+                <a:solidFill>
+                  <a:srgbClr val="8FA3D9"/>
+                </a:solidFill>
+                <a:latin typeface="Calibri" pitchFamily="34" charset="0"/>
+                <a:ea typeface="Calibri" pitchFamily="34" charset="-122"/>
+                <a:cs typeface="Calibri" pitchFamily="34" charset="-120"/>
+              </a:rPr>
+              <a:t>[23][24]</a:t>
+            </a:r>
+            <a:endParaRPr lang="en-US" sz="900" dirty="0"/>
+          </a:p>
+        </p:txBody>
+      </p:sp>
+      <p:sp>
+        <p:nvSpPr>
+          <p:cNvPr id="9" name="Shape 7"/>
+          <p:cNvSpPr/>
+          <p:nvPr/>
+        </p:nvSpPr>
+        <p:spPr>
+          <a:xfrm>
+            <a:off x="3566160" y="1444752"/>
+            <a:ext cx="310896" cy="310896"/>
+          </a:xfrm>
+          <a:prstGeom prst="ellipse">
+            <a:avLst/>
+          </a:prstGeom>
+          <a:solidFill>
+            <a:srgbClr val="334A8C"/>
+          </a:solidFill>
+          <a:ln/>
+        </p:spPr>
+      </p:sp>
+      <p:sp>
+        <p:nvSpPr>
+          <p:cNvPr id="10" name="Text 8"/>
+          <p:cNvSpPr/>
+          <p:nvPr/>
+        </p:nvSpPr>
+        <p:spPr>
+          <a:xfrm>
+            <a:off x="3566160" y="1444752"/>
+            <a:ext cx="310896" cy="310896"/>
+          </a:xfrm>
+          <a:prstGeom prst="rect">
+            <a:avLst/>
+          </a:prstGeom>
+          <a:noFill/>
+          <a:ln/>
+        </p:spPr>
+        <p:txBody>
+          <a:bodyPr wrap="square" lIns="0" tIns="0" rIns="0" bIns="0" rtlCol="0" anchor="ctr"/>
+          <a:lstStyle/>
+          <a:p>
+            <a:pPr algn="ctr" indent="0" marL="0">
+              <a:buNone/>
+            </a:pPr>
+            <a:r>
+              <a:rPr lang="en-US" sz="1300" b="1" dirty="0">
+                <a:solidFill>
+                  <a:srgbClr val="FFFFFF"/>
+                </a:solidFill>
+                <a:latin typeface="Calibri" pitchFamily="34" charset="0"/>
+                <a:ea typeface="Calibri" pitchFamily="34" charset="-122"/>
+                <a:cs typeface="Calibri" pitchFamily="34" charset="-120"/>
+              </a:rPr>
+              <a:t>1</a:t>
+            </a:r>
+            <a:endParaRPr lang="en-US" sz="1300" dirty="0"/>
+          </a:p>
+        </p:txBody>
+      </p:sp>
+      <p:sp>
+        <p:nvSpPr>
+          <p:cNvPr id="11" name="Text 9"/>
+          <p:cNvSpPr/>
+          <p:nvPr/>
+        </p:nvSpPr>
+        <p:spPr>
+          <a:xfrm>
+            <a:off x="4069080" y="1362456"/>
+            <a:ext cx="7635240" cy="1234440"/>
+          </a:xfrm>
+          <a:prstGeom prst="rect">
+            <a:avLst/>
+          </a:prstGeom>
+          <a:noFill/>
+          <a:ln/>
+        </p:spPr>
+        <p:txBody>
+          <a:bodyPr wrap="square" lIns="0" tIns="0" rIns="0" bIns="0" rtlCol="0" anchor="t"/>
+          <a:lstStyle/>
+          <a:p>
+            <a:pPr indent="0" marL="0">
+              <a:spcAft>
+                <a:spcPts val="300"/>
+              </a:spcAft>
+              <a:buNone/>
+            </a:pPr>
+            <a:r>
+              <a:rPr lang="en-US" sz="1400" b="1" dirty="0">
+                <a:solidFill>
+                  <a:srgbClr val="1E2761"/>
+                </a:solidFill>
+                <a:latin typeface="Calibri" pitchFamily="34" charset="0"/>
+                <a:ea typeface="Calibri" pitchFamily="34" charset="-122"/>
+                <a:cs typeface="Calibri" pitchFamily="34" charset="-120"/>
+              </a:rPr>
+              <a:t>訴求力の掛け算</a:t>
+            </a:r>
+            <a:endParaRPr lang="en-US" sz="1400" dirty="0"/>
+          </a:p>
+          <a:p>
+            <a:pPr indent="0" marL="0">
+              <a:buNone/>
+            </a:pPr>
+            <a:r>
+              <a:rPr lang="en-US" sz="1150" dirty="0">
+                <a:solidFill>
+                  <a:srgbClr val="1B1B2F"/>
+                </a:solidFill>
+                <a:latin typeface="Calibri" pitchFamily="34" charset="0"/>
+                <a:ea typeface="Calibri" pitchFamily="34" charset="-122"/>
+                <a:cs typeface="Calibri" pitchFamily="34" charset="-120"/>
+              </a:rPr>
+              <a:t>販促効果は現金値引きの3.6倍。複数ポイントが同時に付くとレイヤーごとに効果が積み上がる</a:t>
+            </a:r>
+            <a:endParaRPr lang="en-US" sz="1400" dirty="0"/>
+          </a:p>
+        </p:txBody>
+      </p:sp>
+      <p:sp>
+        <p:nvSpPr>
+          <p:cNvPr id="12" name="Shape 10"/>
+          <p:cNvSpPr/>
+          <p:nvPr/>
+        </p:nvSpPr>
+        <p:spPr>
+          <a:xfrm>
+            <a:off x="3566160" y="2816352"/>
+            <a:ext cx="310896" cy="310896"/>
+          </a:xfrm>
+          <a:prstGeom prst="ellipse">
+            <a:avLst/>
+          </a:prstGeom>
+          <a:solidFill>
+            <a:srgbClr val="334A8C"/>
+          </a:solidFill>
+          <a:ln/>
+        </p:spPr>
+      </p:sp>
+      <p:sp>
+        <p:nvSpPr>
+          <p:cNvPr id="13" name="Text 11"/>
+          <p:cNvSpPr/>
+          <p:nvPr/>
+        </p:nvSpPr>
+        <p:spPr>
+          <a:xfrm>
+            <a:off x="3566160" y="2816352"/>
+            <a:ext cx="310896" cy="310896"/>
+          </a:xfrm>
+          <a:prstGeom prst="rect">
+            <a:avLst/>
+          </a:prstGeom>
+          <a:noFill/>
+          <a:ln/>
+        </p:spPr>
+        <p:txBody>
+          <a:bodyPr wrap="square" lIns="0" tIns="0" rIns="0" bIns="0" rtlCol="0" anchor="ctr"/>
+          <a:lstStyle/>
+          <a:p>
+            <a:pPr algn="ctr" indent="0" marL="0">
+              <a:buNone/>
+            </a:pPr>
+            <a:r>
+              <a:rPr lang="en-US" sz="1300" b="1" dirty="0">
+                <a:solidFill>
+                  <a:srgbClr val="FFFFFF"/>
+                </a:solidFill>
+                <a:latin typeface="Calibri" pitchFamily="34" charset="0"/>
+                <a:ea typeface="Calibri" pitchFamily="34" charset="-122"/>
+                <a:cs typeface="Calibri" pitchFamily="34" charset="-120"/>
+              </a:rPr>
+              <a:t>2</a:t>
+            </a:r>
+            <a:endParaRPr lang="en-US" sz="1300" dirty="0"/>
+          </a:p>
+        </p:txBody>
+      </p:sp>
+      <p:sp>
+        <p:nvSpPr>
+          <p:cNvPr id="14" name="Text 12"/>
+          <p:cNvSpPr/>
+          <p:nvPr/>
+        </p:nvSpPr>
+        <p:spPr>
+          <a:xfrm>
+            <a:off x="4069080" y="2734056"/>
+            <a:ext cx="7635240" cy="1234440"/>
+          </a:xfrm>
+          <a:prstGeom prst="rect">
+            <a:avLst/>
+          </a:prstGeom>
+          <a:noFill/>
+          <a:ln/>
+        </p:spPr>
+        <p:txBody>
+          <a:bodyPr wrap="square" lIns="0" tIns="0" rIns="0" bIns="0" rtlCol="0" anchor="t"/>
+          <a:lstStyle/>
+          <a:p>
+            <a:pPr indent="0" marL="0">
+              <a:spcAft>
+                <a:spcPts val="300"/>
+              </a:spcAft>
+              <a:buNone/>
+            </a:pPr>
+            <a:r>
+              <a:rPr lang="en-US" sz="1400" b="1" dirty="0">
+                <a:solidFill>
+                  <a:srgbClr val="1E2761"/>
+                </a:solidFill>
+                <a:latin typeface="Calibri" pitchFamily="34" charset="0"/>
+                <a:ea typeface="Calibri" pitchFamily="34" charset="-122"/>
+                <a:cs typeface="Calibri" pitchFamily="34" charset="-120"/>
+              </a:rPr>
+              <a:t>役割分担(補完関係)</a:t>
+            </a:r>
+            <a:endParaRPr lang="en-US" sz="1400" dirty="0"/>
+          </a:p>
+          <a:p>
+            <a:pPr indent="0" marL="0">
+              <a:buNone/>
+            </a:pPr>
+            <a:r>
+              <a:rPr lang="en-US" sz="1150" dirty="0">
+                <a:solidFill>
+                  <a:srgbClr val="1B1B2F"/>
+                </a:solidFill>
+                <a:latin typeface="Calibri" pitchFamily="34" charset="0"/>
+                <a:ea typeface="Calibri" pitchFamily="34" charset="-122"/>
+                <a:cs typeface="Calibri" pitchFamily="34" charset="-120"/>
+              </a:rPr>
+              <a:t>独自ポイント=既存顧客の囲い込み・リピート促進、共通ポイント=新規顧客の呼び込み・認知拡大。両方で「新規獲得→リピーター化」の顧客ライフサイクル全体をカバーできる</a:t>
+            </a:r>
+            <a:endParaRPr lang="en-US" sz="1400" dirty="0"/>
+          </a:p>
+        </p:txBody>
+      </p:sp>
+      <p:sp>
+        <p:nvSpPr>
+          <p:cNvPr id="15" name="Shape 13"/>
+          <p:cNvSpPr/>
+          <p:nvPr/>
+        </p:nvSpPr>
+        <p:spPr>
+          <a:xfrm>
+            <a:off x="3566160" y="4187952"/>
+            <a:ext cx="310896" cy="310896"/>
+          </a:xfrm>
+          <a:prstGeom prst="ellipse">
+            <a:avLst/>
+          </a:prstGeom>
+          <a:solidFill>
+            <a:srgbClr val="334A8C"/>
+          </a:solidFill>
+          <a:ln/>
+        </p:spPr>
+      </p:sp>
+      <p:sp>
+        <p:nvSpPr>
+          <p:cNvPr id="16" name="Text 14"/>
+          <p:cNvSpPr/>
+          <p:nvPr/>
+        </p:nvSpPr>
+        <p:spPr>
+          <a:xfrm>
+            <a:off x="3566160" y="4187952"/>
+            <a:ext cx="310896" cy="310896"/>
+          </a:xfrm>
+          <a:prstGeom prst="rect">
+            <a:avLst/>
+          </a:prstGeom>
+          <a:noFill/>
+          <a:ln/>
+        </p:spPr>
+        <p:txBody>
+          <a:bodyPr wrap="square" lIns="0" tIns="0" rIns="0" bIns="0" rtlCol="0" anchor="ctr"/>
+          <a:lstStyle/>
+          <a:p>
+            <a:pPr algn="ctr" indent="0" marL="0">
+              <a:buNone/>
+            </a:pPr>
+            <a:r>
+              <a:rPr lang="en-US" sz="1300" b="1" dirty="0">
+                <a:solidFill>
+                  <a:srgbClr val="FFFFFF"/>
+                </a:solidFill>
+                <a:latin typeface="Calibri" pitchFamily="34" charset="0"/>
+                <a:ea typeface="Calibri" pitchFamily="34" charset="-122"/>
+                <a:cs typeface="Calibri" pitchFamily="34" charset="-120"/>
+              </a:rPr>
+              <a:t>3</a:t>
+            </a:r>
+            <a:endParaRPr lang="en-US" sz="1300" dirty="0"/>
+          </a:p>
+        </p:txBody>
+      </p:sp>
+      <p:sp>
+        <p:nvSpPr>
+          <p:cNvPr id="17" name="Text 15"/>
+          <p:cNvSpPr/>
+          <p:nvPr/>
+        </p:nvSpPr>
+        <p:spPr>
+          <a:xfrm>
+            <a:off x="4069080" y="4105656"/>
+            <a:ext cx="7635240" cy="1234440"/>
+          </a:xfrm>
+          <a:prstGeom prst="rect">
+            <a:avLst/>
+          </a:prstGeom>
+          <a:noFill/>
+          <a:ln/>
+        </p:spPr>
+        <p:txBody>
+          <a:bodyPr wrap="square" lIns="0" tIns="0" rIns="0" bIns="0" rtlCol="0" anchor="t"/>
+          <a:lstStyle/>
+          <a:p>
+            <a:pPr indent="0" marL="0">
+              <a:spcAft>
+                <a:spcPts val="300"/>
+              </a:spcAft>
+              <a:buNone/>
+            </a:pPr>
+            <a:r>
+              <a:rPr lang="en-US" sz="1400" b="1" dirty="0">
+                <a:solidFill>
+                  <a:srgbClr val="1E2761"/>
+                </a:solidFill>
+                <a:latin typeface="Calibri" pitchFamily="34" charset="0"/>
+                <a:ea typeface="Calibri" pitchFamily="34" charset="-122"/>
+                <a:cs typeface="Calibri" pitchFamily="34" charset="-120"/>
+              </a:rPr>
+              <a:t>コストに見合うと判断される業態のみ導入</a:t>
+            </a:r>
+            <a:endParaRPr lang="en-US" sz="1400" dirty="0"/>
+          </a:p>
+          <a:p>
+            <a:pPr indent="0" marL="0">
+              <a:buNone/>
+            </a:pPr>
+            <a:r>
+              <a:rPr lang="en-US" sz="1150" dirty="0">
+                <a:solidFill>
+                  <a:srgbClr val="1B1B2F"/>
+                </a:solidFill>
+                <a:latin typeface="Calibri" pitchFamily="34" charset="0"/>
+                <a:ea typeface="Calibri" pitchFamily="34" charset="-122"/>
+                <a:cs typeface="Calibri" pitchFamily="34" charset="-120"/>
+              </a:rPr>
+              <a:t>二重付与は加盟店コストが増加する(原資二重負担+レジオペレーションの複雑化)。それでも導入する店舗は、追加コストを上回る集客・客単価向上効果を見込んでいる [22]</a:t>
+            </a:r>
+            <a:endParaRPr lang="en-US" sz="1400" dirty="0"/>
+          </a:p>
+        </p:txBody>
+      </p:sp>
+      <p:sp>
+        <p:nvSpPr>
+          <p:cNvPr id="18" name="Shape 16"/>
+          <p:cNvSpPr/>
+          <p:nvPr/>
+        </p:nvSpPr>
+        <p:spPr>
+          <a:xfrm>
+            <a:off x="3566160" y="5486400"/>
+            <a:ext cx="8138160" cy="777240"/>
+          </a:xfrm>
+          <a:prstGeom prst="roundRect">
+            <a:avLst>
+              <a:gd name="adj" fmla="val 7059"/>
+            </a:avLst>
+          </a:prstGeom>
+          <a:solidFill>
+            <a:srgbClr val="FFFFFF"/>
+          </a:solidFill>
+          <a:ln w="9525">
+            <a:solidFill>
+              <a:srgbClr val="D7DEEE"/>
+            </a:solidFill>
+            <a:prstDash val="solid"/>
+          </a:ln>
+        </p:spPr>
+      </p:sp>
+      <p:sp>
+        <p:nvSpPr>
+          <p:cNvPr id="19" name="Text 17"/>
+          <p:cNvSpPr/>
+          <p:nvPr/>
+        </p:nvSpPr>
+        <p:spPr>
+          <a:xfrm>
+            <a:off x="3749040" y="5596128"/>
+            <a:ext cx="7772400" cy="594360"/>
+          </a:xfrm>
+          <a:prstGeom prst="rect">
+            <a:avLst/>
+          </a:prstGeom>
+          <a:noFill/>
+          <a:ln/>
+        </p:spPr>
+        <p:txBody>
+          <a:bodyPr wrap="square" lIns="0" tIns="0" rIns="0" bIns="0" rtlCol="0" anchor="t"/>
+          <a:lstStyle/>
+          <a:p>
+            <a:pPr indent="0" marL="0">
+              <a:buNone/>
+            </a:pPr>
+            <a:r>
+              <a:rPr lang="en-US" sz="1050" i="1" dirty="0">
+                <a:solidFill>
+                  <a:srgbClr val="5A6B8C"/>
+                </a:solidFill>
+                <a:latin typeface="Calibri" pitchFamily="34" charset="0"/>
+                <a:ea typeface="Calibri" pitchFamily="34" charset="-122"/>
+                <a:cs typeface="Calibri" pitchFamily="34" charset="-120"/>
+              </a:rPr>
+              <a:t>示唆: 「二重付与」は粗利が厚い・客単価が高い業態の特権であり、日用品のような薄利多売業態では成立しにくい。dポイントのホワイトレーベル化は、この「二重コストを払えない業態」でも共通ポイントの集客効果を低コストで享受できる仕組みになり得る</a:t>
+            </a:r>
+            <a:endParaRPr lang="en-US" sz="1050" dirty="0"/>
+          </a:p>
+        </p:txBody>
+      </p:sp>
+    </p:spTree>
+  </p:cSld>
+  <p:clrMapOvr>
+    <a:masterClrMapping/>
+  </p:clrMapOvr>
+</p:sld>
+</file>
+
+<file path=ppt/slides/slide7.xml><?xml version="1.0" encoding="utf-8"?>
+<p:sld xmlns:a="http://schemas.openxmlformats.org/drawingml/2006/main" xmlns:r="http://schemas.openxmlformats.org/officeDocument/2006/relationships" xmlns:p="http://schemas.openxmlformats.org/presentationml/2006/main">
+  <p:cSld name="Slide 7">
+    <p:bg>
+      <p:bgPr>
+        <a:solidFill>
           <a:srgbClr val="FFFFFF"/>
         </a:solidFill>
       </p:bgPr>
@@ -5812,7 +8181,7 @@
         <p:spPr>
           <a:xfrm>
             <a:off x="457200" y="1005840"/>
-            <a:ext cx="5440680" cy="3794760"/>
+            <a:ext cx="5440680" cy="3886200"/>
           </a:xfrm>
           <a:prstGeom prst="rect">
             <a:avLst/>
@@ -5826,12 +8195,12 @@
           <a:p>
             <a:pPr indent="0" marL="0">
               <a:spcAft>
-                <a:spcPts val="600"/>
+                <a:spcPts val="500"/>
               </a:spcAft>
               <a:buNone/>
             </a:pPr>
             <a:r>
-              <a:rPr lang="en-US" sz="950" dirty="0">
+              <a:rPr lang="en-US" sz="900" dirty="0">
                 <a:solidFill>
                   <a:srgbClr val="1B1B2F"/>
                 </a:solidFill>
@@ -5841,17 +8210,17 @@
               </a:rPr>
               <a:t>[1] MMD研究所ほか「通信会社と利用ポイントに関する調査」 ― キャリア別メイン利用ポイントの相関</a:t>
             </a:r>
-            <a:endParaRPr lang="en-US" sz="950" dirty="0"/>
+            <a:endParaRPr lang="en-US" sz="900" dirty="0"/>
           </a:p>
           <a:p>
             <a:pPr indent="0" marL="0">
               <a:spcAft>
-                <a:spcPts val="600"/>
+                <a:spcPts val="500"/>
               </a:spcAft>
               <a:buNone/>
             </a:pPr>
             <a:r>
-              <a:rPr lang="en-US" sz="950" dirty="0">
+              <a:rPr lang="en-US" sz="900" dirty="0">
                 <a:solidFill>
                   <a:srgbClr val="1B1B2F"/>
                 </a:solidFill>
@@ -5861,17 +8230,17 @@
               </a:rPr>
               <a:t>[2] NTTドコモ モバイル社会研究所 シニア調査(70代スマホ所有率など)</a:t>
             </a:r>
-            <a:endParaRPr lang="en-US" sz="950" dirty="0"/>
+            <a:endParaRPr lang="en-US" sz="900" dirty="0"/>
           </a:p>
           <a:p>
             <a:pPr indent="0" marL="0">
               <a:spcAft>
-                <a:spcPts val="600"/>
+                <a:spcPts val="500"/>
               </a:spcAft>
               <a:buNone/>
             </a:pPr>
             <a:r>
-              <a:rPr lang="en-US" sz="950" dirty="0">
+              <a:rPr lang="en-US" sz="900" dirty="0">
                 <a:solidFill>
                   <a:srgbClr val="1B1B2F"/>
                 </a:solidFill>
@@ -5881,17 +8250,17 @@
               </a:rPr>
               <a:t>[3] ITmedia ビジネスオンライン「『ドコモ経済圏』に取り込め ―会員数1億人超え、dポイントクラブがLINE連携で目指すLTV最大化戦略」(2025年12月)</a:t>
             </a:r>
-            <a:endParaRPr lang="en-US" sz="950" dirty="0"/>
+            <a:endParaRPr lang="en-US" sz="900" dirty="0"/>
           </a:p>
           <a:p>
             <a:pPr indent="0" marL="0">
               <a:spcAft>
-                <a:spcPts val="600"/>
+                <a:spcPts val="500"/>
               </a:spcAft>
               <a:buNone/>
             </a:pPr>
             <a:r>
-              <a:rPr lang="en-US" sz="950" dirty="0">
+              <a:rPr lang="en-US" sz="900" dirty="0">
                 <a:solidFill>
                   <a:srgbClr val="1B1B2F"/>
                 </a:solidFill>
@@ -5901,17 +8270,17 @@
               </a:rPr>
               <a:t>[4] 株式会社ロイヤリティ マーケティング公式データ(paymentnavi「Ponta 15年の歩みから見るポイントが生み出す価値と決済の変化」)</a:t>
             </a:r>
-            <a:endParaRPr lang="en-US" sz="950" dirty="0"/>
+            <a:endParaRPr lang="en-US" sz="900" dirty="0"/>
           </a:p>
           <a:p>
             <a:pPr indent="0" marL="0">
               <a:spcAft>
-                <a:spcPts val="600"/>
+                <a:spcPts val="500"/>
               </a:spcAft>
               <a:buNone/>
             </a:pPr>
             <a:r>
-              <a:rPr lang="en-US" sz="950" dirty="0">
+              <a:rPr lang="en-US" sz="900" dirty="0">
                 <a:solidFill>
                   <a:srgbClr val="1B1B2F"/>
                 </a:solidFill>
@@ -5921,17 +8290,17 @@
               </a:rPr>
               <a:t>[5] MMD研究所ほか 年代別ポイント利用実態調査</a:t>
             </a:r>
-            <a:endParaRPr lang="en-US" sz="950" dirty="0"/>
+            <a:endParaRPr lang="en-US" sz="900" dirty="0"/>
           </a:p>
           <a:p>
             <a:pPr indent="0" marL="0">
               <a:spcAft>
-                <a:spcPts val="600"/>
+                <a:spcPts val="500"/>
               </a:spcAft>
               <a:buNone/>
             </a:pPr>
             <a:r>
-              <a:rPr lang="en-US" sz="950" dirty="0">
+              <a:rPr lang="en-US" sz="900" dirty="0">
                 <a:solidFill>
                   <a:srgbClr val="1B1B2F"/>
                 </a:solidFill>
@@ -5941,17 +8310,17 @@
               </a:rPr>
               <a:t>[6] SBペイメントサービス「実店舗でのキャッシュレス決済の利用実態調査結果」(2024年11月)</a:t>
             </a:r>
-            <a:endParaRPr lang="en-US" sz="950" dirty="0"/>
+            <a:endParaRPr lang="en-US" sz="900" dirty="0"/>
           </a:p>
           <a:p>
             <a:pPr indent="0" marL="0">
               <a:spcAft>
-                <a:spcPts val="600"/>
+                <a:spcPts val="500"/>
               </a:spcAft>
               <a:buNone/>
             </a:pPr>
             <a:r>
-              <a:rPr lang="en-US" sz="950" dirty="0">
+              <a:rPr lang="en-US" sz="900" dirty="0">
                 <a:solidFill>
                   <a:srgbClr val="1B1B2F"/>
                 </a:solidFill>
@@ -5961,17 +8330,17 @@
               </a:rPr>
               <a:t>[7] マナミナ(バリューズ)/アイリッジ調査「スマホ決済利用率」</a:t>
             </a:r>
-            <a:endParaRPr lang="en-US" sz="950" dirty="0"/>
+            <a:endParaRPr lang="en-US" sz="900" dirty="0"/>
           </a:p>
           <a:p>
             <a:pPr indent="0" marL="0">
               <a:spcAft>
-                <a:spcPts val="600"/>
+                <a:spcPts val="500"/>
               </a:spcAft>
               <a:buNone/>
             </a:pPr>
             <a:r>
-              <a:rPr lang="en-US" sz="950" dirty="0">
+              <a:rPr lang="en-US" sz="900" dirty="0">
                 <a:solidFill>
                   <a:srgbClr val="1B1B2F"/>
                 </a:solidFill>
@@ -5981,17 +8350,17 @@
               </a:rPr>
               <a:t>[8] Vポイントマーケティング(旧CCC)プレスリリース「Tカードの年間利用会員数が日本総人口の50%突破」(2017年)</a:t>
             </a:r>
-            <a:endParaRPr lang="en-US" sz="950" dirty="0"/>
+            <a:endParaRPr lang="en-US" sz="900" dirty="0"/>
           </a:p>
           <a:p>
             <a:pPr indent="0" marL="0">
               <a:spcAft>
-                <a:spcPts val="600"/>
+                <a:spcPts val="500"/>
               </a:spcAft>
               <a:buNone/>
             </a:pPr>
             <a:r>
-              <a:rPr lang="en-US" sz="950" dirty="0">
+              <a:rPr lang="en-US" sz="900" dirty="0">
                 <a:solidFill>
                   <a:srgbClr val="1B1B2F"/>
                 </a:solidFill>
@@ -6001,7 +8370,67 @@
               </a:rPr>
               <a:t>[9] paymentnavi「SMBCグループ共通ポイント『Vポイント』、若年層獲得や日常利用促進で成果」</a:t>
             </a:r>
-            <a:endParaRPr lang="en-US" sz="950" dirty="0"/>
+            <a:endParaRPr lang="en-US" sz="900" dirty="0"/>
+          </a:p>
+          <a:p>
+            <a:pPr indent="0" marL="0">
+              <a:spcAft>
+                <a:spcPts val="500"/>
+              </a:spcAft>
+              <a:buNone/>
+            </a:pPr>
+            <a:r>
+              <a:rPr lang="en-US" sz="900" dirty="0">
+                <a:solidFill>
+                  <a:srgbClr val="1B1B2F"/>
+                </a:solidFill>
+                <a:latin typeface="Calibri" pitchFamily="34" charset="0"/>
+                <a:ea typeface="Calibri" pitchFamily="34" charset="-122"/>
+                <a:cs typeface="Calibri" pitchFamily="34" charset="-120"/>
+              </a:rPr>
+              <a:t>[10] ITmedia ビジネスオンライン「日常で最も多く利用するポイントは『楽天ポイント』幅広い世代で最多」(2021年10月)</a:t>
+            </a:r>
+            <a:endParaRPr lang="en-US" sz="900" dirty="0"/>
+          </a:p>
+          <a:p>
+            <a:pPr indent="0" marL="0">
+              <a:spcAft>
+                <a:spcPts val="500"/>
+              </a:spcAft>
+              <a:buNone/>
+            </a:pPr>
+            <a:r>
+              <a:rPr lang="en-US" sz="900" dirty="0">
+                <a:solidFill>
+                  <a:srgbClr val="1B1B2F"/>
+                </a:solidFill>
+                <a:latin typeface="Calibri" pitchFamily="34" charset="0"/>
+                <a:ea typeface="Calibri" pitchFamily="34" charset="-122"/>
+                <a:cs typeface="Calibri" pitchFamily="34" charset="-120"/>
+              </a:rPr>
+              <a:t>[11] MMD研究所「ポイント経済圏のサービス利用に関する調査」(2025年7月)</a:t>
+            </a:r>
+            <a:endParaRPr lang="en-US" sz="900" dirty="0"/>
+          </a:p>
+          <a:p>
+            <a:pPr indent="0" marL="0">
+              <a:spcAft>
+                <a:spcPts val="500"/>
+              </a:spcAft>
+              <a:buNone/>
+            </a:pPr>
+            <a:r>
+              <a:rPr lang="en-US" sz="900" dirty="0">
+                <a:solidFill>
+                  <a:srgbClr val="1B1B2F"/>
+                </a:solidFill>
+                <a:latin typeface="Calibri" pitchFamily="34" charset="0"/>
+                <a:ea typeface="Calibri" pitchFamily="34" charset="-122"/>
+                <a:cs typeface="Calibri" pitchFamily="34" charset="-120"/>
+              </a:rPr>
+              <a:t>[12] 第一生命経済研究所「シニアのポイ活事情 ―キャッシュレス化が後押しするシニアのポイントサービス利用―」鄭美沙(Life Design Report 2025.7、50〜79歳2,400人調査)</a:t>
+            </a:r>
+            <a:endParaRPr lang="en-US" sz="900" dirty="0"/>
           </a:p>
         </p:txBody>
       </p:sp>
@@ -6014,7 +8443,7 @@
         <p:spPr>
           <a:xfrm>
             <a:off x="6263640" y="1005840"/>
-            <a:ext cx="5440680" cy="3794760"/>
+            <a:ext cx="5440680" cy="3886200"/>
           </a:xfrm>
           <a:prstGeom prst="rect">
             <a:avLst/>
@@ -6028,12 +8457,12 @@
           <a:p>
             <a:pPr indent="0" marL="0">
               <a:spcAft>
-                <a:spcPts val="600"/>
+                <a:spcPts val="500"/>
               </a:spcAft>
               <a:buNone/>
             </a:pPr>
             <a:r>
-              <a:rPr lang="en-US" sz="950" dirty="0">
+              <a:rPr lang="en-US" sz="900" dirty="0">
                 <a:solidFill>
                   <a:srgbClr val="1B1B2F"/>
                 </a:solidFill>
@@ -6041,19 +8470,19 @@
                 <a:ea typeface="Calibri" pitchFamily="34" charset="-122"/>
                 <a:cs typeface="Calibri" pitchFamily="34" charset="-120"/>
               </a:rPr>
-              <a:t>[10] ITmedia ビジネスオンライン「日常で最も多く利用するポイントは『楽天ポイント』幅広い世代で最多」(2021年10月)</a:t>
-            </a:r>
-            <a:endParaRPr lang="en-US" sz="950" dirty="0"/>
+              <a:t>[13] マイナビニュース「『ポイ活』を行っているシニアは6割弱 ―ポイ活アプリ、ネットバンキングの利用状況は?」(2025年7月10日)</a:t>
+            </a:r>
+            <a:endParaRPr lang="en-US" sz="900" dirty="0"/>
           </a:p>
           <a:p>
             <a:pPr indent="0" marL="0">
               <a:spcAft>
-                <a:spcPts val="600"/>
+                <a:spcPts val="500"/>
               </a:spcAft>
               <a:buNone/>
             </a:pPr>
             <a:r>
-              <a:rPr lang="en-US" sz="950" dirty="0">
+              <a:rPr lang="en-US" sz="900" dirty="0">
                 <a:solidFill>
                   <a:srgbClr val="1B1B2F"/>
                 </a:solidFill>
@@ -6061,19 +8490,19 @@
                 <a:ea typeface="Calibri" pitchFamily="34" charset="-122"/>
                 <a:cs typeface="Calibri" pitchFamily="34" charset="-120"/>
               </a:rPr>
-              <a:t>[11] MMD研究所「ポイント経済圏のサービス利用に関する調査」(2025年7月)</a:t>
-            </a:r>
-            <a:endParaRPr lang="en-US" sz="950" dirty="0"/>
+              <a:t>[14] 株式会社ハルメク「シニア女性に聞いた『キャッシュレス決済』に関する実態調査」</a:t>
+            </a:r>
+            <a:endParaRPr lang="en-US" sz="900" dirty="0"/>
           </a:p>
           <a:p>
             <a:pPr indent="0" marL="0">
               <a:spcAft>
-                <a:spcPts val="600"/>
+                <a:spcPts val="500"/>
               </a:spcAft>
               <a:buNone/>
             </a:pPr>
             <a:r>
-              <a:rPr lang="en-US" sz="950" dirty="0">
+              <a:rPr lang="en-US" sz="900" dirty="0">
                 <a:solidFill>
                   <a:srgbClr val="1B1B2F"/>
                 </a:solidFill>
@@ -6081,19 +8510,19 @@
                 <a:ea typeface="Calibri" pitchFamily="34" charset="-122"/>
                 <a:cs typeface="Calibri" pitchFamily="34" charset="-120"/>
               </a:rPr>
-              <a:t>[12] 第一生命経済研究所「シニアのポイ活事情 ―キャッシュレス化が後押しするシニアのポイントサービス利用―」鄭美沙(Life Design Report 2025.7、50〜79歳2,400人調査)</a:t>
-            </a:r>
-            <a:endParaRPr lang="en-US" sz="950" dirty="0"/>
+              <a:t>[15] NTTドコモ モバイル社会研究所「【シニア】QRコード決済利用率 60代が1年で7ポイント上昇し半数を超える」(2024年5月30日)</a:t>
+            </a:r>
+            <a:endParaRPr lang="en-US" sz="900" dirty="0"/>
           </a:p>
           <a:p>
             <a:pPr indent="0" marL="0">
               <a:spcAft>
-                <a:spcPts val="600"/>
+                <a:spcPts val="500"/>
               </a:spcAft>
               <a:buNone/>
             </a:pPr>
             <a:r>
-              <a:rPr lang="en-US" sz="950" dirty="0">
+              <a:rPr lang="en-US" sz="900" dirty="0">
                 <a:solidFill>
                   <a:srgbClr val="1B1B2F"/>
                 </a:solidFill>
@@ -6101,19 +8530,19 @@
                 <a:ea typeface="Calibri" pitchFamily="34" charset="-122"/>
                 <a:cs typeface="Calibri" pitchFamily="34" charset="-120"/>
               </a:rPr>
-              <a:t>[13] マイナビニュース「『ポイ活』を行っているシニアは6割弱 ―ポイ活アプリ、ネットバンキングの利用状況は?」(2025年7月10日)</a:t>
-            </a:r>
-            <a:endParaRPr lang="en-US" sz="950" dirty="0"/>
+              <a:t>[16] マイボイスコム株式会社「ポイントサービスに関するアンケート調査」(直近1年間の利用店舗・業種別)</a:t>
+            </a:r>
+            <a:endParaRPr lang="en-US" sz="900" dirty="0"/>
           </a:p>
           <a:p>
             <a:pPr indent="0" marL="0">
               <a:spcAft>
-                <a:spcPts val="600"/>
+                <a:spcPts val="500"/>
               </a:spcAft>
               <a:buNone/>
             </a:pPr>
             <a:r>
-              <a:rPr lang="en-US" sz="950" dirty="0">
+              <a:rPr lang="en-US" sz="900" dirty="0">
                 <a:solidFill>
                   <a:srgbClr val="1B1B2F"/>
                 </a:solidFill>
@@ -6121,19 +8550,19 @@
                 <a:ea typeface="Calibri" pitchFamily="34" charset="-122"/>
                 <a:cs typeface="Calibri" pitchFamily="34" charset="-120"/>
               </a:rPr>
-              <a:t>[14] 株式会社ハルメク「シニア女性に聞いた『キャッシュレス決済』に関する実態調査」</a:t>
-            </a:r>
-            <a:endParaRPr lang="en-US" sz="950" dirty="0"/>
+              <a:t>[17] 一般社団法人全国スーパーマーケット協会・一般社団法人日本スーパーマーケット協会「2023年 スーパーマーケット年次統計調査 報告書」(2023年10月)</a:t>
+            </a:r>
+            <a:endParaRPr lang="en-US" sz="900" dirty="0"/>
           </a:p>
           <a:p>
             <a:pPr indent="0" marL="0">
               <a:spcAft>
-                <a:spcPts val="600"/>
+                <a:spcPts val="500"/>
               </a:spcAft>
               <a:buNone/>
             </a:pPr>
             <a:r>
-              <a:rPr lang="en-US" sz="950" dirty="0">
+              <a:rPr lang="en-US" sz="900" dirty="0">
                 <a:solidFill>
                   <a:srgbClr val="1B1B2F"/>
                 </a:solidFill>
@@ -6141,19 +8570,19 @@
                 <a:ea typeface="Calibri" pitchFamily="34" charset="-122"/>
                 <a:cs typeface="Calibri" pitchFamily="34" charset="-120"/>
               </a:rPr>
-              <a:t>[15] NTTドコモ モバイル社会研究所「【シニア】QRコード決済利用率 60代が1年で7ポイント上昇し半数を超える」(2024年5月30日)</a:t>
-            </a:r>
-            <a:endParaRPr lang="en-US" sz="950" dirty="0"/>
+              <a:t>[18] 株式会社プラネット「意識調査 Fromプラネット Vol.75 ―ポイントカードに関する意識調査―」</a:t>
+            </a:r>
+            <a:endParaRPr lang="en-US" sz="900" dirty="0"/>
           </a:p>
           <a:p>
             <a:pPr indent="0" marL="0">
               <a:spcAft>
-                <a:spcPts val="600"/>
+                <a:spcPts val="500"/>
               </a:spcAft>
               <a:buNone/>
             </a:pPr>
             <a:r>
-              <a:rPr lang="en-US" sz="950" dirty="0">
+              <a:rPr lang="en-US" sz="900" dirty="0">
                 <a:solidFill>
                   <a:srgbClr val="1B1B2F"/>
                 </a:solidFill>
@@ -6161,19 +8590,19 @@
                 <a:ea typeface="Calibri" pitchFamily="34" charset="-122"/>
                 <a:cs typeface="Calibri" pitchFamily="34" charset="-120"/>
               </a:rPr>
-              <a:t>[16] マイボイスコム株式会社「ポイントサービスに関するアンケート調査」(直近1年間の利用店舗・業種別)</a:t>
-            </a:r>
-            <a:endParaRPr lang="en-US" sz="950" dirty="0"/>
+              <a:t>[19] ポイントマーケティングラボ「共通ポイントと自社（個別）ポイントの特徴や違い」</a:t>
+            </a:r>
+            <a:endParaRPr lang="en-US" sz="900" dirty="0"/>
           </a:p>
           <a:p>
             <a:pPr indent="0" marL="0">
               <a:spcAft>
-                <a:spcPts val="600"/>
+                <a:spcPts val="500"/>
               </a:spcAft>
               <a:buNone/>
             </a:pPr>
             <a:r>
-              <a:rPr lang="en-US" sz="950" dirty="0">
+              <a:rPr lang="en-US" sz="900" dirty="0">
                 <a:solidFill>
                   <a:srgbClr val="1B1B2F"/>
                 </a:solidFill>
@@ -6181,19 +8610,19 @@
                 <a:ea typeface="Calibri" pitchFamily="34" charset="-122"/>
                 <a:cs typeface="Calibri" pitchFamily="34" charset="-120"/>
               </a:rPr>
-              <a:t>[17] 一般社団法人全国スーパーマーケット協会・一般社団法人日本スーパーマーケット協会「2023年 スーパーマーケット年次統計調査 報告書」(2023年10月)</a:t>
-            </a:r>
-            <a:endParaRPr lang="en-US" sz="950" dirty="0"/>
+              <a:t>[20] LIMO「TポイントやPontaの共通ポイント、原資は誰が出しているの？ 増える共通ポイント導入企業、今後の課題は何か」</a:t>
+            </a:r>
+            <a:endParaRPr lang="en-US" sz="900" dirty="0"/>
           </a:p>
           <a:p>
             <a:pPr indent="0" marL="0">
               <a:spcAft>
-                <a:spcPts val="600"/>
+                <a:spcPts val="500"/>
               </a:spcAft>
               <a:buNone/>
             </a:pPr>
             <a:r>
-              <a:rPr lang="en-US" sz="950" dirty="0">
+              <a:rPr lang="en-US" sz="900" dirty="0">
                 <a:solidFill>
                   <a:srgbClr val="1B1B2F"/>
                 </a:solidFill>
@@ -6201,9 +8630,69 @@
                 <a:ea typeface="Calibri" pitchFamily="34" charset="-122"/>
                 <a:cs typeface="Calibri" pitchFamily="34" charset="-120"/>
               </a:rPr>
-              <a:t>[18] 株式会社プラネット「意識調査 Fromプラネット Vol.75 ―ポイントカードに関する意識調査―」</a:t>
-            </a:r>
-            <a:endParaRPr lang="en-US" sz="950" dirty="0"/>
+              <a:t>[21] コツマガ「dポイントは2重取り、3重取りもできる！対象の加盟店と手順、注意点を解説」</a:t>
+            </a:r>
+            <a:endParaRPr lang="en-US" sz="900" dirty="0"/>
+          </a:p>
+          <a:p>
+            <a:pPr indent="0" marL="0">
+              <a:spcAft>
+                <a:spcPts val="500"/>
+              </a:spcAft>
+              <a:buNone/>
+            </a:pPr>
+            <a:r>
+              <a:rPr lang="en-US" sz="900" dirty="0">
+                <a:solidFill>
+                  <a:srgbClr val="1B1B2F"/>
+                </a:solidFill>
+                <a:latin typeface="Calibri" pitchFamily="34" charset="0"/>
+                <a:ea typeface="Calibri" pitchFamily="34" charset="-122"/>
+                <a:cs typeface="Calibri" pitchFamily="34" charset="-120"/>
+              </a:rPr>
+              <a:t>[22] ポイ探「独自ポイントと共通ポイントの併用パターンが増えてきた理由とは？ 独自ポイントを発行するメリットを解説！」</a:t>
+            </a:r>
+            <a:endParaRPr lang="en-US" sz="900" dirty="0"/>
+          </a:p>
+          <a:p>
+            <a:pPr indent="0" marL="0">
+              <a:spcAft>
+                <a:spcPts val="500"/>
+              </a:spcAft>
+              <a:buNone/>
+            </a:pPr>
+            <a:r>
+              <a:rPr lang="en-US" sz="900" dirty="0">
+                <a:solidFill>
+                  <a:srgbClr val="1B1B2F"/>
+                </a:solidFill>
+                <a:latin typeface="Calibri" pitchFamily="34" charset="0"/>
+                <a:ea typeface="Calibri" pitchFamily="34" charset="-122"/>
+                <a:cs typeface="Calibri" pitchFamily="34" charset="-120"/>
+              </a:rPr>
+              <a:t>[23] PRESIDENT「なぜか満足度が高まる『ポイント還元』の罠 販促効果は『値引き』の3.6倍もある」</a:t>
+            </a:r>
+            <a:endParaRPr lang="en-US" sz="900" dirty="0"/>
+          </a:p>
+          <a:p>
+            <a:pPr indent="0" marL="0">
+              <a:spcAft>
+                <a:spcPts val="500"/>
+              </a:spcAft>
+              <a:buNone/>
+            </a:pPr>
+            <a:r>
+              <a:rPr lang="en-US" sz="900" dirty="0">
+                <a:solidFill>
+                  <a:srgbClr val="1B1B2F"/>
+                </a:solidFill>
+                <a:latin typeface="Calibri" pitchFamily="34" charset="0"/>
+                <a:ea typeface="Calibri" pitchFamily="34" charset="-122"/>
+                <a:cs typeface="Calibri" pitchFamily="34" charset="-120"/>
+              </a:rPr>
+              <a:t>[24] 東芝テック「現金値引よりポイント還元が好まれるワケ―行動経済学が教える正しいポイントの貯め方」</a:t>
+            </a:r>
+            <a:endParaRPr lang="en-US" sz="900" dirty="0"/>
           </a:p>
         </p:txBody>
       </p:sp>
@@ -6315,9 +8804,9 @@
 </p:sld>
 </file>
 
-<file path=ppt/slides/slide6.xml><?xml version="1.0" encoding="utf-8"?>
+<file path=ppt/slides/slide8.xml><?xml version="1.0" encoding="utf-8"?>
 <p:sld xmlns:a="http://schemas.openxmlformats.org/drawingml/2006/main" xmlns:r="http://schemas.openxmlformats.org/officeDocument/2006/relationships" xmlns:p="http://schemas.openxmlformats.org/presentationml/2006/main">
-  <p:cSld name="Slide 6">
+  <p:cSld name="Slide 8">
     <p:bg>
       <p:bgPr>
         <a:solidFill>

--- a/大貴/添付ファイル/主要ポイント会員属性の偏り比較.pptx
+++ b/大貴/添付ファイル/主要ポイント会員属性の偏り比較.pptx
@@ -13,9 +13,11 @@
     <p:sldId id="261" r:id="rId7"/>
     <p:sldId id="262" r:id="rId8"/>
     <p:sldId id="263" r:id="rId9"/>
+    <p:sldId id="264" r:id="rId10"/>
+    <p:sldId id="265" r:id="rId11"/>
   </p:sldIdLst>
   <p:notesMasterIdLst>
-    <p:notesMasterId r:id="rId10"/>
+    <p:notesMasterId r:id="rId12"/>
   </p:notesMasterIdLst>
   <p:sldSz cx="12192000" cy="6858000"/>
   <p:notesSz cx="6858000" cy="12192000"/>
@@ -551,6 +553,94 @@
 </p:notes>
 </file>
 
+<file path=ppt/notesSlides/notesSlide10.xml><?xml version="1.0" encoding="utf-8"?>
+<p:notes xmlns:a="http://schemas.openxmlformats.org/drawingml/2006/main" xmlns:r="http://schemas.openxmlformats.org/officeDocument/2006/relationships" xmlns:p="http://schemas.openxmlformats.org/presentationml/2006/main">
+  <p:cSld>
+    <p:spTree>
+      <p:nvGrpSpPr>
+        <p:cNvPr id="1" name=""/>
+        <p:cNvGrpSpPr/>
+        <p:nvPr/>
+      </p:nvGrpSpPr>
+      <p:grpSpPr>
+        <a:xfrm>
+          <a:off x="0" y="0"/>
+          <a:ext cx="0" cy="0"/>
+          <a:chOff x="0" y="0"/>
+          <a:chExt cx="0" cy="0"/>
+        </a:xfrm>
+      </p:grpSpPr>
+      <p:sp>
+        <p:nvSpPr>
+          <p:cNvPr id="2" name="Slide Image Placeholder 1"/>
+          <p:cNvSpPr>
+            <a:spLocks noGrp="1" noRot="1" noChangeAspect="1"/>
+          </p:cNvSpPr>
+          <p:nvPr>
+            <p:ph type="sldImg"/>
+          </p:nvPr>
+        </p:nvSpPr>
+        <p:spPr/>
+      </p:sp>
+      <p:sp>
+        <p:nvSpPr>
+          <p:cNvPr id="3" name="Notes Placeholder 2"/>
+          <p:cNvSpPr>
+            <a:spLocks noGrp="1"/>
+          </p:cNvSpPr>
+          <p:nvPr>
+            <p:ph type="body" idx="1"/>
+          </p:nvPr>
+        </p:nvSpPr>
+        <p:spPr/>
+        <p:txBody>
+          <a:bodyPr/>
+          <a:lstStyle/>
+          <a:p>
+            <a:r>
+              <a:rPr lang="en-US" dirty="0"/>
+              <a:t/>
+            </a:r>
+            <a:endParaRPr lang="en-US" dirty="0"/>
+          </a:p>
+        </p:txBody>
+      </p:sp>
+      <p:sp>
+        <p:nvSpPr>
+          <p:cNvPr id="4" name="Slide Number Placeholder 3"/>
+          <p:cNvSpPr>
+            <a:spLocks noGrp="1"/>
+          </p:cNvSpPr>
+          <p:nvPr>
+            <p:ph type="sldNum" sz="quarter" idx="10"/>
+          </p:nvPr>
+        </p:nvSpPr>
+        <p:spPr/>
+        <p:txBody>
+          <a:bodyPr/>
+          <a:lstStyle/>
+          <a:p>
+            <a:fld id="{F7021451-1387-4CA6-816F-3879F97B5CBC}" type="slidenum">
+              <a:rPr lang="en-US"/>
+              <a:t>10</a:t>
+            </a:fld>
+            <a:endParaRPr lang="en-US"/>
+          </a:p>
+        </p:txBody>
+      </p:sp>
+    </p:spTree>
+    <p:extLst>
+      <p:ext uri="{BB962C8B-B14F-4D97-AF65-F5344CB8AC3E}">
+        <p14:creationId xmlns:p14="http://schemas.microsoft.com/office/powerpoint/2010/main" val="1024086991"/>
+      </p:ext>
+    </p:extLst>
+  </p:cSld>
+  <p:clrMapOvr>
+    <a:masterClrMapping/>
+  </p:clrMapOvr>
+</p:notes>
+</file>
+
 <file path=ppt/notesSlides/notesSlide2.xml><?xml version="1.0" encoding="utf-8"?>
 <p:notes xmlns:a="http://schemas.openxmlformats.org/drawingml/2006/main" xmlns:r="http://schemas.openxmlformats.org/officeDocument/2006/relationships" xmlns:p="http://schemas.openxmlformats.org/presentationml/2006/main">
   <p:cSld>
@@ -1149,6 +1239,94 @@
             <a:fld id="{F7021451-1387-4CA6-816F-3879F97B5CBC}" type="slidenum">
               <a:rPr lang="en-US"/>
               <a:t>8</a:t>
+            </a:fld>
+            <a:endParaRPr lang="en-US"/>
+          </a:p>
+        </p:txBody>
+      </p:sp>
+    </p:spTree>
+    <p:extLst>
+      <p:ext uri="{BB962C8B-B14F-4D97-AF65-F5344CB8AC3E}">
+        <p14:creationId xmlns:p14="http://schemas.microsoft.com/office/powerpoint/2010/main" val="1024086991"/>
+      </p:ext>
+    </p:extLst>
+  </p:cSld>
+  <p:clrMapOvr>
+    <a:masterClrMapping/>
+  </p:clrMapOvr>
+</p:notes>
+</file>
+
+<file path=ppt/notesSlides/notesSlide9.xml><?xml version="1.0" encoding="utf-8"?>
+<p:notes xmlns:a="http://schemas.openxmlformats.org/drawingml/2006/main" xmlns:r="http://schemas.openxmlformats.org/officeDocument/2006/relationships" xmlns:p="http://schemas.openxmlformats.org/presentationml/2006/main">
+  <p:cSld>
+    <p:spTree>
+      <p:nvGrpSpPr>
+        <p:cNvPr id="1" name=""/>
+        <p:cNvGrpSpPr/>
+        <p:nvPr/>
+      </p:nvGrpSpPr>
+      <p:grpSpPr>
+        <a:xfrm>
+          <a:off x="0" y="0"/>
+          <a:ext cx="0" cy="0"/>
+          <a:chOff x="0" y="0"/>
+          <a:chExt cx="0" cy="0"/>
+        </a:xfrm>
+      </p:grpSpPr>
+      <p:sp>
+        <p:nvSpPr>
+          <p:cNvPr id="2" name="Slide Image Placeholder 1"/>
+          <p:cNvSpPr>
+            <a:spLocks noGrp="1" noRot="1" noChangeAspect="1"/>
+          </p:cNvSpPr>
+          <p:nvPr>
+            <p:ph type="sldImg"/>
+          </p:nvPr>
+        </p:nvSpPr>
+        <p:spPr/>
+      </p:sp>
+      <p:sp>
+        <p:nvSpPr>
+          <p:cNvPr id="3" name="Notes Placeholder 2"/>
+          <p:cNvSpPr>
+            <a:spLocks noGrp="1"/>
+          </p:cNvSpPr>
+          <p:nvPr>
+            <p:ph type="body" idx="1"/>
+          </p:nvPr>
+        </p:nvSpPr>
+        <p:spPr/>
+        <p:txBody>
+          <a:bodyPr/>
+          <a:lstStyle/>
+          <a:p>
+            <a:r>
+              <a:rPr lang="en-US" dirty="0"/>
+              <a:t/>
+            </a:r>
+            <a:endParaRPr lang="en-US" dirty="0"/>
+          </a:p>
+        </p:txBody>
+      </p:sp>
+      <p:sp>
+        <p:nvSpPr>
+          <p:cNvPr id="4" name="Slide Number Placeholder 3"/>
+          <p:cNvSpPr>
+            <a:spLocks noGrp="1"/>
+          </p:cNvSpPr>
+          <p:nvPr>
+            <p:ph type="sldNum" sz="quarter" idx="10"/>
+          </p:nvPr>
+        </p:nvSpPr>
+        <p:spPr/>
+        <p:txBody>
+          <a:bodyPr/>
+          <a:lstStyle/>
+          <a:p>
+            <a:fld id="{F7021451-1387-4CA6-816F-3879F97B5CBC}" type="slidenum">
+              <a:rPr lang="en-US"/>
+              <a:t>9</a:t>
             </a:fld>
             <a:endParaRPr lang="en-US"/>
           </a:p>
@@ -1724,6 +1902,531 @@
 </p:sld>
 </file>
 
+<file path=ppt/slides/slide10.xml><?xml version="1.0" encoding="utf-8"?>
+<p:sld xmlns:a="http://schemas.openxmlformats.org/drawingml/2006/main" xmlns:r="http://schemas.openxmlformats.org/officeDocument/2006/relationships" xmlns:p="http://schemas.openxmlformats.org/presentationml/2006/main">
+  <p:cSld name="Slide 10">
+    <p:bg>
+      <p:bgPr>
+        <a:solidFill>
+          <a:srgbClr val="1E2761"/>
+        </a:solidFill>
+      </p:bgPr>
+    </p:bg>
+    <p:spTree>
+      <p:nvGrpSpPr>
+        <p:cNvPr id="1" name=""/>
+        <p:cNvGrpSpPr/>
+        <p:nvPr/>
+      </p:nvGrpSpPr>
+      <p:grpSpPr>
+        <a:xfrm>
+          <a:off x="0" y="0"/>
+          <a:ext cx="0" cy="0"/>
+          <a:chOff x="0" y="0"/>
+          <a:chExt cx="0" cy="0"/>
+        </a:xfrm>
+      </p:grpSpPr>
+      <p:sp>
+        <p:nvSpPr>
+          <p:cNvPr id="2" name="Text 0"/>
+          <p:cNvSpPr/>
+          <p:nvPr/>
+        </p:nvSpPr>
+        <p:spPr>
+          <a:xfrm>
+            <a:off x="731520" y="685800"/>
+            <a:ext cx="5486400" cy="502920"/>
+          </a:xfrm>
+          <a:prstGeom prst="rect">
+            <a:avLst/>
+          </a:prstGeom>
+          <a:noFill/>
+          <a:ln/>
+        </p:spPr>
+        <p:txBody>
+          <a:bodyPr wrap="square" lIns="0" tIns="0" rIns="0" bIns="0" rtlCol="0" anchor="ctr"/>
+          <a:lstStyle/>
+          <a:p>
+            <a:pPr indent="0" marL="0">
+              <a:buNone/>
+            </a:pPr>
+            <a:r>
+              <a:rPr lang="en-US" sz="2200" b="1" dirty="0">
+                <a:solidFill>
+                  <a:srgbClr val="CADCFC"/>
+                </a:solidFill>
+                <a:latin typeface="Cambria" pitchFamily="34" charset="0"/>
+                <a:ea typeface="Cambria" pitchFamily="34" charset="-122"/>
+                <a:cs typeface="Cambria" pitchFamily="34" charset="-120"/>
+              </a:rPr>
+              <a:t>結論</a:t>
+            </a:r>
+            <a:endParaRPr lang="en-US" sz="2200" dirty="0"/>
+          </a:p>
+        </p:txBody>
+      </p:sp>
+      <p:sp>
+        <p:nvSpPr>
+          <p:cNvPr id="3" name="Text 1"/>
+          <p:cNvSpPr/>
+          <p:nvPr/>
+        </p:nvSpPr>
+        <p:spPr>
+          <a:xfrm>
+            <a:off x="731520" y="1143000"/>
+            <a:ext cx="10515600" cy="1371600"/>
+          </a:xfrm>
+          <a:prstGeom prst="rect">
+            <a:avLst/>
+          </a:prstGeom>
+          <a:noFill/>
+          <a:ln/>
+        </p:spPr>
+        <p:txBody>
+          <a:bodyPr wrap="square" lIns="0" tIns="0" rIns="0" bIns="0" rtlCol="0" anchor="ctr"/>
+          <a:lstStyle/>
+          <a:p>
+            <a:pPr indent="0" marL="0">
+              <a:lnSpc>
+                <a:spcPct val="115000"/>
+              </a:lnSpc>
+              <a:buNone/>
+            </a:pPr>
+            <a:r>
+              <a:rPr lang="en-US" sz="3000" b="1" dirty="0">
+                <a:solidFill>
+                  <a:srgbClr val="FFFFFF"/>
+                </a:solidFill>
+                <a:latin typeface="Cambria" pitchFamily="34" charset="0"/>
+                <a:ea typeface="Cambria" pitchFamily="34" charset="-122"/>
+                <a:cs typeface="Cambria" pitchFamily="34" charset="-120"/>
+              </a:rPr>
+              <a:t>「登録の広さ」と「利用の偏り」は別軸</a:t>
+            </a:r>
+            <a:endParaRPr lang="en-US" sz="3000" dirty="0"/>
+          </a:p>
+          <a:p>
+            <a:pPr indent="0" marL="0">
+              <a:lnSpc>
+                <a:spcPct val="115000"/>
+              </a:lnSpc>
+              <a:buNone/>
+            </a:pPr>
+            <a:r>
+              <a:rPr lang="en-US" sz="3000" b="1" dirty="0">
+                <a:solidFill>
+                  <a:srgbClr val="FFFFFF"/>
+                </a:solidFill>
+                <a:latin typeface="Cambria" pitchFamily="34" charset="0"/>
+                <a:ea typeface="Cambria" pitchFamily="34" charset="-122"/>
+                <a:cs typeface="Cambria" pitchFamily="34" charset="-120"/>
+              </a:rPr>
+              <a:t>業界共通の構造的課題</a:t>
+            </a:r>
+            <a:endParaRPr lang="en-US" sz="3000" dirty="0"/>
+          </a:p>
+        </p:txBody>
+      </p:sp>
+      <p:sp>
+        <p:nvSpPr>
+          <p:cNvPr id="4" name="Shape 2"/>
+          <p:cNvSpPr/>
+          <p:nvPr/>
+        </p:nvSpPr>
+        <p:spPr>
+          <a:xfrm>
+            <a:off x="731520" y="2935224"/>
+            <a:ext cx="292608" cy="292608"/>
+          </a:xfrm>
+          <a:prstGeom prst="ellipse">
+            <a:avLst/>
+          </a:prstGeom>
+          <a:solidFill>
+            <a:srgbClr val="334A8C"/>
+          </a:solidFill>
+          <a:ln/>
+        </p:spPr>
+      </p:sp>
+      <p:sp>
+        <p:nvSpPr>
+          <p:cNvPr id="5" name="Text 3"/>
+          <p:cNvSpPr/>
+          <p:nvPr/>
+        </p:nvSpPr>
+        <p:spPr>
+          <a:xfrm>
+            <a:off x="731520" y="2935224"/>
+            <a:ext cx="292608" cy="292608"/>
+          </a:xfrm>
+          <a:prstGeom prst="rect">
+            <a:avLst/>
+          </a:prstGeom>
+          <a:noFill/>
+          <a:ln/>
+        </p:spPr>
+        <p:txBody>
+          <a:bodyPr wrap="square" lIns="0" tIns="0" rIns="0" bIns="0" rtlCol="0" anchor="ctr"/>
+          <a:lstStyle/>
+          <a:p>
+            <a:pPr algn="ctr" indent="0" marL="0">
+              <a:buNone/>
+            </a:pPr>
+            <a:r>
+              <a:rPr lang="en-US" sz="1300" b="1" dirty="0">
+                <a:solidFill>
+                  <a:srgbClr val="FFFFFF"/>
+                </a:solidFill>
+                <a:latin typeface="Calibri" pitchFamily="34" charset="0"/>
+                <a:ea typeface="Calibri" pitchFamily="34" charset="-122"/>
+                <a:cs typeface="Calibri" pitchFamily="34" charset="-120"/>
+              </a:rPr>
+              <a:t>1</a:t>
+            </a:r>
+            <a:endParaRPr lang="en-US" sz="1300" dirty="0"/>
+          </a:p>
+        </p:txBody>
+      </p:sp>
+      <p:sp>
+        <p:nvSpPr>
+          <p:cNvPr id="6" name="Text 4"/>
+          <p:cNvSpPr/>
+          <p:nvPr/>
+        </p:nvSpPr>
+        <p:spPr>
+          <a:xfrm>
+            <a:off x="1234440" y="2880360"/>
+            <a:ext cx="10058400" cy="685800"/>
+          </a:xfrm>
+          <a:prstGeom prst="rect">
+            <a:avLst/>
+          </a:prstGeom>
+          <a:noFill/>
+          <a:ln/>
+        </p:spPr>
+        <p:txBody>
+          <a:bodyPr wrap="square" lIns="0" tIns="0" rIns="0" bIns="0" rtlCol="0" anchor="t"/>
+          <a:lstStyle/>
+          <a:p>
+            <a:pPr indent="0" marL="0">
+              <a:buNone/>
+            </a:pPr>
+            <a:r>
+              <a:rPr lang="en-US" sz="1450" dirty="0">
+                <a:solidFill>
+                  <a:srgbClr val="CADCFC"/>
+                </a:solidFill>
+                <a:latin typeface="Calibri" pitchFamily="34" charset="0"/>
+                <a:ea typeface="Calibri" pitchFamily="34" charset="-122"/>
+                <a:cs typeface="Calibri" pitchFamily="34" charset="-120"/>
+              </a:rPr>
+              <a:t>各ポイントサービスは、母体企業(通信キャリア/EC/旧CCC提携先)の顧客基盤に応じた属性の偏りを構造的に抱える</a:t>
+            </a:r>
+            <a:endParaRPr lang="en-US" sz="1450" dirty="0"/>
+          </a:p>
+        </p:txBody>
+      </p:sp>
+      <p:sp>
+        <p:nvSpPr>
+          <p:cNvPr id="7" name="Shape 5"/>
+          <p:cNvSpPr/>
+          <p:nvPr/>
+        </p:nvSpPr>
+        <p:spPr>
+          <a:xfrm>
+            <a:off x="731520" y="3776472"/>
+            <a:ext cx="292608" cy="292608"/>
+          </a:xfrm>
+          <a:prstGeom prst="ellipse">
+            <a:avLst/>
+          </a:prstGeom>
+          <a:solidFill>
+            <a:srgbClr val="334A8C"/>
+          </a:solidFill>
+          <a:ln/>
+        </p:spPr>
+      </p:sp>
+      <p:sp>
+        <p:nvSpPr>
+          <p:cNvPr id="8" name="Text 6"/>
+          <p:cNvSpPr/>
+          <p:nvPr/>
+        </p:nvSpPr>
+        <p:spPr>
+          <a:xfrm>
+            <a:off x="731520" y="3776472"/>
+            <a:ext cx="292608" cy="292608"/>
+          </a:xfrm>
+          <a:prstGeom prst="rect">
+            <a:avLst/>
+          </a:prstGeom>
+          <a:noFill/>
+          <a:ln/>
+        </p:spPr>
+        <p:txBody>
+          <a:bodyPr wrap="square" lIns="0" tIns="0" rIns="0" bIns="0" rtlCol="0" anchor="ctr"/>
+          <a:lstStyle/>
+          <a:p>
+            <a:pPr algn="ctr" indent="0" marL="0">
+              <a:buNone/>
+            </a:pPr>
+            <a:r>
+              <a:rPr lang="en-US" sz="1300" b="1" dirty="0">
+                <a:solidFill>
+                  <a:srgbClr val="FFFFFF"/>
+                </a:solidFill>
+                <a:latin typeface="Calibri" pitchFamily="34" charset="0"/>
+                <a:ea typeface="Calibri" pitchFamily="34" charset="-122"/>
+                <a:cs typeface="Calibri" pitchFamily="34" charset="-120"/>
+              </a:rPr>
+              <a:t>2</a:t>
+            </a:r>
+            <a:endParaRPr lang="en-US" sz="1300" dirty="0"/>
+          </a:p>
+        </p:txBody>
+      </p:sp>
+      <p:sp>
+        <p:nvSpPr>
+          <p:cNvPr id="9" name="Text 7"/>
+          <p:cNvSpPr/>
+          <p:nvPr/>
+        </p:nvSpPr>
+        <p:spPr>
+          <a:xfrm>
+            <a:off x="1234440" y="3721608"/>
+            <a:ext cx="10058400" cy="685800"/>
+          </a:xfrm>
+          <a:prstGeom prst="rect">
+            <a:avLst/>
+          </a:prstGeom>
+          <a:noFill/>
+          <a:ln/>
+        </p:spPr>
+        <p:txBody>
+          <a:bodyPr wrap="square" lIns="0" tIns="0" rIns="0" bIns="0" rtlCol="0" anchor="t"/>
+          <a:lstStyle/>
+          <a:p>
+            <a:pPr indent="0" marL="0">
+              <a:buNone/>
+            </a:pPr>
+            <a:r>
+              <a:rPr lang="en-US" sz="1450" dirty="0">
+                <a:solidFill>
+                  <a:srgbClr val="CADCFC"/>
+                </a:solidFill>
+                <a:latin typeface="Calibri" pitchFamily="34" charset="0"/>
+                <a:ea typeface="Calibri" pitchFamily="34" charset="-122"/>
+                <a:cs typeface="Calibri" pitchFamily="34" charset="-120"/>
+              </a:rPr>
+              <a:t>特にPontaポイントはdポイントと同型の「登録は幅広いが、メイン利用は特定層に集中」という構造が確認できた</a:t>
+            </a:r>
+            <a:endParaRPr lang="en-US" sz="1450" dirty="0"/>
+          </a:p>
+        </p:txBody>
+      </p:sp>
+      <p:sp>
+        <p:nvSpPr>
+          <p:cNvPr id="10" name="Shape 8"/>
+          <p:cNvSpPr/>
+          <p:nvPr/>
+        </p:nvSpPr>
+        <p:spPr>
+          <a:xfrm>
+            <a:off x="731520" y="4617720"/>
+            <a:ext cx="292608" cy="292608"/>
+          </a:xfrm>
+          <a:prstGeom prst="ellipse">
+            <a:avLst/>
+          </a:prstGeom>
+          <a:solidFill>
+            <a:srgbClr val="334A8C"/>
+          </a:solidFill>
+          <a:ln/>
+        </p:spPr>
+      </p:sp>
+      <p:sp>
+        <p:nvSpPr>
+          <p:cNvPr id="11" name="Text 9"/>
+          <p:cNvSpPr/>
+          <p:nvPr/>
+        </p:nvSpPr>
+        <p:spPr>
+          <a:xfrm>
+            <a:off x="731520" y="4617720"/>
+            <a:ext cx="292608" cy="292608"/>
+          </a:xfrm>
+          <a:prstGeom prst="rect">
+            <a:avLst/>
+          </a:prstGeom>
+          <a:noFill/>
+          <a:ln/>
+        </p:spPr>
+        <p:txBody>
+          <a:bodyPr wrap="square" lIns="0" tIns="0" rIns="0" bIns="0" rtlCol="0" anchor="ctr"/>
+          <a:lstStyle/>
+          <a:p>
+            <a:pPr algn="ctr" indent="0" marL="0">
+              <a:buNone/>
+            </a:pPr>
+            <a:r>
+              <a:rPr lang="en-US" sz="1300" b="1" dirty="0">
+                <a:solidFill>
+                  <a:srgbClr val="FFFFFF"/>
+                </a:solidFill>
+                <a:latin typeface="Calibri" pitchFamily="34" charset="0"/>
+                <a:ea typeface="Calibri" pitchFamily="34" charset="-122"/>
+                <a:cs typeface="Calibri" pitchFamily="34" charset="-120"/>
+              </a:rPr>
+              <a:t>3</a:t>
+            </a:r>
+            <a:endParaRPr lang="en-US" sz="1300" dirty="0"/>
+          </a:p>
+        </p:txBody>
+      </p:sp>
+      <p:sp>
+        <p:nvSpPr>
+          <p:cNvPr id="12" name="Text 10"/>
+          <p:cNvSpPr/>
+          <p:nvPr/>
+        </p:nvSpPr>
+        <p:spPr>
+          <a:xfrm>
+            <a:off x="1234440" y="4562856"/>
+            <a:ext cx="10058400" cy="685800"/>
+          </a:xfrm>
+          <a:prstGeom prst="rect">
+            <a:avLst/>
+          </a:prstGeom>
+          <a:noFill/>
+          <a:ln/>
+        </p:spPr>
+        <p:txBody>
+          <a:bodyPr wrap="square" lIns="0" tIns="0" rIns="0" bIns="0" rtlCol="0" anchor="t"/>
+          <a:lstStyle/>
+          <a:p>
+            <a:pPr indent="0" marL="0">
+              <a:buNone/>
+            </a:pPr>
+            <a:r>
+              <a:rPr lang="en-US" sz="1450" dirty="0">
+                <a:solidFill>
+                  <a:srgbClr val="CADCFC"/>
+                </a:solidFill>
+                <a:latin typeface="Calibri" pitchFamily="34" charset="0"/>
+                <a:ea typeface="Calibri" pitchFamily="34" charset="-122"/>
+                <a:cs typeface="Calibri" pitchFamily="34" charset="-120"/>
+              </a:rPr>
+              <a:t>→ dポイント固有の弱点ではなく、業界全体がキャリア基盤に紐づく偏りを抱えている</a:t>
+            </a:r>
+            <a:endParaRPr lang="en-US" sz="1450" dirty="0"/>
+          </a:p>
+        </p:txBody>
+      </p:sp>
+      <p:sp>
+        <p:nvSpPr>
+          <p:cNvPr id="13" name="Shape 11"/>
+          <p:cNvSpPr/>
+          <p:nvPr/>
+        </p:nvSpPr>
+        <p:spPr>
+          <a:xfrm>
+            <a:off x="731520" y="5458968"/>
+            <a:ext cx="292608" cy="292608"/>
+          </a:xfrm>
+          <a:prstGeom prst="ellipse">
+            <a:avLst/>
+          </a:prstGeom>
+          <a:solidFill>
+            <a:srgbClr val="3AA0FF"/>
+          </a:solidFill>
+          <a:ln/>
+        </p:spPr>
+      </p:sp>
+      <p:sp>
+        <p:nvSpPr>
+          <p:cNvPr id="14" name="Text 12"/>
+          <p:cNvSpPr/>
+          <p:nvPr/>
+        </p:nvSpPr>
+        <p:spPr>
+          <a:xfrm>
+            <a:off x="731520" y="5458968"/>
+            <a:ext cx="292608" cy="292608"/>
+          </a:xfrm>
+          <a:prstGeom prst="rect">
+            <a:avLst/>
+          </a:prstGeom>
+          <a:noFill/>
+          <a:ln/>
+        </p:spPr>
+        <p:txBody>
+          <a:bodyPr wrap="square" lIns="0" tIns="0" rIns="0" bIns="0" rtlCol="0" anchor="ctr"/>
+          <a:lstStyle/>
+          <a:p>
+            <a:pPr algn="ctr" indent="0" marL="0">
+              <a:buNone/>
+            </a:pPr>
+            <a:r>
+              <a:rPr lang="en-US" sz="1300" b="1" dirty="0">
+                <a:solidFill>
+                  <a:srgbClr val="FFFFFF"/>
+                </a:solidFill>
+                <a:latin typeface="Calibri" pitchFamily="34" charset="0"/>
+                <a:ea typeface="Calibri" pitchFamily="34" charset="-122"/>
+                <a:cs typeface="Calibri" pitchFamily="34" charset="-120"/>
+              </a:rPr>
+              <a:t>4</a:t>
+            </a:r>
+            <a:endParaRPr lang="en-US" sz="1300" dirty="0"/>
+          </a:p>
+        </p:txBody>
+      </p:sp>
+      <p:sp>
+        <p:nvSpPr>
+          <p:cNvPr id="15" name="Text 13"/>
+          <p:cNvSpPr/>
+          <p:nvPr/>
+        </p:nvSpPr>
+        <p:spPr>
+          <a:xfrm>
+            <a:off x="1234440" y="5404104"/>
+            <a:ext cx="10058400" cy="685800"/>
+          </a:xfrm>
+          <a:prstGeom prst="rect">
+            <a:avLst/>
+          </a:prstGeom>
+          <a:noFill/>
+          <a:ln/>
+        </p:spPr>
+        <p:txBody>
+          <a:bodyPr wrap="square" lIns="0" tIns="0" rIns="0" bIns="0" rtlCol="0" anchor="t"/>
+          <a:lstStyle/>
+          <a:p>
+            <a:pPr indent="0" marL="0">
+              <a:buNone/>
+            </a:pPr>
+            <a:r>
+              <a:rPr lang="en-US" sz="1450" b="1" dirty="0">
+                <a:solidFill>
+                  <a:srgbClr val="FFFFFF"/>
+                </a:solidFill>
+                <a:latin typeface="Calibri" pitchFamily="34" charset="0"/>
+                <a:ea typeface="Calibri" pitchFamily="34" charset="-122"/>
+                <a:cs typeface="Calibri" pitchFamily="34" charset="-120"/>
+              </a:rPr>
+              <a:t>この偏りを最初に解消する企業が、生成AI時代の行動データ資産で優位に立てる</a:t>
+            </a:r>
+            <a:endParaRPr lang="en-US" sz="1450" dirty="0"/>
+          </a:p>
+        </p:txBody>
+      </p:sp>
+    </p:spTree>
+  </p:cSld>
+  <p:clrMapOvr>
+    <a:masterClrMapping/>
+  </p:clrMapOvr>
+</p:sld>
+</file>
+
 <file path=ppt/slides/slide2.xml><?xml version="1.0" encoding="utf-8"?>
 <p:sld xmlns:a="http://schemas.openxmlformats.org/drawingml/2006/main" xmlns:r="http://schemas.openxmlformats.org/officeDocument/2006/relationships" xmlns:p="http://schemas.openxmlformats.org/presentationml/2006/main">
   <p:cSld name="Slide 2">
@@ -8115,6 +8818,1716 @@
     <p:bg>
       <p:bgPr>
         <a:solidFill>
+          <a:srgbClr val="F4F6FB"/>
+        </a:solidFill>
+      </p:bgPr>
+    </p:bg>
+    <p:spTree>
+      <p:nvGrpSpPr>
+        <p:cNvPr id="1" name=""/>
+        <p:cNvGrpSpPr/>
+        <p:nvPr/>
+      </p:nvGrpSpPr>
+      <p:grpSpPr>
+        <a:xfrm>
+          <a:off x="0" y="0"/>
+          <a:ext cx="0" cy="0"/>
+          <a:chOff x="0" y="0"/>
+          <a:chExt cx="0" cy="0"/>
+        </a:xfrm>
+      </p:grpSpPr>
+      <p:sp>
+        <p:nvSpPr>
+          <p:cNvPr id="2" name="Text 0"/>
+          <p:cNvSpPr/>
+          <p:nvPr/>
+        </p:nvSpPr>
+        <p:spPr>
+          <a:xfrm>
+            <a:off x="457200" y="365760"/>
+            <a:ext cx="11247120" cy="502920"/>
+          </a:xfrm>
+          <a:prstGeom prst="rect">
+            <a:avLst/>
+          </a:prstGeom>
+          <a:noFill/>
+          <a:ln/>
+        </p:spPr>
+        <p:txBody>
+          <a:bodyPr wrap="square" lIns="0" tIns="0" rIns="0" bIns="0" rtlCol="0" anchor="ctr"/>
+          <a:lstStyle/>
+          <a:p>
+            <a:pPr indent="0" marL="0">
+              <a:buNone/>
+            </a:pPr>
+            <a:r>
+              <a:rPr lang="en-US" sz="2500" b="1" dirty="0">
+                <a:solidFill>
+                  <a:srgbClr val="1E2761"/>
+                </a:solidFill>
+                <a:latin typeface="Cambria" pitchFamily="34" charset="0"/>
+                <a:ea typeface="Cambria" pitchFamily="34" charset="-122"/>
+                <a:cs typeface="Cambria" pitchFamily="34" charset="-120"/>
+              </a:rPr>
+              <a:t>独自ポイントのシステム維持課題</a:t>
+            </a:r>
+            <a:endParaRPr lang="en-US" sz="2500" dirty="0"/>
+          </a:p>
+        </p:txBody>
+      </p:sp>
+      <p:sp>
+        <p:nvSpPr>
+          <p:cNvPr id="3" name="Text 1"/>
+          <p:cNvSpPr/>
+          <p:nvPr/>
+        </p:nvSpPr>
+        <p:spPr>
+          <a:xfrm>
+            <a:off x="457200" y="841248"/>
+            <a:ext cx="11247120" cy="320040"/>
+          </a:xfrm>
+          <a:prstGeom prst="rect">
+            <a:avLst/>
+          </a:prstGeom>
+          <a:noFill/>
+          <a:ln/>
+        </p:spPr>
+        <p:txBody>
+          <a:bodyPr wrap="square" lIns="0" tIns="0" rIns="0" bIns="0" rtlCol="0" anchor="ctr"/>
+          <a:lstStyle/>
+          <a:p>
+            <a:pPr indent="0" marL="0">
+              <a:buNone/>
+            </a:pPr>
+            <a:r>
+              <a:rPr lang="en-US" sz="1250" i="1" dirty="0">
+                <a:solidFill>
+                  <a:srgbClr val="5A6B8C"/>
+                </a:solidFill>
+                <a:latin typeface="Calibri" pitchFamily="34" charset="0"/>
+                <a:ea typeface="Calibri" pitchFamily="34" charset="-122"/>
+                <a:cs typeface="Calibri" pitchFamily="34" charset="-120"/>
+              </a:rPr>
+              <a:t>「独自ポイント＝低コスト」は誤解 ―仲介手数料の代わりに別の固定費を負う</a:t>
+            </a:r>
+            <a:endParaRPr lang="en-US" sz="1250" dirty="0"/>
+          </a:p>
+        </p:txBody>
+      </p:sp>
+      <p:sp>
+        <p:nvSpPr>
+          <p:cNvPr id="4" name="Shape 2"/>
+          <p:cNvSpPr/>
+          <p:nvPr/>
+        </p:nvSpPr>
+        <p:spPr>
+          <a:xfrm>
+            <a:off x="457200" y="1371600"/>
+            <a:ext cx="2606040" cy="1783080"/>
+          </a:xfrm>
+          <a:prstGeom prst="roundRect">
+            <a:avLst>
+              <a:gd name="adj" fmla="val 3077"/>
+            </a:avLst>
+          </a:prstGeom>
+          <a:solidFill>
+            <a:srgbClr val="FFFFFF"/>
+          </a:solidFill>
+          <a:ln w="9525">
+            <a:solidFill>
+              <a:srgbClr val="D7DEEE"/>
+            </a:solidFill>
+            <a:prstDash val="solid"/>
+          </a:ln>
+        </p:spPr>
+      </p:sp>
+      <p:sp>
+        <p:nvSpPr>
+          <p:cNvPr id="5" name="Text 3"/>
+          <p:cNvSpPr/>
+          <p:nvPr/>
+        </p:nvSpPr>
+        <p:spPr>
+          <a:xfrm>
+            <a:off x="566928" y="1508760"/>
+            <a:ext cx="2386584" cy="685800"/>
+          </a:xfrm>
+          <a:prstGeom prst="rect">
+            <a:avLst/>
+          </a:prstGeom>
+          <a:noFill/>
+          <a:ln/>
+        </p:spPr>
+        <p:txBody>
+          <a:bodyPr wrap="square" lIns="0" tIns="0" rIns="0" bIns="0" rtlCol="0" anchor="t"/>
+          <a:lstStyle/>
+          <a:p>
+            <a:pPr algn="l" indent="0" marL="0">
+              <a:buNone/>
+            </a:pPr>
+            <a:r>
+              <a:rPr lang="en-US" sz="2200" b="1" dirty="0">
+                <a:solidFill>
+                  <a:srgbClr val="1E2761"/>
+                </a:solidFill>
+                <a:latin typeface="Cambria" pitchFamily="34" charset="0"/>
+                <a:ea typeface="Cambria" pitchFamily="34" charset="-122"/>
+                <a:cs typeface="Cambria" pitchFamily="34" charset="-120"/>
+              </a:rPr>
+              <a:t>1,000万〜</a:t>
+            </a:r>
+            <a:endParaRPr lang="en-US" sz="2200" dirty="0"/>
+          </a:p>
+          <a:p>
+            <a:pPr algn="l" indent="0" marL="0">
+              <a:buNone/>
+            </a:pPr>
+            <a:r>
+              <a:rPr lang="en-US" sz="2200" b="1" dirty="0">
+                <a:solidFill>
+                  <a:srgbClr val="1E2761"/>
+                </a:solidFill>
+                <a:latin typeface="Cambria" pitchFamily="34" charset="0"/>
+                <a:ea typeface="Cambria" pitchFamily="34" charset="-122"/>
+                <a:cs typeface="Cambria" pitchFamily="34" charset="-120"/>
+              </a:rPr>
+              <a:t>3,000万円</a:t>
+            </a:r>
+            <a:endParaRPr lang="en-US" sz="2200" dirty="0"/>
+          </a:p>
+        </p:txBody>
+      </p:sp>
+      <p:sp>
+        <p:nvSpPr>
+          <p:cNvPr id="6" name="Text 4"/>
+          <p:cNvSpPr/>
+          <p:nvPr/>
+        </p:nvSpPr>
+        <p:spPr>
+          <a:xfrm>
+            <a:off x="566928" y="2240280"/>
+            <a:ext cx="2386584" cy="594360"/>
+          </a:xfrm>
+          <a:prstGeom prst="rect">
+            <a:avLst/>
+          </a:prstGeom>
+          <a:noFill/>
+          <a:ln/>
+        </p:spPr>
+        <p:txBody>
+          <a:bodyPr wrap="square" lIns="0" tIns="0" rIns="0" bIns="0" rtlCol="0" anchor="t"/>
+          <a:lstStyle/>
+          <a:p>
+            <a:pPr algn="l" indent="0" marL="0">
+              <a:buNone/>
+            </a:pPr>
+            <a:r>
+              <a:rPr lang="en-US" sz="1100" dirty="0">
+                <a:solidFill>
+                  <a:srgbClr val="1B1B2F"/>
+                </a:solidFill>
+                <a:latin typeface="Calibri" pitchFamily="34" charset="0"/>
+                <a:ea typeface="Calibri" pitchFamily="34" charset="-122"/>
+                <a:cs typeface="Calibri" pitchFamily="34" charset="-120"/>
+              </a:rPr>
+              <a:t>自社開発コスト</a:t>
+            </a:r>
+            <a:endParaRPr lang="en-US" sz="1100" dirty="0"/>
+          </a:p>
+          <a:p>
+            <a:pPr algn="l" indent="0" marL="0">
+              <a:buNone/>
+            </a:pPr>
+            <a:r>
+              <a:rPr lang="en-US" sz="1100" dirty="0">
+                <a:solidFill>
+                  <a:srgbClr val="1B1B2F"/>
+                </a:solidFill>
+                <a:latin typeface="Calibri" pitchFamily="34" charset="0"/>
+                <a:ea typeface="Calibri" pitchFamily="34" charset="-122"/>
+                <a:cs typeface="Calibri" pitchFamily="34" charset="-120"/>
+              </a:rPr>
+              <a:t>(規模により数億円のケースも)</a:t>
+            </a:r>
+            <a:endParaRPr lang="en-US" sz="1100" dirty="0"/>
+          </a:p>
+        </p:txBody>
+      </p:sp>
+      <p:sp>
+        <p:nvSpPr>
+          <p:cNvPr id="7" name="Text 5"/>
+          <p:cNvSpPr/>
+          <p:nvPr/>
+        </p:nvSpPr>
+        <p:spPr>
+          <a:xfrm>
+            <a:off x="566928" y="2862072"/>
+            <a:ext cx="2386584" cy="228600"/>
+          </a:xfrm>
+          <a:prstGeom prst="rect">
+            <a:avLst/>
+          </a:prstGeom>
+          <a:noFill/>
+          <a:ln/>
+        </p:spPr>
+        <p:txBody>
+          <a:bodyPr wrap="square" lIns="0" tIns="0" rIns="0" bIns="0" rtlCol="0" anchor="ctr"/>
+          <a:lstStyle/>
+          <a:p>
+            <a:pPr algn="l" indent="0" marL="0">
+              <a:buNone/>
+            </a:pPr>
+            <a:r>
+              <a:rPr lang="en-US" sz="900" dirty="0">
+                <a:solidFill>
+                  <a:srgbClr val="5A6B8C"/>
+                </a:solidFill>
+                <a:latin typeface="Calibri" pitchFamily="34" charset="0"/>
+                <a:ea typeface="Calibri" pitchFamily="34" charset="-122"/>
+                <a:cs typeface="Calibri" pitchFamily="34" charset="-120"/>
+              </a:rPr>
+              <a:t>[25]</a:t>
+            </a:r>
+            <a:endParaRPr lang="en-US" sz="900" dirty="0"/>
+          </a:p>
+        </p:txBody>
+      </p:sp>
+      <p:sp>
+        <p:nvSpPr>
+          <p:cNvPr id="8" name="Shape 6"/>
+          <p:cNvSpPr/>
+          <p:nvPr/>
+        </p:nvSpPr>
+        <p:spPr>
+          <a:xfrm>
+            <a:off x="3337560" y="1371600"/>
+            <a:ext cx="2606040" cy="1783080"/>
+          </a:xfrm>
+          <a:prstGeom prst="roundRect">
+            <a:avLst>
+              <a:gd name="adj" fmla="val 3077"/>
+            </a:avLst>
+          </a:prstGeom>
+          <a:solidFill>
+            <a:srgbClr val="FFFFFF"/>
+          </a:solidFill>
+          <a:ln w="9525">
+            <a:solidFill>
+              <a:srgbClr val="D7DEEE"/>
+            </a:solidFill>
+            <a:prstDash val="solid"/>
+          </a:ln>
+        </p:spPr>
+      </p:sp>
+      <p:sp>
+        <p:nvSpPr>
+          <p:cNvPr id="9" name="Text 7"/>
+          <p:cNvSpPr/>
+          <p:nvPr/>
+        </p:nvSpPr>
+        <p:spPr>
+          <a:xfrm>
+            <a:off x="3447288" y="1508760"/>
+            <a:ext cx="2386584" cy="685800"/>
+          </a:xfrm>
+          <a:prstGeom prst="rect">
+            <a:avLst/>
+          </a:prstGeom>
+          <a:noFill/>
+          <a:ln/>
+        </p:spPr>
+        <p:txBody>
+          <a:bodyPr wrap="square" lIns="0" tIns="0" rIns="0" bIns="0" rtlCol="0" anchor="t"/>
+          <a:lstStyle/>
+          <a:p>
+            <a:pPr algn="l" indent="0" marL="0">
+              <a:buNone/>
+            </a:pPr>
+            <a:r>
+              <a:rPr lang="en-US" sz="2200" b="1" dirty="0">
+                <a:solidFill>
+                  <a:srgbClr val="1E2761"/>
+                </a:solidFill>
+                <a:latin typeface="Cambria" pitchFamily="34" charset="0"/>
+                <a:ea typeface="Cambria" pitchFamily="34" charset="-122"/>
+                <a:cs typeface="Cambria" pitchFamily="34" charset="-120"/>
+              </a:rPr>
+              <a:t>継続発生</a:t>
+            </a:r>
+            <a:endParaRPr lang="en-US" sz="2200" dirty="0"/>
+          </a:p>
+        </p:txBody>
+      </p:sp>
+      <p:sp>
+        <p:nvSpPr>
+          <p:cNvPr id="10" name="Text 8"/>
+          <p:cNvSpPr/>
+          <p:nvPr/>
+        </p:nvSpPr>
+        <p:spPr>
+          <a:xfrm>
+            <a:off x="3447288" y="2240280"/>
+            <a:ext cx="2386584" cy="594360"/>
+          </a:xfrm>
+          <a:prstGeom prst="rect">
+            <a:avLst/>
+          </a:prstGeom>
+          <a:noFill/>
+          <a:ln/>
+        </p:spPr>
+        <p:txBody>
+          <a:bodyPr wrap="square" lIns="0" tIns="0" rIns="0" bIns="0" rtlCol="0" anchor="t"/>
+          <a:lstStyle/>
+          <a:p>
+            <a:pPr algn="l" indent="0" marL="0">
+              <a:buNone/>
+            </a:pPr>
+            <a:r>
+              <a:rPr lang="en-US" sz="1100" dirty="0">
+                <a:solidFill>
+                  <a:srgbClr val="1B1B2F"/>
+                </a:solidFill>
+                <a:latin typeface="Calibri" pitchFamily="34" charset="0"/>
+                <a:ea typeface="Calibri" pitchFamily="34" charset="-122"/>
+                <a:cs typeface="Calibri" pitchFamily="34" charset="-120"/>
+              </a:rPr>
+              <a:t>サーバー・保守・専門人材の</a:t>
+            </a:r>
+            <a:endParaRPr lang="en-US" sz="1100" dirty="0"/>
+          </a:p>
+          <a:p>
+            <a:pPr algn="l" indent="0" marL="0">
+              <a:buNone/>
+            </a:pPr>
+            <a:r>
+              <a:rPr lang="en-US" sz="1100" dirty="0">
+                <a:solidFill>
+                  <a:srgbClr val="1B1B2F"/>
+                </a:solidFill>
+                <a:latin typeface="Calibri" pitchFamily="34" charset="0"/>
+                <a:ea typeface="Calibri" pitchFamily="34" charset="-122"/>
+                <a:cs typeface="Calibri" pitchFamily="34" charset="-120"/>
+              </a:rPr>
+              <a:t>人件費(改修対応も含む)</a:t>
+            </a:r>
+            <a:endParaRPr lang="en-US" sz="1100" dirty="0"/>
+          </a:p>
+        </p:txBody>
+      </p:sp>
+      <p:sp>
+        <p:nvSpPr>
+          <p:cNvPr id="11" name="Text 9"/>
+          <p:cNvSpPr/>
+          <p:nvPr/>
+        </p:nvSpPr>
+        <p:spPr>
+          <a:xfrm>
+            <a:off x="3447288" y="2862072"/>
+            <a:ext cx="2386584" cy="228600"/>
+          </a:xfrm>
+          <a:prstGeom prst="rect">
+            <a:avLst/>
+          </a:prstGeom>
+          <a:noFill/>
+          <a:ln/>
+        </p:spPr>
+        <p:txBody>
+          <a:bodyPr wrap="square" lIns="0" tIns="0" rIns="0" bIns="0" rtlCol="0" anchor="ctr"/>
+          <a:lstStyle/>
+          <a:p>
+            <a:pPr algn="l" indent="0" marL="0">
+              <a:buNone/>
+            </a:pPr>
+            <a:r>
+              <a:rPr lang="en-US" sz="900" dirty="0">
+                <a:solidFill>
+                  <a:srgbClr val="5A6B8C"/>
+                </a:solidFill>
+                <a:latin typeface="Calibri" pitchFamily="34" charset="0"/>
+                <a:ea typeface="Calibri" pitchFamily="34" charset="-122"/>
+                <a:cs typeface="Calibri" pitchFamily="34" charset="-120"/>
+              </a:rPr>
+              <a:t>[25]</a:t>
+            </a:r>
+            <a:endParaRPr lang="en-US" sz="900" dirty="0"/>
+          </a:p>
+        </p:txBody>
+      </p:sp>
+      <p:sp>
+        <p:nvSpPr>
+          <p:cNvPr id="12" name="Shape 10"/>
+          <p:cNvSpPr/>
+          <p:nvPr/>
+        </p:nvSpPr>
+        <p:spPr>
+          <a:xfrm>
+            <a:off x="6217920" y="1371600"/>
+            <a:ext cx="2606040" cy="1783080"/>
+          </a:xfrm>
+          <a:prstGeom prst="roundRect">
+            <a:avLst>
+              <a:gd name="adj" fmla="val 3077"/>
+            </a:avLst>
+          </a:prstGeom>
+          <a:solidFill>
+            <a:srgbClr val="FFFFFF"/>
+          </a:solidFill>
+          <a:ln w="9525">
+            <a:solidFill>
+              <a:srgbClr val="D7DEEE"/>
+            </a:solidFill>
+            <a:prstDash val="solid"/>
+          </a:ln>
+        </p:spPr>
+      </p:sp>
+      <p:sp>
+        <p:nvSpPr>
+          <p:cNvPr id="13" name="Text 11"/>
+          <p:cNvSpPr/>
+          <p:nvPr/>
+        </p:nvSpPr>
+        <p:spPr>
+          <a:xfrm>
+            <a:off x="6327648" y="1508760"/>
+            <a:ext cx="2386584" cy="685800"/>
+          </a:xfrm>
+          <a:prstGeom prst="rect">
+            <a:avLst/>
+          </a:prstGeom>
+          <a:noFill/>
+          <a:ln/>
+        </p:spPr>
+        <p:txBody>
+          <a:bodyPr wrap="square" lIns="0" tIns="0" rIns="0" bIns="0" rtlCol="0" anchor="t"/>
+          <a:lstStyle/>
+          <a:p>
+            <a:pPr algn="l" indent="0" marL="0">
+              <a:buNone/>
+            </a:pPr>
+            <a:r>
+              <a:rPr lang="en-US" sz="2200" b="1" dirty="0">
+                <a:solidFill>
+                  <a:srgbClr val="1E2761"/>
+                </a:solidFill>
+                <a:latin typeface="Cambria" pitchFamily="34" charset="0"/>
+                <a:ea typeface="Cambria" pitchFamily="34" charset="-122"/>
+                <a:cs typeface="Cambria" pitchFamily="34" charset="-120"/>
+              </a:rPr>
+              <a:t>急増中</a:t>
+            </a:r>
+            <a:endParaRPr lang="en-US" sz="2200" dirty="0"/>
+          </a:p>
+        </p:txBody>
+      </p:sp>
+      <p:sp>
+        <p:nvSpPr>
+          <p:cNvPr id="14" name="Text 12"/>
+          <p:cNvSpPr/>
+          <p:nvPr/>
+        </p:nvSpPr>
+        <p:spPr>
+          <a:xfrm>
+            <a:off x="6327648" y="2240280"/>
+            <a:ext cx="2386584" cy="594360"/>
+          </a:xfrm>
+          <a:prstGeom prst="rect">
+            <a:avLst/>
+          </a:prstGeom>
+          <a:noFill/>
+          <a:ln/>
+        </p:spPr>
+        <p:txBody>
+          <a:bodyPr wrap="square" lIns="0" tIns="0" rIns="0" bIns="0" rtlCol="0" anchor="t"/>
+          <a:lstStyle/>
+          <a:p>
+            <a:pPr algn="l" indent="0" marL="0">
+              <a:buNone/>
+            </a:pPr>
+            <a:r>
+              <a:rPr lang="en-US" sz="1100" dirty="0">
+                <a:solidFill>
+                  <a:srgbClr val="1B1B2F"/>
+                </a:solidFill>
+                <a:latin typeface="Calibri" pitchFamily="34" charset="0"/>
+                <a:ea typeface="Calibri" pitchFamily="34" charset="-122"/>
+                <a:cs typeface="Calibri" pitchFamily="34" charset="-120"/>
+              </a:rPr>
+              <a:t>ポイント不正利用。</a:t>
+            </a:r>
+            <a:endParaRPr lang="en-US" sz="1100" dirty="0"/>
+          </a:p>
+          <a:p>
+            <a:pPr algn="l" indent="0" marL="0">
+              <a:buNone/>
+            </a:pPr>
+            <a:r>
+              <a:rPr lang="en-US" sz="1100" dirty="0">
+                <a:solidFill>
+                  <a:srgbClr val="1B1B2F"/>
+                </a:solidFill>
+                <a:latin typeface="Calibri" pitchFamily="34" charset="0"/>
+                <a:ea typeface="Calibri" pitchFamily="34" charset="-122"/>
+                <a:cs typeface="Calibri" pitchFamily="34" charset="-120"/>
+              </a:rPr>
+              <a:t>セキュリティ対策の完全防御は困難</a:t>
+            </a:r>
+            <a:endParaRPr lang="en-US" sz="1100" dirty="0"/>
+          </a:p>
+        </p:txBody>
+      </p:sp>
+      <p:sp>
+        <p:nvSpPr>
+          <p:cNvPr id="15" name="Text 13"/>
+          <p:cNvSpPr/>
+          <p:nvPr/>
+        </p:nvSpPr>
+        <p:spPr>
+          <a:xfrm>
+            <a:off x="6327648" y="2862072"/>
+            <a:ext cx="2386584" cy="228600"/>
+          </a:xfrm>
+          <a:prstGeom prst="rect">
+            <a:avLst/>
+          </a:prstGeom>
+          <a:noFill/>
+          <a:ln/>
+        </p:spPr>
+        <p:txBody>
+          <a:bodyPr wrap="square" lIns="0" tIns="0" rIns="0" bIns="0" rtlCol="0" anchor="ctr"/>
+          <a:lstStyle/>
+          <a:p>
+            <a:pPr algn="l" indent="0" marL="0">
+              <a:buNone/>
+            </a:pPr>
+            <a:r>
+              <a:rPr lang="en-US" sz="900" dirty="0">
+                <a:solidFill>
+                  <a:srgbClr val="5A6B8C"/>
+                </a:solidFill>
+                <a:latin typeface="Calibri" pitchFamily="34" charset="0"/>
+                <a:ea typeface="Calibri" pitchFamily="34" charset="-122"/>
+                <a:cs typeface="Calibri" pitchFamily="34" charset="-120"/>
+              </a:rPr>
+              <a:t>[26]</a:t>
+            </a:r>
+            <a:endParaRPr lang="en-US" sz="900" dirty="0"/>
+          </a:p>
+        </p:txBody>
+      </p:sp>
+      <p:sp>
+        <p:nvSpPr>
+          <p:cNvPr id="16" name="Shape 14"/>
+          <p:cNvSpPr/>
+          <p:nvPr/>
+        </p:nvSpPr>
+        <p:spPr>
+          <a:xfrm>
+            <a:off x="9098280" y="1371600"/>
+            <a:ext cx="2606040" cy="1783080"/>
+          </a:xfrm>
+          <a:prstGeom prst="roundRect">
+            <a:avLst>
+              <a:gd name="adj" fmla="val 3077"/>
+            </a:avLst>
+          </a:prstGeom>
+          <a:solidFill>
+            <a:srgbClr val="1E2761"/>
+          </a:solidFill>
+          <a:ln w="9525">
+            <a:solidFill>
+              <a:srgbClr val="1E2761"/>
+            </a:solidFill>
+            <a:prstDash val="solid"/>
+          </a:ln>
+        </p:spPr>
+      </p:sp>
+      <p:sp>
+        <p:nvSpPr>
+          <p:cNvPr id="17" name="Text 15"/>
+          <p:cNvSpPr/>
+          <p:nvPr/>
+        </p:nvSpPr>
+        <p:spPr>
+          <a:xfrm>
+            <a:off x="9208008" y="1508760"/>
+            <a:ext cx="2386584" cy="685800"/>
+          </a:xfrm>
+          <a:prstGeom prst="rect">
+            <a:avLst/>
+          </a:prstGeom>
+          <a:noFill/>
+          <a:ln/>
+        </p:spPr>
+        <p:txBody>
+          <a:bodyPr wrap="square" lIns="0" tIns="0" rIns="0" bIns="0" rtlCol="0" anchor="t"/>
+          <a:lstStyle/>
+          <a:p>
+            <a:pPr algn="l" indent="0" marL="0">
+              <a:buNone/>
+            </a:pPr>
+            <a:r>
+              <a:rPr lang="en-US" sz="2200" b="1" dirty="0">
+                <a:solidFill>
+                  <a:srgbClr val="FFFFFF"/>
+                </a:solidFill>
+                <a:latin typeface="Cambria" pitchFamily="34" charset="0"/>
+                <a:ea typeface="Cambria" pitchFamily="34" charset="-122"/>
+                <a:cs typeface="Cambria" pitchFamily="34" charset="-120"/>
+              </a:rPr>
+              <a:t>効果なし</a:t>
+            </a:r>
+            <a:endParaRPr lang="en-US" sz="2200" dirty="0"/>
+          </a:p>
+        </p:txBody>
+      </p:sp>
+      <p:sp>
+        <p:nvSpPr>
+          <p:cNvPr id="18" name="Text 16"/>
+          <p:cNvSpPr/>
+          <p:nvPr/>
+        </p:nvSpPr>
+        <p:spPr>
+          <a:xfrm>
+            <a:off x="9208008" y="2240280"/>
+            <a:ext cx="2386584" cy="594360"/>
+          </a:xfrm>
+          <a:prstGeom prst="rect">
+            <a:avLst/>
+          </a:prstGeom>
+          <a:noFill/>
+          <a:ln/>
+        </p:spPr>
+        <p:txBody>
+          <a:bodyPr wrap="square" lIns="0" tIns="0" rIns="0" bIns="0" rtlCol="0" anchor="t"/>
+          <a:lstStyle/>
+          <a:p>
+            <a:pPr algn="l" indent="0" marL="0">
+              <a:buNone/>
+            </a:pPr>
+            <a:r>
+              <a:rPr lang="en-US" sz="1100" dirty="0">
+                <a:solidFill>
+                  <a:srgbClr val="CADCFC"/>
+                </a:solidFill>
+                <a:latin typeface="Calibri" pitchFamily="34" charset="0"/>
+                <a:ea typeface="Calibri" pitchFamily="34" charset="-122"/>
+                <a:cs typeface="Calibri" pitchFamily="34" charset="-120"/>
+              </a:rPr>
+              <a:t>共通ポイントのような</a:t>
+            </a:r>
+            <a:endParaRPr lang="en-US" sz="1100" dirty="0"/>
+          </a:p>
+          <a:p>
+            <a:pPr algn="l" indent="0" marL="0">
+              <a:buNone/>
+            </a:pPr>
+            <a:r>
+              <a:rPr lang="en-US" sz="1100" dirty="0">
+                <a:solidFill>
+                  <a:srgbClr val="CADCFC"/>
+                </a:solidFill>
+                <a:latin typeface="Calibri" pitchFamily="34" charset="0"/>
+                <a:ea typeface="Calibri" pitchFamily="34" charset="-122"/>
+                <a:cs typeface="Calibri" pitchFamily="34" charset="-120"/>
+              </a:rPr>
+              <a:t>相互送客・新規誘引効果が無い</a:t>
+            </a:r>
+            <a:endParaRPr lang="en-US" sz="1100" dirty="0"/>
+          </a:p>
+        </p:txBody>
+      </p:sp>
+      <p:sp>
+        <p:nvSpPr>
+          <p:cNvPr id="19" name="Text 17"/>
+          <p:cNvSpPr/>
+          <p:nvPr/>
+        </p:nvSpPr>
+        <p:spPr>
+          <a:xfrm>
+            <a:off x="9208008" y="2862072"/>
+            <a:ext cx="2386584" cy="228600"/>
+          </a:xfrm>
+          <a:prstGeom prst="rect">
+            <a:avLst/>
+          </a:prstGeom>
+          <a:noFill/>
+          <a:ln/>
+        </p:spPr>
+        <p:txBody>
+          <a:bodyPr wrap="square" lIns="0" tIns="0" rIns="0" bIns="0" rtlCol="0" anchor="ctr"/>
+          <a:lstStyle/>
+          <a:p>
+            <a:pPr algn="l" indent="0" marL="0">
+              <a:buNone/>
+            </a:pPr>
+            <a:r>
+              <a:rPr lang="en-US" sz="900" dirty="0">
+                <a:solidFill>
+                  <a:srgbClr val="8FA3D9"/>
+                </a:solidFill>
+                <a:latin typeface="Calibri" pitchFamily="34" charset="0"/>
+                <a:ea typeface="Calibri" pitchFamily="34" charset="-122"/>
+                <a:cs typeface="Calibri" pitchFamily="34" charset="-120"/>
+              </a:rPr>
+              <a:t>[19]</a:t>
+            </a:r>
+            <a:endParaRPr lang="en-US" sz="900" dirty="0"/>
+          </a:p>
+        </p:txBody>
+      </p:sp>
+      <p:sp>
+        <p:nvSpPr>
+          <p:cNvPr id="20" name="Shape 18"/>
+          <p:cNvSpPr/>
+          <p:nvPr/>
+        </p:nvSpPr>
+        <p:spPr>
+          <a:xfrm>
+            <a:off x="457200" y="3429000"/>
+            <a:ext cx="11247120" cy="2971800"/>
+          </a:xfrm>
+          <a:prstGeom prst="roundRect">
+            <a:avLst>
+              <a:gd name="adj" fmla="val 1846"/>
+            </a:avLst>
+          </a:prstGeom>
+          <a:solidFill>
+            <a:srgbClr val="FFFFFF"/>
+          </a:solidFill>
+          <a:ln w="9525">
+            <a:solidFill>
+              <a:srgbClr val="D7DEEE"/>
+            </a:solidFill>
+            <a:prstDash val="solid"/>
+          </a:ln>
+        </p:spPr>
+      </p:sp>
+      <p:sp>
+        <p:nvSpPr>
+          <p:cNvPr id="21" name="Text 19"/>
+          <p:cNvSpPr/>
+          <p:nvPr/>
+        </p:nvSpPr>
+        <p:spPr>
+          <a:xfrm>
+            <a:off x="731520" y="3639312"/>
+            <a:ext cx="10698480" cy="2606040"/>
+          </a:xfrm>
+          <a:prstGeom prst="rect">
+            <a:avLst/>
+          </a:prstGeom>
+          <a:noFill/>
+          <a:ln/>
+        </p:spPr>
+        <p:txBody>
+          <a:bodyPr wrap="square" lIns="0" tIns="0" rIns="0" bIns="0" rtlCol="0" anchor="t"/>
+          <a:lstStyle/>
+          <a:p>
+            <a:pPr indent="0" marL="0">
+              <a:spcAft>
+                <a:spcPts val="1000"/>
+              </a:spcAft>
+              <a:buNone/>
+            </a:pPr>
+            <a:r>
+              <a:rPr lang="en-US" sz="1250" b="1" dirty="0">
+                <a:solidFill>
+                  <a:srgbClr val="1E2761"/>
+                </a:solidFill>
+                <a:latin typeface="Calibri" pitchFamily="34" charset="0"/>
+                <a:ea typeface="Calibri" pitchFamily="34" charset="-122"/>
+                <a:cs typeface="Calibri" pitchFamily="34" charset="-120"/>
+              </a:rPr>
+              <a:t>補足データ</a:t>
+            </a:r>
+            <a:endParaRPr lang="en-US" sz="1250" dirty="0"/>
+          </a:p>
+          <a:p>
+            <a:pPr marL="342900" indent="-342900">
+              <a:spcAft>
+                <a:spcPts val="1000"/>
+              </a:spcAft>
+              <a:buSzPct val="100000"/>
+              <a:buChar char="•"/>
+            </a:pPr>
+            <a:r>
+              <a:rPr lang="en-US" sz="1250" dirty="0">
+                <a:solidFill>
+                  <a:srgbClr val="1B1B2F"/>
+                </a:solidFill>
+                <a:latin typeface="Calibri" pitchFamily="34" charset="0"/>
+                <a:ea typeface="Calibri" pitchFamily="34" charset="-122"/>
+                <a:cs typeface="Calibri" pitchFamily="34" charset="-120"/>
+              </a:rPr>
+              <a:t>コスト負担を理由に自社ポイントを廃止・縮小し、共通ポイントへ切り替える(またはポイント交換システムで接続する)「自社ポイント離れ」の動きも実際に存在する [27]</a:t>
+            </a:r>
+            <a:endParaRPr lang="en-US" sz="1250" dirty="0"/>
+          </a:p>
+          <a:p>
+            <a:pPr marL="342900" indent="-342900">
+              <a:spcAft>
+                <a:spcPts val="1000"/>
+              </a:spcAft>
+              <a:buSzPct val="100000"/>
+              <a:buChar char="•"/>
+            </a:pPr>
+            <a:r>
+              <a:rPr lang="en-US" sz="1250" dirty="0">
+                <a:solidFill>
+                  <a:srgbClr val="1B1B2F"/>
+                </a:solidFill>
+                <a:latin typeface="Calibri" pitchFamily="34" charset="0"/>
+                <a:ea typeface="Calibri" pitchFamily="34" charset="-122"/>
+                <a:cs typeface="Calibri" pitchFamily="34" charset="-120"/>
+              </a:rPr>
+              <a:t>共通ポイントは運営会社がシステム構築・保守・セキュリティを一手に引き受けるため、加盟店側はこれらの固定費を負わずに済む</a:t>
+            </a:r>
+            <a:endParaRPr lang="en-US" sz="1250" dirty="0"/>
+          </a:p>
+          <a:p>
+            <a:pPr indent="0" marL="0">
+              <a:buNone/>
+            </a:pPr>
+            <a:r>
+              <a:rPr lang="en-US" sz="1150" i="1" dirty="0">
+                <a:solidFill>
+                  <a:srgbClr val="5A6B8C"/>
+                </a:solidFill>
+                <a:latin typeface="Calibri" pitchFamily="34" charset="0"/>
+                <a:ea typeface="Calibri" pitchFamily="34" charset="-122"/>
+                <a:cs typeface="Calibri" pitchFamily="34" charset="-120"/>
+              </a:rPr>
+              <a:t>示唆: 独自ポイントは「仲介手数料なし」の代わりに「初期投資・保守・セキュリティ」という別の固定費負担を負う構造。体力のない中小事業者ほどこの負担が重く、dポイントのホワイトレーベル化(システム構築・保守・セキュリティをドコモ側が肩代わり)の恩恵を最も受けられる層になり得る</a:t>
+            </a:r>
+            <a:endParaRPr lang="en-US" sz="1250" dirty="0"/>
+          </a:p>
+        </p:txBody>
+      </p:sp>
+    </p:spTree>
+  </p:cSld>
+  <p:clrMapOvr>
+    <a:masterClrMapping/>
+  </p:clrMapOvr>
+</p:sld>
+</file>
+
+<file path=ppt/slides/slide8.xml><?xml version="1.0" encoding="utf-8"?>
+<p:sld xmlns:a="http://schemas.openxmlformats.org/drawingml/2006/main" xmlns:r="http://schemas.openxmlformats.org/officeDocument/2006/relationships" xmlns:p="http://schemas.openxmlformats.org/presentationml/2006/main">
+  <p:cSld name="Slide 8">
+    <p:bg>
+      <p:bgPr>
+        <a:solidFill>
+          <a:srgbClr val="F4F6FB"/>
+        </a:solidFill>
+      </p:bgPr>
+    </p:bg>
+    <p:spTree>
+      <p:nvGrpSpPr>
+        <p:cNvPr id="1" name=""/>
+        <p:cNvGrpSpPr/>
+        <p:nvPr/>
+      </p:nvGrpSpPr>
+      <p:grpSpPr>
+        <a:xfrm>
+          <a:off x="0" y="0"/>
+          <a:ext cx="0" cy="0"/>
+          <a:chOff x="0" y="0"/>
+          <a:chExt cx="0" cy="0"/>
+        </a:xfrm>
+      </p:grpSpPr>
+      <p:sp>
+        <p:nvSpPr>
+          <p:cNvPr id="2" name="Text 0"/>
+          <p:cNvSpPr/>
+          <p:nvPr/>
+        </p:nvSpPr>
+        <p:spPr>
+          <a:xfrm>
+            <a:off x="457200" y="320040"/>
+            <a:ext cx="11247120" cy="457200"/>
+          </a:xfrm>
+          <a:prstGeom prst="rect">
+            <a:avLst/>
+          </a:prstGeom>
+          <a:noFill/>
+          <a:ln/>
+        </p:spPr>
+        <p:txBody>
+          <a:bodyPr wrap="square" lIns="0" tIns="0" rIns="0" bIns="0" rtlCol="0" anchor="ctr"/>
+          <a:lstStyle/>
+          <a:p>
+            <a:pPr indent="0" marL="0">
+              <a:buNone/>
+            </a:pPr>
+            <a:r>
+              <a:rPr lang="en-US" sz="2400" b="1" dirty="0">
+                <a:solidFill>
+                  <a:srgbClr val="1E2761"/>
+                </a:solidFill>
+                <a:latin typeface="Cambria" pitchFamily="34" charset="0"/>
+                <a:ea typeface="Cambria" pitchFamily="34" charset="-122"/>
+                <a:cs typeface="Cambria" pitchFamily="34" charset="-120"/>
+              </a:rPr>
+              <a:t>提案:ホワイトレーベルdポイントの複層設計</a:t>
+            </a:r>
+            <a:endParaRPr lang="en-US" sz="2400" dirty="0"/>
+          </a:p>
+        </p:txBody>
+      </p:sp>
+      <p:sp>
+        <p:nvSpPr>
+          <p:cNvPr id="3" name="Text 1"/>
+          <p:cNvSpPr/>
+          <p:nvPr/>
+        </p:nvSpPr>
+        <p:spPr>
+          <a:xfrm>
+            <a:off x="457200" y="777240"/>
+            <a:ext cx="11247120" cy="292608"/>
+          </a:xfrm>
+          <a:prstGeom prst="rect">
+            <a:avLst/>
+          </a:prstGeom>
+          <a:noFill/>
+          <a:ln/>
+        </p:spPr>
+        <p:txBody>
+          <a:bodyPr wrap="square" lIns="0" tIns="0" rIns="0" bIns="0" rtlCol="0" anchor="ctr"/>
+          <a:lstStyle/>
+          <a:p>
+            <a:pPr indent="0" marL="0">
+              <a:buNone/>
+            </a:pPr>
+            <a:r>
+              <a:rPr lang="en-US" sz="1200" i="1" dirty="0">
+                <a:solidFill>
+                  <a:srgbClr val="5A6B8C"/>
+                </a:solidFill>
+                <a:latin typeface="Calibri" pitchFamily="34" charset="0"/>
+                <a:ea typeface="Calibri" pitchFamily="34" charset="-122"/>
+                <a:cs typeface="Calibri" pitchFamily="34" charset="-120"/>
+              </a:rPr>
+              <a:t>WL限定ポイントで囲い込みを守りつつ、交換オプションで「共通ポイントのお得感」も両立させる</a:t>
+            </a:r>
+            <a:endParaRPr lang="en-US" sz="1200" dirty="0"/>
+          </a:p>
+        </p:txBody>
+      </p:sp>
+      <p:sp>
+        <p:nvSpPr>
+          <p:cNvPr id="4" name="Shape 2"/>
+          <p:cNvSpPr/>
+          <p:nvPr/>
+        </p:nvSpPr>
+        <p:spPr>
+          <a:xfrm>
+            <a:off x="457200" y="1188720"/>
+            <a:ext cx="4114800" cy="1005840"/>
+          </a:xfrm>
+          <a:prstGeom prst="roundRect">
+            <a:avLst>
+              <a:gd name="adj" fmla="val 5455"/>
+            </a:avLst>
+          </a:prstGeom>
+          <a:solidFill>
+            <a:srgbClr val="EDF1FA"/>
+          </a:solidFill>
+          <a:ln w="12700">
+            <a:solidFill>
+              <a:srgbClr val="1E2761"/>
+            </a:solidFill>
+            <a:prstDash val="solid"/>
+          </a:ln>
+        </p:spPr>
+      </p:sp>
+      <p:sp>
+        <p:nvSpPr>
+          <p:cNvPr id="5" name="Text 3"/>
+          <p:cNvSpPr/>
+          <p:nvPr/>
+        </p:nvSpPr>
+        <p:spPr>
+          <a:xfrm>
+            <a:off x="640080" y="1298448"/>
+            <a:ext cx="3749040" cy="786384"/>
+          </a:xfrm>
+          <a:prstGeom prst="rect">
+            <a:avLst/>
+          </a:prstGeom>
+          <a:noFill/>
+          <a:ln/>
+        </p:spPr>
+        <p:txBody>
+          <a:bodyPr wrap="square" lIns="0" tIns="0" rIns="0" bIns="0" rtlCol="0" anchor="t"/>
+          <a:lstStyle/>
+          <a:p>
+            <a:pPr indent="0" marL="0">
+              <a:spcAft>
+                <a:spcPts val="300"/>
+              </a:spcAft>
+              <a:buNone/>
+            </a:pPr>
+            <a:r>
+              <a:rPr lang="en-US" sz="1400" b="1" dirty="0">
+                <a:solidFill>
+                  <a:srgbClr val="1E2761"/>
+                </a:solidFill>
+                <a:latin typeface="Calibri" pitchFamily="34" charset="0"/>
+                <a:ea typeface="Calibri" pitchFamily="34" charset="-122"/>
+                <a:cs typeface="Calibri" pitchFamily="34" charset="-120"/>
+              </a:rPr>
+              <a:t>WL限定dポイント</a:t>
+            </a:r>
+            <a:endParaRPr lang="en-US" sz="1400" dirty="0"/>
+          </a:p>
+          <a:p>
+            <a:pPr indent="0" marL="0">
+              <a:buNone/>
+            </a:pPr>
+            <a:r>
+              <a:rPr lang="en-US" sz="1050" dirty="0">
+                <a:solidFill>
+                  <a:srgbClr val="1B1B2F"/>
+                </a:solidFill>
+                <a:latin typeface="Calibri" pitchFamily="34" charset="0"/>
+                <a:ea typeface="Calibri" pitchFamily="34" charset="-122"/>
+                <a:cs typeface="Calibri" pitchFamily="34" charset="-120"/>
+              </a:rPr>
+              <a:t>その提携先でのみ貯める・使える(囲い込み維持)</a:t>
+            </a:r>
+            <a:endParaRPr lang="en-US" sz="1400" dirty="0"/>
+          </a:p>
+        </p:txBody>
+      </p:sp>
+      <p:sp>
+        <p:nvSpPr>
+          <p:cNvPr id="6" name="Text 4"/>
+          <p:cNvSpPr/>
+          <p:nvPr/>
+        </p:nvSpPr>
+        <p:spPr>
+          <a:xfrm>
+            <a:off x="4709160" y="1325880"/>
+            <a:ext cx="2743200" cy="731520"/>
+          </a:xfrm>
+          <a:prstGeom prst="rect">
+            <a:avLst/>
+          </a:prstGeom>
+          <a:noFill/>
+          <a:ln/>
+        </p:spPr>
+        <p:txBody>
+          <a:bodyPr wrap="square" lIns="0" tIns="0" rIns="0" bIns="0" rtlCol="0" anchor="ctr"/>
+          <a:lstStyle/>
+          <a:p>
+            <a:pPr algn="ctr" indent="0" marL="0">
+              <a:buNone/>
+            </a:pPr>
+            <a:r>
+              <a:rPr lang="en-US" sz="1100" b="1" dirty="0">
+                <a:solidFill>
+                  <a:srgbClr val="1E2761"/>
+                </a:solidFill>
+                <a:latin typeface="Calibri" pitchFamily="34" charset="0"/>
+                <a:ea typeface="Calibri" pitchFamily="34" charset="-122"/>
+                <a:cs typeface="Calibri" pitchFamily="34" charset="-120"/>
+              </a:rPr>
+              <a:t>手続きで交換</a:t>
+            </a:r>
+            <a:endParaRPr lang="en-US" sz="1100" dirty="0"/>
+          </a:p>
+          <a:p>
+            <a:pPr algn="ctr" indent="0" marL="0">
+              <a:buNone/>
+            </a:pPr>
+            <a:r>
+              <a:rPr lang="en-US" sz="1100" b="1" dirty="0">
+                <a:solidFill>
+                  <a:srgbClr val="1E2761"/>
+                </a:solidFill>
+                <a:latin typeface="Calibri" pitchFamily="34" charset="0"/>
+                <a:ea typeface="Calibri" pitchFamily="34" charset="-122"/>
+                <a:cs typeface="Calibri" pitchFamily="34" charset="-120"/>
+              </a:rPr>
+              <a:t>(レート例: 33〜60%)</a:t>
+            </a:r>
+            <a:endParaRPr lang="en-US" sz="1100" dirty="0"/>
+          </a:p>
+        </p:txBody>
+      </p:sp>
+      <p:sp>
+        <p:nvSpPr>
+          <p:cNvPr id="7" name="Shape 5"/>
+          <p:cNvSpPr/>
+          <p:nvPr/>
+        </p:nvSpPr>
+        <p:spPr>
+          <a:xfrm>
+            <a:off x="4709160" y="1124712"/>
+            <a:ext cx="2743200" cy="109728"/>
+          </a:xfrm>
+          <a:prstGeom prst="rightArrow">
+            <a:avLst/>
+          </a:prstGeom>
+          <a:solidFill>
+            <a:srgbClr val="AEBEDD"/>
+          </a:solidFill>
+          <a:ln/>
+        </p:spPr>
+      </p:sp>
+      <p:sp>
+        <p:nvSpPr>
+          <p:cNvPr id="8" name="Shape 6"/>
+          <p:cNvSpPr/>
+          <p:nvPr/>
+        </p:nvSpPr>
+        <p:spPr>
+          <a:xfrm>
+            <a:off x="7589520" y="1188720"/>
+            <a:ext cx="4114800" cy="1005840"/>
+          </a:xfrm>
+          <a:prstGeom prst="roundRect">
+            <a:avLst>
+              <a:gd name="adj" fmla="val 5455"/>
+            </a:avLst>
+          </a:prstGeom>
+          <a:solidFill>
+            <a:srgbClr val="1E2761"/>
+          </a:solidFill>
+          <a:ln w="12700">
+            <a:solidFill>
+              <a:srgbClr val="1E2761"/>
+            </a:solidFill>
+            <a:prstDash val="solid"/>
+          </a:ln>
+        </p:spPr>
+      </p:sp>
+      <p:sp>
+        <p:nvSpPr>
+          <p:cNvPr id="9" name="Text 7"/>
+          <p:cNvSpPr/>
+          <p:nvPr/>
+        </p:nvSpPr>
+        <p:spPr>
+          <a:xfrm>
+            <a:off x="7772400" y="1298448"/>
+            <a:ext cx="3749040" cy="786384"/>
+          </a:xfrm>
+          <a:prstGeom prst="rect">
+            <a:avLst/>
+          </a:prstGeom>
+          <a:noFill/>
+          <a:ln/>
+        </p:spPr>
+        <p:txBody>
+          <a:bodyPr wrap="square" lIns="0" tIns="0" rIns="0" bIns="0" rtlCol="0" anchor="t"/>
+          <a:lstStyle/>
+          <a:p>
+            <a:pPr indent="0" marL="0">
+              <a:spcAft>
+                <a:spcPts val="300"/>
+              </a:spcAft>
+              <a:buNone/>
+            </a:pPr>
+            <a:r>
+              <a:rPr lang="en-US" sz="1400" b="1" dirty="0">
+                <a:solidFill>
+                  <a:srgbClr val="FFFFFF"/>
+                </a:solidFill>
+                <a:latin typeface="Calibri" pitchFamily="34" charset="0"/>
+                <a:ea typeface="Calibri" pitchFamily="34" charset="-122"/>
+                <a:cs typeface="Calibri" pitchFamily="34" charset="-120"/>
+              </a:rPr>
+              <a:t>通常dポイント</a:t>
+            </a:r>
+            <a:endParaRPr lang="en-US" sz="1400" dirty="0"/>
+          </a:p>
+          <a:p>
+            <a:pPr indent="0" marL="0">
+              <a:buNone/>
+            </a:pPr>
+            <a:r>
+              <a:rPr lang="en-US" sz="1050" dirty="0">
+                <a:solidFill>
+                  <a:srgbClr val="CADCFC"/>
+                </a:solidFill>
+                <a:latin typeface="Calibri" pitchFamily="34" charset="0"/>
+                <a:ea typeface="Calibri" pitchFamily="34" charset="-122"/>
+                <a:cs typeface="Calibri" pitchFamily="34" charset="-120"/>
+              </a:rPr>
+              <a:t>全国のdポイント加盟店・d払いで利用可</a:t>
+            </a:r>
+            <a:endParaRPr lang="en-US" sz="1400" dirty="0"/>
+          </a:p>
+        </p:txBody>
+      </p:sp>
+      <p:sp>
+        <p:nvSpPr>
+          <p:cNvPr id="10" name="Text 8"/>
+          <p:cNvSpPr/>
+          <p:nvPr/>
+        </p:nvSpPr>
+        <p:spPr>
+          <a:xfrm>
+            <a:off x="457200" y="2468880"/>
+            <a:ext cx="11247120" cy="292608"/>
+          </a:xfrm>
+          <a:prstGeom prst="rect">
+            <a:avLst/>
+          </a:prstGeom>
+          <a:noFill/>
+          <a:ln/>
+        </p:spPr>
+        <p:txBody>
+          <a:bodyPr wrap="square" lIns="0" tIns="0" rIns="0" bIns="0" rtlCol="0" anchor="ctr"/>
+          <a:lstStyle/>
+          <a:p>
+            <a:pPr indent="0" marL="0">
+              <a:buNone/>
+            </a:pPr>
+            <a:r>
+              <a:rPr lang="en-US" sz="1300" b="1" dirty="0">
+                <a:solidFill>
+                  <a:srgbClr val="1E2761"/>
+                </a:solidFill>
+                <a:latin typeface="Calibri" pitchFamily="34" charset="0"/>
+                <a:ea typeface="Calibri" pitchFamily="34" charset="-122"/>
+                <a:cs typeface="Calibri" pitchFamily="34" charset="-120"/>
+              </a:rPr>
+              <a:t>実現可能性の裏付け(前例)</a:t>
+            </a:r>
+            <a:endParaRPr lang="en-US" sz="1300" dirty="0"/>
+          </a:p>
+        </p:txBody>
+      </p:sp>
+      <p:sp>
+        <p:nvSpPr>
+          <p:cNvPr id="11" name="Shape 9"/>
+          <p:cNvSpPr/>
+          <p:nvPr/>
+        </p:nvSpPr>
+        <p:spPr>
+          <a:xfrm>
+            <a:off x="457200" y="2788920"/>
+            <a:ext cx="5349240" cy="1371600"/>
+          </a:xfrm>
+          <a:prstGeom prst="roundRect">
+            <a:avLst>
+              <a:gd name="adj" fmla="val 4000"/>
+            </a:avLst>
+          </a:prstGeom>
+          <a:solidFill>
+            <a:srgbClr val="FFFFFF"/>
+          </a:solidFill>
+          <a:ln w="9525">
+            <a:solidFill>
+              <a:srgbClr val="D7DEEE"/>
+            </a:solidFill>
+            <a:prstDash val="solid"/>
+          </a:ln>
+        </p:spPr>
+      </p:sp>
+      <p:sp>
+        <p:nvSpPr>
+          <p:cNvPr id="12" name="Text 10"/>
+          <p:cNvSpPr/>
+          <p:nvPr/>
+        </p:nvSpPr>
+        <p:spPr>
+          <a:xfrm>
+            <a:off x="640080" y="2898648"/>
+            <a:ext cx="4983480" cy="1152144"/>
+          </a:xfrm>
+          <a:prstGeom prst="rect">
+            <a:avLst/>
+          </a:prstGeom>
+          <a:noFill/>
+          <a:ln/>
+        </p:spPr>
+        <p:txBody>
+          <a:bodyPr wrap="square" lIns="0" tIns="0" rIns="0" bIns="0" rtlCol="0" anchor="t"/>
+          <a:lstStyle/>
+          <a:p>
+            <a:pPr indent="0" marL="0">
+              <a:spcAft>
+                <a:spcPts val="400"/>
+              </a:spcAft>
+              <a:buNone/>
+            </a:pPr>
+            <a:r>
+              <a:rPr lang="en-US" sz="1150" b="1" dirty="0">
+                <a:solidFill>
+                  <a:srgbClr val="1E2761"/>
+                </a:solidFill>
+                <a:latin typeface="Calibri" pitchFamily="34" charset="0"/>
+                <a:ea typeface="Calibri" pitchFamily="34" charset="-122"/>
+                <a:cs typeface="Calibri" pitchFamily="34" charset="-120"/>
+              </a:rPr>
+              <a:t>前例① dポイントは既に複層ポイントを運用中</a:t>
+            </a:r>
+            <a:endParaRPr lang="en-US" sz="1150" dirty="0"/>
+          </a:p>
+          <a:p>
+            <a:pPr indent="0" marL="0">
+              <a:buNone/>
+            </a:pPr>
+            <a:r>
+              <a:rPr lang="en-US" sz="1000" dirty="0">
+                <a:solidFill>
+                  <a:srgbClr val="1B1B2F"/>
+                </a:solidFill>
+                <a:latin typeface="Calibri" pitchFamily="34" charset="0"/>
+                <a:ea typeface="Calibri" pitchFamily="34" charset="-122"/>
+                <a:cs typeface="Calibri" pitchFamily="34" charset="-120"/>
+              </a:rPr>
+              <a:t>「通常ポイント」と「期間・用途限定ポイント」が既に併存し、合算利用・有効期限順消化の仕組みが稼働中。ゼロから開発する必要がない [28]</a:t>
+            </a:r>
+            <a:endParaRPr lang="en-US" sz="1150" dirty="0"/>
+          </a:p>
+        </p:txBody>
+      </p:sp>
+      <p:sp>
+        <p:nvSpPr>
+          <p:cNvPr id="13" name="Shape 11"/>
+          <p:cNvSpPr/>
+          <p:nvPr/>
+        </p:nvSpPr>
+        <p:spPr>
+          <a:xfrm>
+            <a:off x="6080760" y="2788920"/>
+            <a:ext cx="5349240" cy="1371600"/>
+          </a:xfrm>
+          <a:prstGeom prst="roundRect">
+            <a:avLst>
+              <a:gd name="adj" fmla="val 4000"/>
+            </a:avLst>
+          </a:prstGeom>
+          <a:solidFill>
+            <a:srgbClr val="FFFFFF"/>
+          </a:solidFill>
+          <a:ln w="9525">
+            <a:solidFill>
+              <a:srgbClr val="D7DEEE"/>
+            </a:solidFill>
+            <a:prstDash val="solid"/>
+          </a:ln>
+        </p:spPr>
+      </p:sp>
+      <p:sp>
+        <p:nvSpPr>
+          <p:cNvPr id="14" name="Text 12"/>
+          <p:cNvSpPr/>
+          <p:nvPr/>
+        </p:nvSpPr>
+        <p:spPr>
+          <a:xfrm>
+            <a:off x="6263640" y="2898648"/>
+            <a:ext cx="4983480" cy="1152144"/>
+          </a:xfrm>
+          <a:prstGeom prst="rect">
+            <a:avLst/>
+          </a:prstGeom>
+          <a:noFill/>
+          <a:ln/>
+        </p:spPr>
+        <p:txBody>
+          <a:bodyPr wrap="square" lIns="0" tIns="0" rIns="0" bIns="0" rtlCol="0" anchor="t"/>
+          <a:lstStyle/>
+          <a:p>
+            <a:pPr indent="0" marL="0">
+              <a:spcAft>
+                <a:spcPts val="400"/>
+              </a:spcAft>
+              <a:buNone/>
+            </a:pPr>
+            <a:r>
+              <a:rPr lang="en-US" sz="1150" b="1" dirty="0">
+                <a:solidFill>
+                  <a:srgbClr val="1E2761"/>
+                </a:solidFill>
+                <a:latin typeface="Calibri" pitchFamily="34" charset="0"/>
+                <a:ea typeface="Calibri" pitchFamily="34" charset="-122"/>
+                <a:cs typeface="Calibri" pitchFamily="34" charset="-120"/>
+              </a:rPr>
+              <a:t>前例② マイル交換で「レート目減り」設計は実証済み</a:t>
+            </a:r>
+            <a:endParaRPr lang="en-US" sz="1150" dirty="0"/>
+          </a:p>
+          <a:p>
+            <a:pPr indent="0" marL="0">
+              <a:buNone/>
+            </a:pPr>
+            <a:r>
+              <a:rPr lang="en-US" sz="1000" dirty="0">
+                <a:solidFill>
+                  <a:srgbClr val="1B1B2F"/>
+                </a:solidFill>
+                <a:latin typeface="Calibri" pitchFamily="34" charset="0"/>
+                <a:ea typeface="Calibri" pitchFamily="34" charset="-122"/>
+                <a:cs typeface="Calibri" pitchFamily="34" charset="-120"/>
+              </a:rPr>
+              <a:t>Pontaポイント→JALマイルは約33%、Vポイント→ANAマイルは50〜60%。レートを下げること自体が囲い込みの摩擦と原資コストの調整弁になる [29][30]</a:t>
+            </a:r>
+            <a:endParaRPr lang="en-US" sz="1150" dirty="0"/>
+          </a:p>
+        </p:txBody>
+      </p:sp>
+      <p:sp>
+        <p:nvSpPr>
+          <p:cNvPr id="15" name="Text 13"/>
+          <p:cNvSpPr/>
+          <p:nvPr/>
+        </p:nvSpPr>
+        <p:spPr>
+          <a:xfrm>
+            <a:off x="457200" y="4343400"/>
+            <a:ext cx="5349240" cy="274320"/>
+          </a:xfrm>
+          <a:prstGeom prst="rect">
+            <a:avLst/>
+          </a:prstGeom>
+          <a:noFill/>
+          <a:ln/>
+        </p:spPr>
+        <p:txBody>
+          <a:bodyPr wrap="square" lIns="0" tIns="0" rIns="0" bIns="0" rtlCol="0" anchor="ctr"/>
+          <a:lstStyle/>
+          <a:p>
+            <a:pPr indent="0" marL="0">
+              <a:buNone/>
+            </a:pPr>
+            <a:r>
+              <a:rPr lang="en-US" sz="1300" b="1" dirty="0">
+                <a:solidFill>
+                  <a:srgbClr val="1E7145"/>
+                </a:solidFill>
+                <a:latin typeface="Calibri" pitchFamily="34" charset="0"/>
+                <a:ea typeface="Calibri" pitchFamily="34" charset="-122"/>
+                <a:cs typeface="Calibri" pitchFamily="34" charset="-120"/>
+              </a:rPr>
+              <a:t>強み</a:t>
+            </a:r>
+            <a:endParaRPr lang="en-US" sz="1300" dirty="0"/>
+          </a:p>
+        </p:txBody>
+      </p:sp>
+      <p:sp>
+        <p:nvSpPr>
+          <p:cNvPr id="16" name="Text 14"/>
+          <p:cNvSpPr/>
+          <p:nvPr/>
+        </p:nvSpPr>
+        <p:spPr>
+          <a:xfrm>
+            <a:off x="457200" y="4645152"/>
+            <a:ext cx="5349240" cy="1783080"/>
+          </a:xfrm>
+          <a:prstGeom prst="rect">
+            <a:avLst/>
+          </a:prstGeom>
+          <a:noFill/>
+          <a:ln/>
+        </p:spPr>
+        <p:txBody>
+          <a:bodyPr wrap="square" lIns="0" tIns="0" rIns="0" bIns="0" rtlCol="0" anchor="t"/>
+          <a:lstStyle/>
+          <a:p>
+            <a:pPr marL="342900" indent="-342900">
+              <a:spcAft>
+                <a:spcPts val="600"/>
+              </a:spcAft>
+              <a:buSzPct val="100000"/>
+              <a:buChar char="•"/>
+            </a:pPr>
+            <a:r>
+              <a:rPr lang="en-US" sz="1100" dirty="0">
+                <a:solidFill>
+                  <a:srgbClr val="1B1B2F"/>
+                </a:solidFill>
+                <a:latin typeface="Calibri" pitchFamily="34" charset="0"/>
+                <a:ea typeface="Calibri" pitchFamily="34" charset="-122"/>
+                <a:cs typeface="Calibri" pitchFamily="34" charset="-120"/>
+              </a:rPr>
+              <a:t>パートナー: 自社経済圏にポイントが留まり囲い込み効果が毀損されない</a:t>
+            </a:r>
+            <a:endParaRPr lang="en-US" sz="1100" dirty="0"/>
+          </a:p>
+          <a:p>
+            <a:pPr marL="342900" indent="-342900">
+              <a:spcAft>
+                <a:spcPts val="600"/>
+              </a:spcAft>
+              <a:buSzPct val="100000"/>
+              <a:buChar char="•"/>
+            </a:pPr>
+            <a:r>
+              <a:rPr lang="en-US" sz="1100" dirty="0">
+                <a:solidFill>
+                  <a:srgbClr val="1B1B2F"/>
+                </a:solidFill>
+                <a:latin typeface="Calibri" pitchFamily="34" charset="0"/>
+                <a:ea typeface="Calibri" pitchFamily="34" charset="-122"/>
+                <a:cs typeface="Calibri" pitchFamily="34" charset="-120"/>
+              </a:rPr>
+              <a:t>ドコモ: 交換レートの目減り分が新収益源。WL提携先の増加で非ドコモ接点も拡大</a:t>
+            </a:r>
+            <a:endParaRPr lang="en-US" sz="1100" dirty="0"/>
+          </a:p>
+          <a:p>
+            <a:pPr marL="342900" indent="-342900">
+              <a:buSzPct val="100000"/>
+              <a:buChar char="•"/>
+            </a:pPr>
+            <a:r>
+              <a:rPr lang="en-US" sz="1100" dirty="0">
+                <a:solidFill>
+                  <a:srgbClr val="1B1B2F"/>
+                </a:solidFill>
+                <a:latin typeface="Calibri" pitchFamily="34" charset="0"/>
+                <a:ea typeface="Calibri" pitchFamily="34" charset="-122"/>
+                <a:cs typeface="Calibri" pitchFamily="34" charset="-120"/>
+              </a:rPr>
+              <a:t>消費者: 「将来dポイントに変えられる」安心感でWLポイント自体のお得感が底上げされる</a:t>
+            </a:r>
+            <a:endParaRPr lang="en-US" sz="1100" dirty="0"/>
+          </a:p>
+        </p:txBody>
+      </p:sp>
+      <p:sp>
+        <p:nvSpPr>
+          <p:cNvPr id="17" name="Text 15"/>
+          <p:cNvSpPr/>
+          <p:nvPr/>
+        </p:nvSpPr>
+        <p:spPr>
+          <a:xfrm>
+            <a:off x="6080760" y="4343400"/>
+            <a:ext cx="5349240" cy="274320"/>
+          </a:xfrm>
+          <a:prstGeom prst="rect">
+            <a:avLst/>
+          </a:prstGeom>
+          <a:noFill/>
+          <a:ln/>
+        </p:spPr>
+        <p:txBody>
+          <a:bodyPr wrap="square" lIns="0" tIns="0" rIns="0" bIns="0" rtlCol="0" anchor="ctr"/>
+          <a:lstStyle/>
+          <a:p>
+            <a:pPr indent="0" marL="0">
+              <a:buNone/>
+            </a:pPr>
+            <a:r>
+              <a:rPr lang="en-US" sz="1300" b="1" dirty="0">
+                <a:solidFill>
+                  <a:srgbClr val="9C6B00"/>
+                </a:solidFill>
+                <a:latin typeface="Calibri" pitchFamily="34" charset="0"/>
+                <a:ea typeface="Calibri" pitchFamily="34" charset="-122"/>
+                <a:cs typeface="Calibri" pitchFamily="34" charset="-120"/>
+              </a:rPr>
+              <a:t>設計上の論点</a:t>
+            </a:r>
+            <a:endParaRPr lang="en-US" sz="1300" dirty="0"/>
+          </a:p>
+        </p:txBody>
+      </p:sp>
+      <p:sp>
+        <p:nvSpPr>
+          <p:cNvPr id="18" name="Text 16"/>
+          <p:cNvSpPr/>
+          <p:nvPr/>
+        </p:nvSpPr>
+        <p:spPr>
+          <a:xfrm>
+            <a:off x="6080760" y="4645152"/>
+            <a:ext cx="5349240" cy="1783080"/>
+          </a:xfrm>
+          <a:prstGeom prst="rect">
+            <a:avLst/>
+          </a:prstGeom>
+          <a:noFill/>
+          <a:ln/>
+        </p:spPr>
+        <p:txBody>
+          <a:bodyPr wrap="square" lIns="0" tIns="0" rIns="0" bIns="0" rtlCol="0" anchor="t"/>
+          <a:lstStyle/>
+          <a:p>
+            <a:pPr marL="342900" indent="-342900">
+              <a:spcAft>
+                <a:spcPts val="600"/>
+              </a:spcAft>
+              <a:buSzPct val="100000"/>
+              <a:buChar char="•"/>
+            </a:pPr>
+            <a:r>
+              <a:rPr lang="en-US" sz="1100" dirty="0">
+                <a:solidFill>
+                  <a:srgbClr val="1B1B2F"/>
+                </a:solidFill>
+                <a:latin typeface="Calibri" pitchFamily="34" charset="0"/>
+                <a:ea typeface="Calibri" pitchFamily="34" charset="-122"/>
+                <a:cs typeface="Calibri" pitchFamily="34" charset="-120"/>
+              </a:rPr>
+              <a:t>交換レートの水準が生命線 ―高すぎれば囲い込み崩壊、低すぎれば評判悪化</a:t>
+            </a:r>
+            <a:endParaRPr lang="en-US" sz="1100" dirty="0"/>
+          </a:p>
+          <a:p>
+            <a:pPr marL="342900" indent="-342900">
+              <a:spcAft>
+                <a:spcPts val="600"/>
+              </a:spcAft>
+              <a:buSzPct val="100000"/>
+              <a:buChar char="•"/>
+            </a:pPr>
+            <a:r>
+              <a:rPr lang="en-US" sz="1100" dirty="0">
+                <a:solidFill>
+                  <a:srgbClr val="1B1B2F"/>
+                </a:solidFill>
+                <a:latin typeface="Calibri" pitchFamily="34" charset="0"/>
+                <a:ea typeface="Calibri" pitchFamily="34" charset="-122"/>
+                <a:cs typeface="Calibri" pitchFamily="34" charset="-120"/>
+              </a:rPr>
+              <a:t>交換方向の設計 ―WL→通常のみか、双方向か</a:t>
+            </a:r>
+            <a:endParaRPr lang="en-US" sz="1100" dirty="0"/>
+          </a:p>
+          <a:p>
+            <a:pPr marL="342900" indent="-342900">
+              <a:buSzPct val="100000"/>
+              <a:buChar char="•"/>
+            </a:pPr>
+            <a:r>
+              <a:rPr lang="en-US" sz="1100" dirty="0">
+                <a:solidFill>
+                  <a:srgbClr val="1B1B2F"/>
+                </a:solidFill>
+                <a:latin typeface="Calibri" pitchFamily="34" charset="0"/>
+                <a:ea typeface="Calibri" pitchFamily="34" charset="-122"/>
+                <a:cs typeface="Calibri" pitchFamily="34" charset="-120"/>
+              </a:rPr>
+              <a:t>消費者の分かりにくさ ―現行の期間・用途限定ポイントも理解されにくい実態がある</a:t>
+            </a:r>
+            <a:endParaRPr lang="en-US" sz="1100" dirty="0"/>
+          </a:p>
+        </p:txBody>
+      </p:sp>
+    </p:spTree>
+  </p:cSld>
+  <p:clrMapOvr>
+    <a:masterClrMapping/>
+  </p:clrMapOvr>
+</p:sld>
+</file>
+
+<file path=ppt/slides/slide9.xml><?xml version="1.0" encoding="utf-8"?>
+<p:sld xmlns:a="http://schemas.openxmlformats.org/drawingml/2006/main" xmlns:r="http://schemas.openxmlformats.org/officeDocument/2006/relationships" xmlns:p="http://schemas.openxmlformats.org/presentationml/2006/main">
+  <p:cSld name="Slide 9">
+    <p:bg>
+      <p:bgPr>
+        <a:solidFill>
           <a:srgbClr val="FFFFFF"/>
         </a:solidFill>
       </p:bgPr>
@@ -8180,8 +10593,8 @@
         </p:nvSpPr>
         <p:spPr>
           <a:xfrm>
-            <a:off x="457200" y="1005840"/>
-            <a:ext cx="5440680" cy="3886200"/>
+            <a:off x="457200" y="960120"/>
+            <a:ext cx="5440680" cy="3977640"/>
           </a:xfrm>
           <a:prstGeom prst="rect">
             <a:avLst/>
@@ -8195,12 +10608,12 @@
           <a:p>
             <a:pPr indent="0" marL="0">
               <a:spcAft>
-                <a:spcPts val="500"/>
+                <a:spcPts val="400"/>
               </a:spcAft>
               <a:buNone/>
             </a:pPr>
             <a:r>
-              <a:rPr lang="en-US" sz="900" dirty="0">
+              <a:rPr lang="en-US" sz="850" dirty="0">
                 <a:solidFill>
                   <a:srgbClr val="1B1B2F"/>
                 </a:solidFill>
@@ -8210,17 +10623,17 @@
               </a:rPr>
               <a:t>[1] MMD研究所ほか「通信会社と利用ポイントに関する調査」 ― キャリア別メイン利用ポイントの相関</a:t>
             </a:r>
-            <a:endParaRPr lang="en-US" sz="900" dirty="0"/>
+            <a:endParaRPr lang="en-US" sz="850" dirty="0"/>
           </a:p>
           <a:p>
             <a:pPr indent="0" marL="0">
               <a:spcAft>
-                <a:spcPts val="500"/>
+                <a:spcPts val="400"/>
               </a:spcAft>
               <a:buNone/>
             </a:pPr>
             <a:r>
-              <a:rPr lang="en-US" sz="900" dirty="0">
+              <a:rPr lang="en-US" sz="850" dirty="0">
                 <a:solidFill>
                   <a:srgbClr val="1B1B2F"/>
                 </a:solidFill>
@@ -8230,17 +10643,17 @@
               </a:rPr>
               <a:t>[2] NTTドコモ モバイル社会研究所 シニア調査(70代スマホ所有率など)</a:t>
             </a:r>
-            <a:endParaRPr lang="en-US" sz="900" dirty="0"/>
+            <a:endParaRPr lang="en-US" sz="850" dirty="0"/>
           </a:p>
           <a:p>
             <a:pPr indent="0" marL="0">
               <a:spcAft>
-                <a:spcPts val="500"/>
+                <a:spcPts val="400"/>
               </a:spcAft>
               <a:buNone/>
             </a:pPr>
             <a:r>
-              <a:rPr lang="en-US" sz="900" dirty="0">
+              <a:rPr lang="en-US" sz="850" dirty="0">
                 <a:solidFill>
                   <a:srgbClr val="1B1B2F"/>
                 </a:solidFill>
@@ -8250,17 +10663,17 @@
               </a:rPr>
               <a:t>[3] ITmedia ビジネスオンライン「『ドコモ経済圏』に取り込め ―会員数1億人超え、dポイントクラブがLINE連携で目指すLTV最大化戦略」(2025年12月)</a:t>
             </a:r>
-            <a:endParaRPr lang="en-US" sz="900" dirty="0"/>
+            <a:endParaRPr lang="en-US" sz="850" dirty="0"/>
           </a:p>
           <a:p>
             <a:pPr indent="0" marL="0">
               <a:spcAft>
-                <a:spcPts val="500"/>
+                <a:spcPts val="400"/>
               </a:spcAft>
               <a:buNone/>
             </a:pPr>
             <a:r>
-              <a:rPr lang="en-US" sz="900" dirty="0">
+              <a:rPr lang="en-US" sz="850" dirty="0">
                 <a:solidFill>
                   <a:srgbClr val="1B1B2F"/>
                 </a:solidFill>
@@ -8270,17 +10683,17 @@
               </a:rPr>
               <a:t>[4] 株式会社ロイヤリティ マーケティング公式データ(paymentnavi「Ponta 15年の歩みから見るポイントが生み出す価値と決済の変化」)</a:t>
             </a:r>
-            <a:endParaRPr lang="en-US" sz="900" dirty="0"/>
+            <a:endParaRPr lang="en-US" sz="850" dirty="0"/>
           </a:p>
           <a:p>
             <a:pPr indent="0" marL="0">
               <a:spcAft>
-                <a:spcPts val="500"/>
+                <a:spcPts val="400"/>
               </a:spcAft>
               <a:buNone/>
             </a:pPr>
             <a:r>
-              <a:rPr lang="en-US" sz="900" dirty="0">
+              <a:rPr lang="en-US" sz="850" dirty="0">
                 <a:solidFill>
                   <a:srgbClr val="1B1B2F"/>
                 </a:solidFill>
@@ -8290,17 +10703,17 @@
               </a:rPr>
               <a:t>[5] MMD研究所ほか 年代別ポイント利用実態調査</a:t>
             </a:r>
-            <a:endParaRPr lang="en-US" sz="900" dirty="0"/>
+            <a:endParaRPr lang="en-US" sz="850" dirty="0"/>
           </a:p>
           <a:p>
             <a:pPr indent="0" marL="0">
               <a:spcAft>
-                <a:spcPts val="500"/>
+                <a:spcPts val="400"/>
               </a:spcAft>
               <a:buNone/>
             </a:pPr>
             <a:r>
-              <a:rPr lang="en-US" sz="900" dirty="0">
+              <a:rPr lang="en-US" sz="850" dirty="0">
                 <a:solidFill>
                   <a:srgbClr val="1B1B2F"/>
                 </a:solidFill>
@@ -8310,17 +10723,17 @@
               </a:rPr>
               <a:t>[6] SBペイメントサービス「実店舗でのキャッシュレス決済の利用実態調査結果」(2024年11月)</a:t>
             </a:r>
-            <a:endParaRPr lang="en-US" sz="900" dirty="0"/>
+            <a:endParaRPr lang="en-US" sz="850" dirty="0"/>
           </a:p>
           <a:p>
             <a:pPr indent="0" marL="0">
               <a:spcAft>
-                <a:spcPts val="500"/>
+                <a:spcPts val="400"/>
               </a:spcAft>
               <a:buNone/>
             </a:pPr>
             <a:r>
-              <a:rPr lang="en-US" sz="900" dirty="0">
+              <a:rPr lang="en-US" sz="850" dirty="0">
                 <a:solidFill>
                   <a:srgbClr val="1B1B2F"/>
                 </a:solidFill>
@@ -8330,17 +10743,17 @@
               </a:rPr>
               <a:t>[7] マナミナ(バリューズ)/アイリッジ調査「スマホ決済利用率」</a:t>
             </a:r>
-            <a:endParaRPr lang="en-US" sz="900" dirty="0"/>
+            <a:endParaRPr lang="en-US" sz="850" dirty="0"/>
           </a:p>
           <a:p>
             <a:pPr indent="0" marL="0">
               <a:spcAft>
-                <a:spcPts val="500"/>
+                <a:spcPts val="400"/>
               </a:spcAft>
               <a:buNone/>
             </a:pPr>
             <a:r>
-              <a:rPr lang="en-US" sz="900" dirty="0">
+              <a:rPr lang="en-US" sz="850" dirty="0">
                 <a:solidFill>
                   <a:srgbClr val="1B1B2F"/>
                 </a:solidFill>
@@ -8350,17 +10763,17 @@
               </a:rPr>
               <a:t>[8] Vポイントマーケティング(旧CCC)プレスリリース「Tカードの年間利用会員数が日本総人口の50%突破」(2017年)</a:t>
             </a:r>
-            <a:endParaRPr lang="en-US" sz="900" dirty="0"/>
+            <a:endParaRPr lang="en-US" sz="850" dirty="0"/>
           </a:p>
           <a:p>
             <a:pPr indent="0" marL="0">
               <a:spcAft>
-                <a:spcPts val="500"/>
+                <a:spcPts val="400"/>
               </a:spcAft>
               <a:buNone/>
             </a:pPr>
             <a:r>
-              <a:rPr lang="en-US" sz="900" dirty="0">
+              <a:rPr lang="en-US" sz="850" dirty="0">
                 <a:solidFill>
                   <a:srgbClr val="1B1B2F"/>
                 </a:solidFill>
@@ -8370,17 +10783,17 @@
               </a:rPr>
               <a:t>[9] paymentnavi「SMBCグループ共通ポイント『Vポイント』、若年層獲得や日常利用促進で成果」</a:t>
             </a:r>
-            <a:endParaRPr lang="en-US" sz="900" dirty="0"/>
+            <a:endParaRPr lang="en-US" sz="850" dirty="0"/>
           </a:p>
           <a:p>
             <a:pPr indent="0" marL="0">
               <a:spcAft>
-                <a:spcPts val="500"/>
+                <a:spcPts val="400"/>
               </a:spcAft>
               <a:buNone/>
             </a:pPr>
             <a:r>
-              <a:rPr lang="en-US" sz="900" dirty="0">
+              <a:rPr lang="en-US" sz="850" dirty="0">
                 <a:solidFill>
                   <a:srgbClr val="1B1B2F"/>
                 </a:solidFill>
@@ -8390,17 +10803,17 @@
               </a:rPr>
               <a:t>[10] ITmedia ビジネスオンライン「日常で最も多く利用するポイントは『楽天ポイント』幅広い世代で最多」(2021年10月)</a:t>
             </a:r>
-            <a:endParaRPr lang="en-US" sz="900" dirty="0"/>
+            <a:endParaRPr lang="en-US" sz="850" dirty="0"/>
           </a:p>
           <a:p>
             <a:pPr indent="0" marL="0">
               <a:spcAft>
-                <a:spcPts val="500"/>
+                <a:spcPts val="400"/>
               </a:spcAft>
               <a:buNone/>
             </a:pPr>
             <a:r>
-              <a:rPr lang="en-US" sz="900" dirty="0">
+              <a:rPr lang="en-US" sz="850" dirty="0">
                 <a:solidFill>
                   <a:srgbClr val="1B1B2F"/>
                 </a:solidFill>
@@ -8410,17 +10823,17 @@
               </a:rPr>
               <a:t>[11] MMD研究所「ポイント経済圏のサービス利用に関する調査」(2025年7月)</a:t>
             </a:r>
-            <a:endParaRPr lang="en-US" sz="900" dirty="0"/>
+            <a:endParaRPr lang="en-US" sz="850" dirty="0"/>
           </a:p>
           <a:p>
             <a:pPr indent="0" marL="0">
               <a:spcAft>
-                <a:spcPts val="500"/>
+                <a:spcPts val="400"/>
               </a:spcAft>
               <a:buNone/>
             </a:pPr>
             <a:r>
-              <a:rPr lang="en-US" sz="900" dirty="0">
+              <a:rPr lang="en-US" sz="850" dirty="0">
                 <a:solidFill>
                   <a:srgbClr val="1B1B2F"/>
                 </a:solidFill>
@@ -8430,7 +10843,67 @@
               </a:rPr>
               <a:t>[12] 第一生命経済研究所「シニアのポイ活事情 ―キャッシュレス化が後押しするシニアのポイントサービス利用―」鄭美沙(Life Design Report 2025.7、50〜79歳2,400人調査)</a:t>
             </a:r>
-            <a:endParaRPr lang="en-US" sz="900" dirty="0"/>
+            <a:endParaRPr lang="en-US" sz="850" dirty="0"/>
+          </a:p>
+          <a:p>
+            <a:pPr indent="0" marL="0">
+              <a:spcAft>
+                <a:spcPts val="400"/>
+              </a:spcAft>
+              <a:buNone/>
+            </a:pPr>
+            <a:r>
+              <a:rPr lang="en-US" sz="850" dirty="0">
+                <a:solidFill>
+                  <a:srgbClr val="1B1B2F"/>
+                </a:solidFill>
+                <a:latin typeface="Calibri" pitchFamily="34" charset="0"/>
+                <a:ea typeface="Calibri" pitchFamily="34" charset="-122"/>
+                <a:cs typeface="Calibri" pitchFamily="34" charset="-120"/>
+              </a:rPr>
+              <a:t>[13] マイナビニュース「『ポイ活』を行っているシニアは6割弱 ―ポイ活アプリ、ネットバンキングの利用状況は?」(2025年7月10日)</a:t>
+            </a:r>
+            <a:endParaRPr lang="en-US" sz="850" dirty="0"/>
+          </a:p>
+          <a:p>
+            <a:pPr indent="0" marL="0">
+              <a:spcAft>
+                <a:spcPts val="400"/>
+              </a:spcAft>
+              <a:buNone/>
+            </a:pPr>
+            <a:r>
+              <a:rPr lang="en-US" sz="850" dirty="0">
+                <a:solidFill>
+                  <a:srgbClr val="1B1B2F"/>
+                </a:solidFill>
+                <a:latin typeface="Calibri" pitchFamily="34" charset="0"/>
+                <a:ea typeface="Calibri" pitchFamily="34" charset="-122"/>
+                <a:cs typeface="Calibri" pitchFamily="34" charset="-120"/>
+              </a:rPr>
+              <a:t>[14] 株式会社ハルメク「シニア女性に聞いた『キャッシュレス決済』に関する実態調査」</a:t>
+            </a:r>
+            <a:endParaRPr lang="en-US" sz="850" dirty="0"/>
+          </a:p>
+          <a:p>
+            <a:pPr indent="0" marL="0">
+              <a:spcAft>
+                <a:spcPts val="400"/>
+              </a:spcAft>
+              <a:buNone/>
+            </a:pPr>
+            <a:r>
+              <a:rPr lang="en-US" sz="850" dirty="0">
+                <a:solidFill>
+                  <a:srgbClr val="1B1B2F"/>
+                </a:solidFill>
+                <a:latin typeface="Calibri" pitchFamily="34" charset="0"/>
+                <a:ea typeface="Calibri" pitchFamily="34" charset="-122"/>
+                <a:cs typeface="Calibri" pitchFamily="34" charset="-120"/>
+              </a:rPr>
+              <a:t>[15] NTTドコモ モバイル社会研究所「【シニア】QRコード決済利用率 60代が1年で7ポイント上昇し半数を超える」(2024年5月30日)</a:t>
+            </a:r>
+            <a:endParaRPr lang="en-US" sz="850" dirty="0"/>
           </a:p>
         </p:txBody>
       </p:sp>
@@ -8442,8 +10915,8 @@
         </p:nvSpPr>
         <p:spPr>
           <a:xfrm>
-            <a:off x="6263640" y="1005840"/>
-            <a:ext cx="5440680" cy="3886200"/>
+            <a:off x="6263640" y="960120"/>
+            <a:ext cx="5440680" cy="3977640"/>
           </a:xfrm>
           <a:prstGeom prst="rect">
             <a:avLst/>
@@ -8457,12 +10930,12 @@
           <a:p>
             <a:pPr indent="0" marL="0">
               <a:spcAft>
-                <a:spcPts val="500"/>
+                <a:spcPts val="400"/>
               </a:spcAft>
               <a:buNone/>
             </a:pPr>
             <a:r>
-              <a:rPr lang="en-US" sz="900" dirty="0">
+              <a:rPr lang="en-US" sz="850" dirty="0">
                 <a:solidFill>
                   <a:srgbClr val="1B1B2F"/>
                 </a:solidFill>
@@ -8470,19 +10943,19 @@
                 <a:ea typeface="Calibri" pitchFamily="34" charset="-122"/>
                 <a:cs typeface="Calibri" pitchFamily="34" charset="-120"/>
               </a:rPr>
-              <a:t>[13] マイナビニュース「『ポイ活』を行っているシニアは6割弱 ―ポイ活アプリ、ネットバンキングの利用状況は?」(2025年7月10日)</a:t>
-            </a:r>
-            <a:endParaRPr lang="en-US" sz="900" dirty="0"/>
+              <a:t>[16] マイボイスコム株式会社「ポイントサービスに関するアンケート調査」(直近1年間の利用店舗・業種別)</a:t>
+            </a:r>
+            <a:endParaRPr lang="en-US" sz="850" dirty="0"/>
           </a:p>
           <a:p>
             <a:pPr indent="0" marL="0">
               <a:spcAft>
-                <a:spcPts val="500"/>
+                <a:spcPts val="400"/>
               </a:spcAft>
               <a:buNone/>
             </a:pPr>
             <a:r>
-              <a:rPr lang="en-US" sz="900" dirty="0">
+              <a:rPr lang="en-US" sz="850" dirty="0">
                 <a:solidFill>
                   <a:srgbClr val="1B1B2F"/>
                 </a:solidFill>
@@ -8490,19 +10963,19 @@
                 <a:ea typeface="Calibri" pitchFamily="34" charset="-122"/>
                 <a:cs typeface="Calibri" pitchFamily="34" charset="-120"/>
               </a:rPr>
-              <a:t>[14] 株式会社ハルメク「シニア女性に聞いた『キャッシュレス決済』に関する実態調査」</a:t>
-            </a:r>
-            <a:endParaRPr lang="en-US" sz="900" dirty="0"/>
+              <a:t>[17] 一般社団法人全国スーパーマーケット協会・一般社団法人日本スーパーマーケット協会「2023年 スーパーマーケット年次統計調査 報告書」(2023年10月)</a:t>
+            </a:r>
+            <a:endParaRPr lang="en-US" sz="850" dirty="0"/>
           </a:p>
           <a:p>
             <a:pPr indent="0" marL="0">
               <a:spcAft>
-                <a:spcPts val="500"/>
+                <a:spcPts val="400"/>
               </a:spcAft>
               <a:buNone/>
             </a:pPr>
             <a:r>
-              <a:rPr lang="en-US" sz="900" dirty="0">
+              <a:rPr lang="en-US" sz="850" dirty="0">
                 <a:solidFill>
                   <a:srgbClr val="1B1B2F"/>
                 </a:solidFill>
@@ -8510,19 +10983,19 @@
                 <a:ea typeface="Calibri" pitchFamily="34" charset="-122"/>
                 <a:cs typeface="Calibri" pitchFamily="34" charset="-120"/>
               </a:rPr>
-              <a:t>[15] NTTドコモ モバイル社会研究所「【シニア】QRコード決済利用率 60代が1年で7ポイント上昇し半数を超える」(2024年5月30日)</a:t>
-            </a:r>
-            <a:endParaRPr lang="en-US" sz="900" dirty="0"/>
+              <a:t>[18] 株式会社プラネット「意識調査 Fromプラネット Vol.75 ―ポイントカードに関する意識調査―」</a:t>
+            </a:r>
+            <a:endParaRPr lang="en-US" sz="850" dirty="0"/>
           </a:p>
           <a:p>
             <a:pPr indent="0" marL="0">
               <a:spcAft>
-                <a:spcPts val="500"/>
+                <a:spcPts val="400"/>
               </a:spcAft>
               <a:buNone/>
             </a:pPr>
             <a:r>
-              <a:rPr lang="en-US" sz="900" dirty="0">
+              <a:rPr lang="en-US" sz="850" dirty="0">
                 <a:solidFill>
                   <a:srgbClr val="1B1B2F"/>
                 </a:solidFill>
@@ -8530,19 +11003,19 @@
                 <a:ea typeface="Calibri" pitchFamily="34" charset="-122"/>
                 <a:cs typeface="Calibri" pitchFamily="34" charset="-120"/>
               </a:rPr>
-              <a:t>[16] マイボイスコム株式会社「ポイントサービスに関するアンケート調査」(直近1年間の利用店舗・業種別)</a:t>
-            </a:r>
-            <a:endParaRPr lang="en-US" sz="900" dirty="0"/>
+              <a:t>[19] ポイントマーケティングラボ「共通ポイントと自社（個別）ポイントの特徴や違い」</a:t>
+            </a:r>
+            <a:endParaRPr lang="en-US" sz="850" dirty="0"/>
           </a:p>
           <a:p>
             <a:pPr indent="0" marL="0">
               <a:spcAft>
-                <a:spcPts val="500"/>
+                <a:spcPts val="400"/>
               </a:spcAft>
               <a:buNone/>
             </a:pPr>
             <a:r>
-              <a:rPr lang="en-US" sz="900" dirty="0">
+              <a:rPr lang="en-US" sz="850" dirty="0">
                 <a:solidFill>
                   <a:srgbClr val="1B1B2F"/>
                 </a:solidFill>
@@ -8550,19 +11023,19 @@
                 <a:ea typeface="Calibri" pitchFamily="34" charset="-122"/>
                 <a:cs typeface="Calibri" pitchFamily="34" charset="-120"/>
               </a:rPr>
-              <a:t>[17] 一般社団法人全国スーパーマーケット協会・一般社団法人日本スーパーマーケット協会「2023年 スーパーマーケット年次統計調査 報告書」(2023年10月)</a:t>
-            </a:r>
-            <a:endParaRPr lang="en-US" sz="900" dirty="0"/>
+              <a:t>[20] LIMO「TポイントやPontaの共通ポイント、原資は誰が出しているの？ 増える共通ポイント導入企業、今後の課題は何か」</a:t>
+            </a:r>
+            <a:endParaRPr lang="en-US" sz="850" dirty="0"/>
           </a:p>
           <a:p>
             <a:pPr indent="0" marL="0">
               <a:spcAft>
-                <a:spcPts val="500"/>
+                <a:spcPts val="400"/>
               </a:spcAft>
               <a:buNone/>
             </a:pPr>
             <a:r>
-              <a:rPr lang="en-US" sz="900" dirty="0">
+              <a:rPr lang="en-US" sz="850" dirty="0">
                 <a:solidFill>
                   <a:srgbClr val="1B1B2F"/>
                 </a:solidFill>
@@ -8570,19 +11043,19 @@
                 <a:ea typeface="Calibri" pitchFamily="34" charset="-122"/>
                 <a:cs typeface="Calibri" pitchFamily="34" charset="-120"/>
               </a:rPr>
-              <a:t>[18] 株式会社プラネット「意識調査 Fromプラネット Vol.75 ―ポイントカードに関する意識調査―」</a:t>
-            </a:r>
-            <a:endParaRPr lang="en-US" sz="900" dirty="0"/>
+              <a:t>[21] コツマガ「dポイントは2重取り、3重取りもできる！対象の加盟店と手順、注意点を解説」</a:t>
+            </a:r>
+            <a:endParaRPr lang="en-US" sz="850" dirty="0"/>
           </a:p>
           <a:p>
             <a:pPr indent="0" marL="0">
               <a:spcAft>
-                <a:spcPts val="500"/>
+                <a:spcPts val="400"/>
               </a:spcAft>
               <a:buNone/>
             </a:pPr>
             <a:r>
-              <a:rPr lang="en-US" sz="900" dirty="0">
+              <a:rPr lang="en-US" sz="850" dirty="0">
                 <a:solidFill>
                   <a:srgbClr val="1B1B2F"/>
                 </a:solidFill>
@@ -8590,19 +11063,19 @@
                 <a:ea typeface="Calibri" pitchFamily="34" charset="-122"/>
                 <a:cs typeface="Calibri" pitchFamily="34" charset="-120"/>
               </a:rPr>
-              <a:t>[19] ポイントマーケティングラボ「共通ポイントと自社（個別）ポイントの特徴や違い」</a:t>
-            </a:r>
-            <a:endParaRPr lang="en-US" sz="900" dirty="0"/>
+              <a:t>[22] ポイ探「独自ポイントと共通ポイントの併用パターンが増えてきた理由とは？ 独自ポイントを発行するメリットを解説！」</a:t>
+            </a:r>
+            <a:endParaRPr lang="en-US" sz="850" dirty="0"/>
           </a:p>
           <a:p>
             <a:pPr indent="0" marL="0">
               <a:spcAft>
-                <a:spcPts val="500"/>
+                <a:spcPts val="400"/>
               </a:spcAft>
               <a:buNone/>
             </a:pPr>
             <a:r>
-              <a:rPr lang="en-US" sz="900" dirty="0">
+              <a:rPr lang="en-US" sz="850" dirty="0">
                 <a:solidFill>
                   <a:srgbClr val="1B1B2F"/>
                 </a:solidFill>
@@ -8610,19 +11083,19 @@
                 <a:ea typeface="Calibri" pitchFamily="34" charset="-122"/>
                 <a:cs typeface="Calibri" pitchFamily="34" charset="-120"/>
               </a:rPr>
-              <a:t>[20] LIMO「TポイントやPontaの共通ポイント、原資は誰が出しているの？ 増える共通ポイント導入企業、今後の課題は何か」</a:t>
-            </a:r>
-            <a:endParaRPr lang="en-US" sz="900" dirty="0"/>
+              <a:t>[23] PRESIDENT「なぜか満足度が高まる『ポイント還元』の罠 販促効果は『値引き』の3.6倍もある」</a:t>
+            </a:r>
+            <a:endParaRPr lang="en-US" sz="850" dirty="0"/>
           </a:p>
           <a:p>
             <a:pPr indent="0" marL="0">
               <a:spcAft>
-                <a:spcPts val="500"/>
+                <a:spcPts val="400"/>
               </a:spcAft>
               <a:buNone/>
             </a:pPr>
             <a:r>
-              <a:rPr lang="en-US" sz="900" dirty="0">
+              <a:rPr lang="en-US" sz="850" dirty="0">
                 <a:solidFill>
                   <a:srgbClr val="1B1B2F"/>
                 </a:solidFill>
@@ -8630,19 +11103,19 @@
                 <a:ea typeface="Calibri" pitchFamily="34" charset="-122"/>
                 <a:cs typeface="Calibri" pitchFamily="34" charset="-120"/>
               </a:rPr>
-              <a:t>[21] コツマガ「dポイントは2重取り、3重取りもできる！対象の加盟店と手順、注意点を解説」</a:t>
-            </a:r>
-            <a:endParaRPr lang="en-US" sz="900" dirty="0"/>
+              <a:t>[24] 東芝テック「現金値引よりポイント還元が好まれるワケ―行動経済学が教える正しいポイントの貯め方」</a:t>
+            </a:r>
+            <a:endParaRPr lang="en-US" sz="850" dirty="0"/>
           </a:p>
           <a:p>
             <a:pPr indent="0" marL="0">
               <a:spcAft>
-                <a:spcPts val="500"/>
+                <a:spcPts val="400"/>
               </a:spcAft>
               <a:buNone/>
             </a:pPr>
             <a:r>
-              <a:rPr lang="en-US" sz="900" dirty="0">
+              <a:rPr lang="en-US" sz="850" dirty="0">
                 <a:solidFill>
                   <a:srgbClr val="1B1B2F"/>
                 </a:solidFill>
@@ -8650,19 +11123,19 @@
                 <a:ea typeface="Calibri" pitchFamily="34" charset="-122"/>
                 <a:cs typeface="Calibri" pitchFamily="34" charset="-120"/>
               </a:rPr>
-              <a:t>[22] ポイ探「独自ポイントと共通ポイントの併用パターンが増えてきた理由とは？ 独自ポイントを発行するメリットを解説！」</a:t>
-            </a:r>
-            <a:endParaRPr lang="en-US" sz="900" dirty="0"/>
+              <a:t>[25] SBギフト「ポイントプログラムとは？自社導入を考える前に知っておくべき概要とメリット・デメリット」</a:t>
+            </a:r>
+            <a:endParaRPr lang="en-US" sz="850" dirty="0"/>
           </a:p>
           <a:p>
             <a:pPr indent="0" marL="0">
               <a:spcAft>
-                <a:spcPts val="500"/>
+                <a:spcPts val="400"/>
               </a:spcAft>
               <a:buNone/>
             </a:pPr>
             <a:r>
-              <a:rPr lang="en-US" sz="900" dirty="0">
+              <a:rPr lang="en-US" sz="850" dirty="0">
                 <a:solidFill>
                   <a:srgbClr val="1B1B2F"/>
                 </a:solidFill>
@@ -8670,19 +11143,19 @@
                 <a:ea typeface="Calibri" pitchFamily="34" charset="-122"/>
                 <a:cs typeface="Calibri" pitchFamily="34" charset="-120"/>
               </a:rPr>
-              <a:t>[23] PRESIDENT「なぜか満足度が高まる『ポイント還元』の罠 販促効果は『値引き』の3.6倍もある」</a:t>
-            </a:r>
-            <a:endParaRPr lang="en-US" sz="900" dirty="0"/>
+              <a:t>[26] ライブドアニュース「ポイントカードの不正利用が急増 セキュリティ対策は難しく」</a:t>
+            </a:r>
+            <a:endParaRPr lang="en-US" sz="850" dirty="0"/>
           </a:p>
           <a:p>
             <a:pPr indent="0" marL="0">
               <a:spcAft>
-                <a:spcPts val="500"/>
+                <a:spcPts val="400"/>
               </a:spcAft>
               <a:buNone/>
             </a:pPr>
             <a:r>
-              <a:rPr lang="en-US" sz="900" dirty="0">
+              <a:rPr lang="en-US" sz="850" dirty="0">
                 <a:solidFill>
                   <a:srgbClr val="1B1B2F"/>
                 </a:solidFill>
@@ -8690,9 +11163,69 @@
                 <a:ea typeface="Calibri" pitchFamily="34" charset="-122"/>
                 <a:cs typeface="Calibri" pitchFamily="34" charset="-120"/>
               </a:rPr>
-              <a:t>[24] 東芝テック「現金値引よりポイント還元が好まれるワケ―行動経済学が教える正しいポイントの貯め方」</a:t>
-            </a:r>
-            <a:endParaRPr lang="en-US" sz="900" dirty="0"/>
+              <a:t>[27] note「ポイント戦略の分岐点―自社と共通の違いを科学する」</a:t>
+            </a:r>
+            <a:endParaRPr lang="en-US" sz="850" dirty="0"/>
+          </a:p>
+          <a:p>
+            <a:pPr indent="0" marL="0">
+              <a:spcAft>
+                <a:spcPts val="400"/>
+              </a:spcAft>
+              <a:buNone/>
+            </a:pPr>
+            <a:r>
+              <a:rPr lang="en-US" sz="850" dirty="0">
+                <a:solidFill>
+                  <a:srgbClr val="1B1B2F"/>
+                </a:solidFill>
+                <a:latin typeface="Calibri" pitchFamily="34" charset="0"/>
+                <a:ea typeface="Calibri" pitchFamily="34" charset="-122"/>
+                <a:cs typeface="Calibri" pitchFamily="34" charset="-120"/>
+              </a:rPr>
+              <a:t>[28] NTTドコモ公式ヘルプ「dポイントの『期間・用途限定ポイント』とは何ですか？」</a:t>
+            </a:r>
+            <a:endParaRPr lang="en-US" sz="850" dirty="0"/>
+          </a:p>
+          <a:p>
+            <a:pPr indent="0" marL="0">
+              <a:spcAft>
+                <a:spcPts val="400"/>
+              </a:spcAft>
+              <a:buNone/>
+            </a:pPr>
+            <a:r>
+              <a:rPr lang="en-US" sz="850" dirty="0">
+                <a:solidFill>
+                  <a:srgbClr val="1B1B2F"/>
+                </a:solidFill>
+                <a:latin typeface="Calibri" pitchFamily="34" charset="0"/>
+                <a:ea typeface="Calibri" pitchFamily="34" charset="-122"/>
+                <a:cs typeface="Calibri" pitchFamily="34" charset="-120"/>
+              </a:rPr>
+              <a:t>[29] ドットマガジン「マイル交換率がよいルート。JAL派やANA派が貯めたいポイントの種類」</a:t>
+            </a:r>
+            <a:endParaRPr lang="en-US" sz="850" dirty="0"/>
+          </a:p>
+          <a:p>
+            <a:pPr indent="0" marL="0">
+              <a:spcAft>
+                <a:spcPts val="400"/>
+              </a:spcAft>
+              <a:buNone/>
+            </a:pPr>
+            <a:r>
+              <a:rPr lang="en-US" sz="850" dirty="0">
+                <a:solidFill>
+                  <a:srgbClr val="1B1B2F"/>
+                </a:solidFill>
+                <a:latin typeface="Calibri" pitchFamily="34" charset="0"/>
+                <a:ea typeface="Calibri" pitchFamily="34" charset="-122"/>
+                <a:cs typeface="Calibri" pitchFamily="34" charset="-120"/>
+              </a:rPr>
+              <a:t>[30] ANAマイレージクラブ公式サイト「提携ポイントへの交換」</a:t>
+            </a:r>
+            <a:endParaRPr lang="en-US" sz="850" dirty="0"/>
           </a:p>
         </p:txBody>
       </p:sp>
@@ -8793,531 +11326,6 @@
               <a:t>注: 「dポイント会員の約2人に1人が非ドコモユーザー」という数値は単一のSEO記事のみで確認され、公式IR等で未確認のため本表には採用していない。</a:t>
             </a:r>
             <a:endParaRPr lang="en-US" sz="1150" dirty="0"/>
-          </a:p>
-        </p:txBody>
-      </p:sp>
-    </p:spTree>
-  </p:cSld>
-  <p:clrMapOvr>
-    <a:masterClrMapping/>
-  </p:clrMapOvr>
-</p:sld>
-</file>
-
-<file path=ppt/slides/slide8.xml><?xml version="1.0" encoding="utf-8"?>
-<p:sld xmlns:a="http://schemas.openxmlformats.org/drawingml/2006/main" xmlns:r="http://schemas.openxmlformats.org/officeDocument/2006/relationships" xmlns:p="http://schemas.openxmlformats.org/presentationml/2006/main">
-  <p:cSld name="Slide 8">
-    <p:bg>
-      <p:bgPr>
-        <a:solidFill>
-          <a:srgbClr val="1E2761"/>
-        </a:solidFill>
-      </p:bgPr>
-    </p:bg>
-    <p:spTree>
-      <p:nvGrpSpPr>
-        <p:cNvPr id="1" name=""/>
-        <p:cNvGrpSpPr/>
-        <p:nvPr/>
-      </p:nvGrpSpPr>
-      <p:grpSpPr>
-        <a:xfrm>
-          <a:off x="0" y="0"/>
-          <a:ext cx="0" cy="0"/>
-          <a:chOff x="0" y="0"/>
-          <a:chExt cx="0" cy="0"/>
-        </a:xfrm>
-      </p:grpSpPr>
-      <p:sp>
-        <p:nvSpPr>
-          <p:cNvPr id="2" name="Text 0"/>
-          <p:cNvSpPr/>
-          <p:nvPr/>
-        </p:nvSpPr>
-        <p:spPr>
-          <a:xfrm>
-            <a:off x="731520" y="685800"/>
-            <a:ext cx="5486400" cy="502920"/>
-          </a:xfrm>
-          <a:prstGeom prst="rect">
-            <a:avLst/>
-          </a:prstGeom>
-          <a:noFill/>
-          <a:ln/>
-        </p:spPr>
-        <p:txBody>
-          <a:bodyPr wrap="square" lIns="0" tIns="0" rIns="0" bIns="0" rtlCol="0" anchor="ctr"/>
-          <a:lstStyle/>
-          <a:p>
-            <a:pPr indent="0" marL="0">
-              <a:buNone/>
-            </a:pPr>
-            <a:r>
-              <a:rPr lang="en-US" sz="2200" b="1" dirty="0">
-                <a:solidFill>
-                  <a:srgbClr val="CADCFC"/>
-                </a:solidFill>
-                <a:latin typeface="Cambria" pitchFamily="34" charset="0"/>
-                <a:ea typeface="Cambria" pitchFamily="34" charset="-122"/>
-                <a:cs typeface="Cambria" pitchFamily="34" charset="-120"/>
-              </a:rPr>
-              <a:t>結論</a:t>
-            </a:r>
-            <a:endParaRPr lang="en-US" sz="2200" dirty="0"/>
-          </a:p>
-        </p:txBody>
-      </p:sp>
-      <p:sp>
-        <p:nvSpPr>
-          <p:cNvPr id="3" name="Text 1"/>
-          <p:cNvSpPr/>
-          <p:nvPr/>
-        </p:nvSpPr>
-        <p:spPr>
-          <a:xfrm>
-            <a:off x="731520" y="1143000"/>
-            <a:ext cx="10515600" cy="1371600"/>
-          </a:xfrm>
-          <a:prstGeom prst="rect">
-            <a:avLst/>
-          </a:prstGeom>
-          <a:noFill/>
-          <a:ln/>
-        </p:spPr>
-        <p:txBody>
-          <a:bodyPr wrap="square" lIns="0" tIns="0" rIns="0" bIns="0" rtlCol="0" anchor="ctr"/>
-          <a:lstStyle/>
-          <a:p>
-            <a:pPr indent="0" marL="0">
-              <a:lnSpc>
-                <a:spcPct val="115000"/>
-              </a:lnSpc>
-              <a:buNone/>
-            </a:pPr>
-            <a:r>
-              <a:rPr lang="en-US" sz="3000" b="1" dirty="0">
-                <a:solidFill>
-                  <a:srgbClr val="FFFFFF"/>
-                </a:solidFill>
-                <a:latin typeface="Cambria" pitchFamily="34" charset="0"/>
-                <a:ea typeface="Cambria" pitchFamily="34" charset="-122"/>
-                <a:cs typeface="Cambria" pitchFamily="34" charset="-120"/>
-              </a:rPr>
-              <a:t>「登録の広さ」と「利用の偏り」は別軸</a:t>
-            </a:r>
-            <a:endParaRPr lang="en-US" sz="3000" dirty="0"/>
-          </a:p>
-          <a:p>
-            <a:pPr indent="0" marL="0">
-              <a:lnSpc>
-                <a:spcPct val="115000"/>
-              </a:lnSpc>
-              <a:buNone/>
-            </a:pPr>
-            <a:r>
-              <a:rPr lang="en-US" sz="3000" b="1" dirty="0">
-                <a:solidFill>
-                  <a:srgbClr val="FFFFFF"/>
-                </a:solidFill>
-                <a:latin typeface="Cambria" pitchFamily="34" charset="0"/>
-                <a:ea typeface="Cambria" pitchFamily="34" charset="-122"/>
-                <a:cs typeface="Cambria" pitchFamily="34" charset="-120"/>
-              </a:rPr>
-              <a:t>業界共通の構造的課題</a:t>
-            </a:r>
-            <a:endParaRPr lang="en-US" sz="3000" dirty="0"/>
-          </a:p>
-        </p:txBody>
-      </p:sp>
-      <p:sp>
-        <p:nvSpPr>
-          <p:cNvPr id="4" name="Shape 2"/>
-          <p:cNvSpPr/>
-          <p:nvPr/>
-        </p:nvSpPr>
-        <p:spPr>
-          <a:xfrm>
-            <a:off x="731520" y="2935224"/>
-            <a:ext cx="292608" cy="292608"/>
-          </a:xfrm>
-          <a:prstGeom prst="ellipse">
-            <a:avLst/>
-          </a:prstGeom>
-          <a:solidFill>
-            <a:srgbClr val="334A8C"/>
-          </a:solidFill>
-          <a:ln/>
-        </p:spPr>
-      </p:sp>
-      <p:sp>
-        <p:nvSpPr>
-          <p:cNvPr id="5" name="Text 3"/>
-          <p:cNvSpPr/>
-          <p:nvPr/>
-        </p:nvSpPr>
-        <p:spPr>
-          <a:xfrm>
-            <a:off x="731520" y="2935224"/>
-            <a:ext cx="292608" cy="292608"/>
-          </a:xfrm>
-          <a:prstGeom prst="rect">
-            <a:avLst/>
-          </a:prstGeom>
-          <a:noFill/>
-          <a:ln/>
-        </p:spPr>
-        <p:txBody>
-          <a:bodyPr wrap="square" lIns="0" tIns="0" rIns="0" bIns="0" rtlCol="0" anchor="ctr"/>
-          <a:lstStyle/>
-          <a:p>
-            <a:pPr algn="ctr" indent="0" marL="0">
-              <a:buNone/>
-            </a:pPr>
-            <a:r>
-              <a:rPr lang="en-US" sz="1300" b="1" dirty="0">
-                <a:solidFill>
-                  <a:srgbClr val="FFFFFF"/>
-                </a:solidFill>
-                <a:latin typeface="Calibri" pitchFamily="34" charset="0"/>
-                <a:ea typeface="Calibri" pitchFamily="34" charset="-122"/>
-                <a:cs typeface="Calibri" pitchFamily="34" charset="-120"/>
-              </a:rPr>
-              <a:t>1</a:t>
-            </a:r>
-            <a:endParaRPr lang="en-US" sz="1300" dirty="0"/>
-          </a:p>
-        </p:txBody>
-      </p:sp>
-      <p:sp>
-        <p:nvSpPr>
-          <p:cNvPr id="6" name="Text 4"/>
-          <p:cNvSpPr/>
-          <p:nvPr/>
-        </p:nvSpPr>
-        <p:spPr>
-          <a:xfrm>
-            <a:off x="1234440" y="2880360"/>
-            <a:ext cx="10058400" cy="685800"/>
-          </a:xfrm>
-          <a:prstGeom prst="rect">
-            <a:avLst/>
-          </a:prstGeom>
-          <a:noFill/>
-          <a:ln/>
-        </p:spPr>
-        <p:txBody>
-          <a:bodyPr wrap="square" lIns="0" tIns="0" rIns="0" bIns="0" rtlCol="0" anchor="t"/>
-          <a:lstStyle/>
-          <a:p>
-            <a:pPr indent="0" marL="0">
-              <a:buNone/>
-            </a:pPr>
-            <a:r>
-              <a:rPr lang="en-US" sz="1450" dirty="0">
-                <a:solidFill>
-                  <a:srgbClr val="CADCFC"/>
-                </a:solidFill>
-                <a:latin typeface="Calibri" pitchFamily="34" charset="0"/>
-                <a:ea typeface="Calibri" pitchFamily="34" charset="-122"/>
-                <a:cs typeface="Calibri" pitchFamily="34" charset="-120"/>
-              </a:rPr>
-              <a:t>各ポイントサービスは、母体企業(通信キャリア/EC/旧CCC提携先)の顧客基盤に応じた属性の偏りを構造的に抱える</a:t>
-            </a:r>
-            <a:endParaRPr lang="en-US" sz="1450" dirty="0"/>
-          </a:p>
-        </p:txBody>
-      </p:sp>
-      <p:sp>
-        <p:nvSpPr>
-          <p:cNvPr id="7" name="Shape 5"/>
-          <p:cNvSpPr/>
-          <p:nvPr/>
-        </p:nvSpPr>
-        <p:spPr>
-          <a:xfrm>
-            <a:off x="731520" y="3776472"/>
-            <a:ext cx="292608" cy="292608"/>
-          </a:xfrm>
-          <a:prstGeom prst="ellipse">
-            <a:avLst/>
-          </a:prstGeom>
-          <a:solidFill>
-            <a:srgbClr val="334A8C"/>
-          </a:solidFill>
-          <a:ln/>
-        </p:spPr>
-      </p:sp>
-      <p:sp>
-        <p:nvSpPr>
-          <p:cNvPr id="8" name="Text 6"/>
-          <p:cNvSpPr/>
-          <p:nvPr/>
-        </p:nvSpPr>
-        <p:spPr>
-          <a:xfrm>
-            <a:off x="731520" y="3776472"/>
-            <a:ext cx="292608" cy="292608"/>
-          </a:xfrm>
-          <a:prstGeom prst="rect">
-            <a:avLst/>
-          </a:prstGeom>
-          <a:noFill/>
-          <a:ln/>
-        </p:spPr>
-        <p:txBody>
-          <a:bodyPr wrap="square" lIns="0" tIns="0" rIns="0" bIns="0" rtlCol="0" anchor="ctr"/>
-          <a:lstStyle/>
-          <a:p>
-            <a:pPr algn="ctr" indent="0" marL="0">
-              <a:buNone/>
-            </a:pPr>
-            <a:r>
-              <a:rPr lang="en-US" sz="1300" b="1" dirty="0">
-                <a:solidFill>
-                  <a:srgbClr val="FFFFFF"/>
-                </a:solidFill>
-                <a:latin typeface="Calibri" pitchFamily="34" charset="0"/>
-                <a:ea typeface="Calibri" pitchFamily="34" charset="-122"/>
-                <a:cs typeface="Calibri" pitchFamily="34" charset="-120"/>
-              </a:rPr>
-              <a:t>2</a:t>
-            </a:r>
-            <a:endParaRPr lang="en-US" sz="1300" dirty="0"/>
-          </a:p>
-        </p:txBody>
-      </p:sp>
-      <p:sp>
-        <p:nvSpPr>
-          <p:cNvPr id="9" name="Text 7"/>
-          <p:cNvSpPr/>
-          <p:nvPr/>
-        </p:nvSpPr>
-        <p:spPr>
-          <a:xfrm>
-            <a:off x="1234440" y="3721608"/>
-            <a:ext cx="10058400" cy="685800"/>
-          </a:xfrm>
-          <a:prstGeom prst="rect">
-            <a:avLst/>
-          </a:prstGeom>
-          <a:noFill/>
-          <a:ln/>
-        </p:spPr>
-        <p:txBody>
-          <a:bodyPr wrap="square" lIns="0" tIns="0" rIns="0" bIns="0" rtlCol="0" anchor="t"/>
-          <a:lstStyle/>
-          <a:p>
-            <a:pPr indent="0" marL="0">
-              <a:buNone/>
-            </a:pPr>
-            <a:r>
-              <a:rPr lang="en-US" sz="1450" dirty="0">
-                <a:solidFill>
-                  <a:srgbClr val="CADCFC"/>
-                </a:solidFill>
-                <a:latin typeface="Calibri" pitchFamily="34" charset="0"/>
-                <a:ea typeface="Calibri" pitchFamily="34" charset="-122"/>
-                <a:cs typeface="Calibri" pitchFamily="34" charset="-120"/>
-              </a:rPr>
-              <a:t>特にPontaポイントはdポイントと同型の「登録は幅広いが、メイン利用は特定層に集中」という構造が確認できた</a:t>
-            </a:r>
-            <a:endParaRPr lang="en-US" sz="1450" dirty="0"/>
-          </a:p>
-        </p:txBody>
-      </p:sp>
-      <p:sp>
-        <p:nvSpPr>
-          <p:cNvPr id="10" name="Shape 8"/>
-          <p:cNvSpPr/>
-          <p:nvPr/>
-        </p:nvSpPr>
-        <p:spPr>
-          <a:xfrm>
-            <a:off x="731520" y="4617720"/>
-            <a:ext cx="292608" cy="292608"/>
-          </a:xfrm>
-          <a:prstGeom prst="ellipse">
-            <a:avLst/>
-          </a:prstGeom>
-          <a:solidFill>
-            <a:srgbClr val="334A8C"/>
-          </a:solidFill>
-          <a:ln/>
-        </p:spPr>
-      </p:sp>
-      <p:sp>
-        <p:nvSpPr>
-          <p:cNvPr id="11" name="Text 9"/>
-          <p:cNvSpPr/>
-          <p:nvPr/>
-        </p:nvSpPr>
-        <p:spPr>
-          <a:xfrm>
-            <a:off x="731520" y="4617720"/>
-            <a:ext cx="292608" cy="292608"/>
-          </a:xfrm>
-          <a:prstGeom prst="rect">
-            <a:avLst/>
-          </a:prstGeom>
-          <a:noFill/>
-          <a:ln/>
-        </p:spPr>
-        <p:txBody>
-          <a:bodyPr wrap="square" lIns="0" tIns="0" rIns="0" bIns="0" rtlCol="0" anchor="ctr"/>
-          <a:lstStyle/>
-          <a:p>
-            <a:pPr algn="ctr" indent="0" marL="0">
-              <a:buNone/>
-            </a:pPr>
-            <a:r>
-              <a:rPr lang="en-US" sz="1300" b="1" dirty="0">
-                <a:solidFill>
-                  <a:srgbClr val="FFFFFF"/>
-                </a:solidFill>
-                <a:latin typeface="Calibri" pitchFamily="34" charset="0"/>
-                <a:ea typeface="Calibri" pitchFamily="34" charset="-122"/>
-                <a:cs typeface="Calibri" pitchFamily="34" charset="-120"/>
-              </a:rPr>
-              <a:t>3</a:t>
-            </a:r>
-            <a:endParaRPr lang="en-US" sz="1300" dirty="0"/>
-          </a:p>
-        </p:txBody>
-      </p:sp>
-      <p:sp>
-        <p:nvSpPr>
-          <p:cNvPr id="12" name="Text 10"/>
-          <p:cNvSpPr/>
-          <p:nvPr/>
-        </p:nvSpPr>
-        <p:spPr>
-          <a:xfrm>
-            <a:off x="1234440" y="4562856"/>
-            <a:ext cx="10058400" cy="685800"/>
-          </a:xfrm>
-          <a:prstGeom prst="rect">
-            <a:avLst/>
-          </a:prstGeom>
-          <a:noFill/>
-          <a:ln/>
-        </p:spPr>
-        <p:txBody>
-          <a:bodyPr wrap="square" lIns="0" tIns="0" rIns="0" bIns="0" rtlCol="0" anchor="t"/>
-          <a:lstStyle/>
-          <a:p>
-            <a:pPr indent="0" marL="0">
-              <a:buNone/>
-            </a:pPr>
-            <a:r>
-              <a:rPr lang="en-US" sz="1450" dirty="0">
-                <a:solidFill>
-                  <a:srgbClr val="CADCFC"/>
-                </a:solidFill>
-                <a:latin typeface="Calibri" pitchFamily="34" charset="0"/>
-                <a:ea typeface="Calibri" pitchFamily="34" charset="-122"/>
-                <a:cs typeface="Calibri" pitchFamily="34" charset="-120"/>
-              </a:rPr>
-              <a:t>→ dポイント固有の弱点ではなく、業界全体がキャリア基盤に紐づく偏りを抱えている</a:t>
-            </a:r>
-            <a:endParaRPr lang="en-US" sz="1450" dirty="0"/>
-          </a:p>
-        </p:txBody>
-      </p:sp>
-      <p:sp>
-        <p:nvSpPr>
-          <p:cNvPr id="13" name="Shape 11"/>
-          <p:cNvSpPr/>
-          <p:nvPr/>
-        </p:nvSpPr>
-        <p:spPr>
-          <a:xfrm>
-            <a:off x="731520" y="5458968"/>
-            <a:ext cx="292608" cy="292608"/>
-          </a:xfrm>
-          <a:prstGeom prst="ellipse">
-            <a:avLst/>
-          </a:prstGeom>
-          <a:solidFill>
-            <a:srgbClr val="3AA0FF"/>
-          </a:solidFill>
-          <a:ln/>
-        </p:spPr>
-      </p:sp>
-      <p:sp>
-        <p:nvSpPr>
-          <p:cNvPr id="14" name="Text 12"/>
-          <p:cNvSpPr/>
-          <p:nvPr/>
-        </p:nvSpPr>
-        <p:spPr>
-          <a:xfrm>
-            <a:off x="731520" y="5458968"/>
-            <a:ext cx="292608" cy="292608"/>
-          </a:xfrm>
-          <a:prstGeom prst="rect">
-            <a:avLst/>
-          </a:prstGeom>
-          <a:noFill/>
-          <a:ln/>
-        </p:spPr>
-        <p:txBody>
-          <a:bodyPr wrap="square" lIns="0" tIns="0" rIns="0" bIns="0" rtlCol="0" anchor="ctr"/>
-          <a:lstStyle/>
-          <a:p>
-            <a:pPr algn="ctr" indent="0" marL="0">
-              <a:buNone/>
-            </a:pPr>
-            <a:r>
-              <a:rPr lang="en-US" sz="1300" b="1" dirty="0">
-                <a:solidFill>
-                  <a:srgbClr val="FFFFFF"/>
-                </a:solidFill>
-                <a:latin typeface="Calibri" pitchFamily="34" charset="0"/>
-                <a:ea typeface="Calibri" pitchFamily="34" charset="-122"/>
-                <a:cs typeface="Calibri" pitchFamily="34" charset="-120"/>
-              </a:rPr>
-              <a:t>4</a:t>
-            </a:r>
-            <a:endParaRPr lang="en-US" sz="1300" dirty="0"/>
-          </a:p>
-        </p:txBody>
-      </p:sp>
-      <p:sp>
-        <p:nvSpPr>
-          <p:cNvPr id="15" name="Text 13"/>
-          <p:cNvSpPr/>
-          <p:nvPr/>
-        </p:nvSpPr>
-        <p:spPr>
-          <a:xfrm>
-            <a:off x="1234440" y="5404104"/>
-            <a:ext cx="10058400" cy="685800"/>
-          </a:xfrm>
-          <a:prstGeom prst="rect">
-            <a:avLst/>
-          </a:prstGeom>
-          <a:noFill/>
-          <a:ln/>
-        </p:spPr>
-        <p:txBody>
-          <a:bodyPr wrap="square" lIns="0" tIns="0" rIns="0" bIns="0" rtlCol="0" anchor="t"/>
-          <a:lstStyle/>
-          <a:p>
-            <a:pPr indent="0" marL="0">
-              <a:buNone/>
-            </a:pPr>
-            <a:r>
-              <a:rPr lang="en-US" sz="1450" b="1" dirty="0">
-                <a:solidFill>
-                  <a:srgbClr val="FFFFFF"/>
-                </a:solidFill>
-                <a:latin typeface="Calibri" pitchFamily="34" charset="0"/>
-                <a:ea typeface="Calibri" pitchFamily="34" charset="-122"/>
-                <a:cs typeface="Calibri" pitchFamily="34" charset="-120"/>
-              </a:rPr>
-              <a:t>この偏りを最初に解消する企業が、生成AI時代の行動データ資産で優位に立てる</a:t>
-            </a:r>
-            <a:endParaRPr lang="en-US" sz="1450" dirty="0"/>
           </a:p>
         </p:txBody>
       </p:sp>
